--- a/S1-CL2-Cloud-Disaster-Recovery/delivery/topic_04/Topic_04_Slides.pptx
+++ b/S1-CL2-Cloud-Disaster-Recovery/delivery/topic_04/Topic_04_Slides.pptx
@@ -3388,7 +3388,7 @@
           <a:noFill/>
         </p:spPr>
         <p:txBody>
-          <a:bodyPr wrap="square" anchor="t" lIns="0" rIns="0" tIns="0" bIns="0">
+          <a:bodyPr wrap="square" anchor="ctr" lIns="0" rIns="0" tIns="0" bIns="0">
             <a:spAutoFit/>
           </a:bodyPr>
           <a:lstStyle/>
@@ -3405,7 +3405,7 @@
               </a:spcAft>
             </a:pPr>
             <a:r>
-              <a:rPr sz="1800" b="1" i="0">
+              <a:rPr sz="2400" b="1" i="0">
                 <a:solidFill>
                   <a:srgbClr val="EDAB0C"/>
                 </a:solidFill>
@@ -3414,7 +3414,7 @@
               <a:t>■  </a:t>
             </a:r>
             <a:r>
-              <a:rPr sz="1800" b="0" i="0">
+              <a:rPr sz="2400" b="0" i="0">
                 <a:solidFill>
                   <a:srgbClr val="2A2929"/>
                 </a:solidFill>
@@ -3436,7 +3436,7 @@
               </a:spcAft>
             </a:pPr>
             <a:r>
-              <a:rPr sz="1800" b="1" i="0">
+              <a:rPr sz="2400" b="1" i="0">
                 <a:solidFill>
                   <a:srgbClr val="EDAB0C"/>
                 </a:solidFill>
@@ -3445,7 +3445,7 @@
               <a:t>■  </a:t>
             </a:r>
             <a:r>
-              <a:rPr sz="1800" b="0" i="0">
+              <a:rPr sz="2400" b="0" i="0">
                 <a:solidFill>
                   <a:srgbClr val="2A2929"/>
                 </a:solidFill>
@@ -3467,7 +3467,7 @@
               </a:spcAft>
             </a:pPr>
             <a:r>
-              <a:rPr sz="1800" b="1" i="0">
+              <a:rPr sz="2400" b="1" i="0">
                 <a:solidFill>
                   <a:srgbClr val="EDAB0C"/>
                 </a:solidFill>
@@ -3476,7 +3476,7 @@
               <a:t>■  </a:t>
             </a:r>
             <a:r>
-              <a:rPr sz="1800" b="0" i="0">
+              <a:rPr sz="2400" b="0" i="0">
                 <a:solidFill>
                   <a:srgbClr val="2A2929"/>
                 </a:solidFill>
@@ -3730,7 +3730,7 @@
           <a:noFill/>
         </p:spPr>
         <p:txBody>
-          <a:bodyPr wrap="square" anchor="t" lIns="0" rIns="0" tIns="0" bIns="0">
+          <a:bodyPr wrap="square" anchor="ctr" lIns="0" rIns="0" tIns="0" bIns="0">
             <a:spAutoFit/>
           </a:bodyPr>
           <a:lstStyle/>
@@ -3747,7 +3747,7 @@
               </a:spcAft>
             </a:pPr>
             <a:r>
-              <a:rPr sz="1800" b="1" i="0">
+              <a:rPr sz="2400" b="1" i="0">
                 <a:solidFill>
                   <a:srgbClr val="EDAB0C"/>
                 </a:solidFill>
@@ -3756,7 +3756,7 @@
               <a:t>■  </a:t>
             </a:r>
             <a:r>
-              <a:rPr sz="1800" b="0" i="0">
+              <a:rPr sz="2400" b="0" i="0">
                 <a:solidFill>
                   <a:srgbClr val="2A2929"/>
                 </a:solidFill>
@@ -3778,7 +3778,7 @@
               </a:spcAft>
             </a:pPr>
             <a:r>
-              <a:rPr sz="1800" b="1" i="0">
+              <a:rPr sz="2400" b="1" i="0">
                 <a:solidFill>
                   <a:srgbClr val="EDAB0C"/>
                 </a:solidFill>
@@ -3787,7 +3787,7 @@
               <a:t>■  </a:t>
             </a:r>
             <a:r>
-              <a:rPr sz="1800" b="0" i="0">
+              <a:rPr sz="2400" b="0" i="0">
                 <a:solidFill>
                   <a:srgbClr val="2A2929"/>
                 </a:solidFill>
@@ -3809,7 +3809,7 @@
               </a:spcAft>
             </a:pPr>
             <a:r>
-              <a:rPr sz="1800" b="1" i="0">
+              <a:rPr sz="2400" b="1" i="0">
                 <a:solidFill>
                   <a:srgbClr val="EDAB0C"/>
                 </a:solidFill>
@@ -3818,7 +3818,7 @@
               <a:t>■  </a:t>
             </a:r>
             <a:r>
-              <a:rPr sz="1800" b="0" i="0">
+              <a:rPr sz="2400" b="0" i="0">
                 <a:solidFill>
                   <a:srgbClr val="2A2929"/>
                 </a:solidFill>
@@ -4808,7 +4808,7 @@
           <a:noFill/>
         </p:spPr>
         <p:txBody>
-          <a:bodyPr wrap="square" anchor="t" lIns="0" rIns="0" tIns="0" bIns="0">
+          <a:bodyPr wrap="square" anchor="ctr" lIns="0" rIns="0" tIns="0" bIns="0">
             <a:spAutoFit/>
           </a:bodyPr>
           <a:lstStyle/>
@@ -4825,7 +4825,7 @@
               </a:spcAft>
             </a:pPr>
             <a:r>
-              <a:rPr sz="1800" b="1" i="0">
+              <a:rPr sz="2400" b="1" i="0">
                 <a:solidFill>
                   <a:srgbClr val="EDAB0C"/>
                 </a:solidFill>
@@ -4834,7 +4834,7 @@
               <a:t>■  </a:t>
             </a:r>
             <a:r>
-              <a:rPr sz="1800" b="0" i="0">
+              <a:rPr sz="2400" b="0" i="0">
                 <a:solidFill>
                   <a:srgbClr val="2A2929"/>
                 </a:solidFill>
@@ -4856,7 +4856,7 @@
               </a:spcAft>
             </a:pPr>
             <a:r>
-              <a:rPr sz="1800" b="1" i="0">
+              <a:rPr sz="2400" b="1" i="0">
                 <a:solidFill>
                   <a:srgbClr val="EDAB0C"/>
                 </a:solidFill>
@@ -4865,7 +4865,7 @@
               <a:t>■  </a:t>
             </a:r>
             <a:r>
-              <a:rPr sz="1800" b="0" i="0">
+              <a:rPr sz="2400" b="0" i="0">
                 <a:solidFill>
                   <a:srgbClr val="2A2929"/>
                 </a:solidFill>
@@ -4887,7 +4887,7 @@
               </a:spcAft>
             </a:pPr>
             <a:r>
-              <a:rPr sz="1800" b="1" i="0">
+              <a:rPr sz="2400" b="1" i="0">
                 <a:solidFill>
                   <a:srgbClr val="EDAB0C"/>
                 </a:solidFill>
@@ -4896,7 +4896,7 @@
               <a:t>■  </a:t>
             </a:r>
             <a:r>
-              <a:rPr sz="1800" b="0" i="0">
+              <a:rPr sz="2400" b="0" i="0">
                 <a:solidFill>
                   <a:srgbClr val="2A2929"/>
                 </a:solidFill>
@@ -5516,7 +5516,7 @@
           <a:noFill/>
         </p:spPr>
         <p:txBody>
-          <a:bodyPr wrap="square" anchor="t" lIns="0" rIns="0" tIns="0" bIns="0">
+          <a:bodyPr wrap="square" anchor="ctr" lIns="0" rIns="0" tIns="0" bIns="0">
             <a:spAutoFit/>
           </a:bodyPr>
           <a:lstStyle/>
@@ -5533,7 +5533,7 @@
               </a:spcAft>
             </a:pPr>
             <a:r>
-              <a:rPr sz="1800" b="1" i="0">
+              <a:rPr sz="2400" b="1" i="0">
                 <a:solidFill>
                   <a:srgbClr val="EDAB0C"/>
                 </a:solidFill>
@@ -5542,7 +5542,7 @@
               <a:t>■  </a:t>
             </a:r>
             <a:r>
-              <a:rPr sz="1800" b="0" i="0">
+              <a:rPr sz="2400" b="0" i="0">
                 <a:solidFill>
                   <a:srgbClr val="2A2929"/>
                 </a:solidFill>
@@ -5564,7 +5564,7 @@
               </a:spcAft>
             </a:pPr>
             <a:r>
-              <a:rPr sz="1800" b="1" i="0">
+              <a:rPr sz="2400" b="1" i="0">
                 <a:solidFill>
                   <a:srgbClr val="EDAB0C"/>
                 </a:solidFill>
@@ -5573,7 +5573,7 @@
               <a:t>■  </a:t>
             </a:r>
             <a:r>
-              <a:rPr sz="1800" b="0" i="0">
+              <a:rPr sz="2400" b="0" i="0">
                 <a:solidFill>
                   <a:srgbClr val="2A2929"/>
                 </a:solidFill>
@@ -5595,7 +5595,7 @@
               </a:spcAft>
             </a:pPr>
             <a:r>
-              <a:rPr sz="1800" b="1" i="0">
+              <a:rPr sz="2400" b="1" i="0">
                 <a:solidFill>
                   <a:srgbClr val="EDAB0C"/>
                 </a:solidFill>
@@ -5604,7 +5604,7 @@
               <a:t>■  </a:t>
             </a:r>
             <a:r>
-              <a:rPr sz="1800" b="0" i="0">
+              <a:rPr sz="2400" b="0" i="0">
                 <a:solidFill>
                   <a:srgbClr val="2A2929"/>
                 </a:solidFill>
@@ -7891,7 +7891,7 @@
           <a:noFill/>
         </p:spPr>
         <p:txBody>
-          <a:bodyPr wrap="square" anchor="t" lIns="0" rIns="0" tIns="0" bIns="0">
+          <a:bodyPr wrap="square" anchor="ctr" lIns="0" rIns="0" tIns="0" bIns="0">
             <a:spAutoFit/>
           </a:bodyPr>
           <a:lstStyle/>
@@ -7908,7 +7908,7 @@
               </a:spcAft>
             </a:pPr>
             <a:r>
-              <a:rPr sz="1800" b="1" i="0">
+              <a:rPr sz="2400" b="1" i="0">
                 <a:solidFill>
                   <a:srgbClr val="EDAB0C"/>
                 </a:solidFill>
@@ -7917,7 +7917,7 @@
               <a:t>■  </a:t>
             </a:r>
             <a:r>
-              <a:rPr sz="1800" b="0" i="0">
+              <a:rPr sz="2400" b="0" i="0">
                 <a:solidFill>
                   <a:srgbClr val="2A2929"/>
                 </a:solidFill>
@@ -7939,7 +7939,7 @@
               </a:spcAft>
             </a:pPr>
             <a:r>
-              <a:rPr sz="1800" b="1" i="0">
+              <a:rPr sz="2400" b="1" i="0">
                 <a:solidFill>
                   <a:srgbClr val="EDAB0C"/>
                 </a:solidFill>
@@ -7948,7 +7948,7 @@
               <a:t>■  </a:t>
             </a:r>
             <a:r>
-              <a:rPr sz="1800" b="0" i="0">
+              <a:rPr sz="2400" b="0" i="0">
                 <a:solidFill>
                   <a:srgbClr val="2A2929"/>
                 </a:solidFill>
@@ -7970,7 +7970,7 @@
               </a:spcAft>
             </a:pPr>
             <a:r>
-              <a:rPr sz="1800" b="1" i="0">
+              <a:rPr sz="2400" b="1" i="0">
                 <a:solidFill>
                   <a:srgbClr val="EDAB0C"/>
                 </a:solidFill>
@@ -7979,7 +7979,7 @@
               <a:t>■  </a:t>
             </a:r>
             <a:r>
-              <a:rPr sz="1800" b="0" i="0">
+              <a:rPr sz="2400" b="0" i="0">
                 <a:solidFill>
                   <a:srgbClr val="2A2929"/>
                 </a:solidFill>
@@ -8001,7 +8001,7 @@
               </a:spcAft>
             </a:pPr>
             <a:r>
-              <a:rPr sz="1800" b="1" i="0">
+              <a:rPr sz="2400" b="1" i="0">
                 <a:solidFill>
                   <a:srgbClr val="EDAB0C"/>
                 </a:solidFill>
@@ -8010,7 +8010,7 @@
               <a:t>■  </a:t>
             </a:r>
             <a:r>
-              <a:rPr sz="1800" b="0" i="0">
+              <a:rPr sz="2400" b="0" i="0">
                 <a:solidFill>
                   <a:srgbClr val="2A2929"/>
                 </a:solidFill>
@@ -9002,7 +9002,7 @@
           <a:noFill/>
         </p:spPr>
         <p:txBody>
-          <a:bodyPr wrap="square" anchor="t" lIns="0" rIns="0" tIns="0" bIns="0">
+          <a:bodyPr wrap="square" anchor="ctr" lIns="0" rIns="0" tIns="0" bIns="0">
             <a:spAutoFit/>
           </a:bodyPr>
           <a:lstStyle/>
@@ -9019,7 +9019,7 @@
               </a:spcAft>
             </a:pPr>
             <a:r>
-              <a:rPr sz="1800" b="1" i="0">
+              <a:rPr sz="2400" b="1" i="0">
                 <a:solidFill>
                   <a:srgbClr val="EDAB0C"/>
                 </a:solidFill>
@@ -9028,7 +9028,7 @@
               <a:t>■  </a:t>
             </a:r>
             <a:r>
-              <a:rPr sz="1800" b="0" i="0">
+              <a:rPr sz="2400" b="0" i="0">
                 <a:solidFill>
                   <a:srgbClr val="2A2929"/>
                 </a:solidFill>
@@ -9050,7 +9050,7 @@
               </a:spcAft>
             </a:pPr>
             <a:r>
-              <a:rPr sz="1800" b="1" i="0">
+              <a:rPr sz="2400" b="1" i="0">
                 <a:solidFill>
                   <a:srgbClr val="EDAB0C"/>
                 </a:solidFill>
@@ -9059,7 +9059,7 @@
               <a:t>■  </a:t>
             </a:r>
             <a:r>
-              <a:rPr sz="1800" b="0" i="0">
+              <a:rPr sz="2400" b="0" i="0">
                 <a:solidFill>
                   <a:srgbClr val="2A2929"/>
                 </a:solidFill>
@@ -9081,7 +9081,7 @@
               </a:spcAft>
             </a:pPr>
             <a:r>
-              <a:rPr sz="1800" b="1" i="0">
+              <a:rPr sz="2400" b="1" i="0">
                 <a:solidFill>
                   <a:srgbClr val="EDAB0C"/>
                 </a:solidFill>
@@ -9090,7 +9090,7 @@
               <a:t>■  </a:t>
             </a:r>
             <a:r>
-              <a:rPr sz="1800" b="0" i="0">
+              <a:rPr sz="2400" b="0" i="0">
                 <a:solidFill>
                   <a:srgbClr val="2A2929"/>
                 </a:solidFill>
@@ -10080,7 +10080,7 @@
           <a:noFill/>
         </p:spPr>
         <p:txBody>
-          <a:bodyPr wrap="square" anchor="t" lIns="0" rIns="0" tIns="0" bIns="0">
+          <a:bodyPr wrap="square" anchor="ctr" lIns="0" rIns="0" tIns="0" bIns="0">
             <a:spAutoFit/>
           </a:bodyPr>
           <a:lstStyle/>
@@ -10097,7 +10097,7 @@
               </a:spcAft>
             </a:pPr>
             <a:r>
-              <a:rPr sz="1800" b="1" i="0">
+              <a:rPr sz="2400" b="1" i="0">
                 <a:solidFill>
                   <a:srgbClr val="EDAB0C"/>
                 </a:solidFill>
@@ -10106,7 +10106,7 @@
               <a:t>■  </a:t>
             </a:r>
             <a:r>
-              <a:rPr sz="1800" b="0" i="0">
+              <a:rPr sz="2400" b="0" i="0">
                 <a:solidFill>
                   <a:srgbClr val="2A2929"/>
                 </a:solidFill>
@@ -10128,7 +10128,7 @@
               </a:spcAft>
             </a:pPr>
             <a:r>
-              <a:rPr sz="1800" b="1" i="0">
+              <a:rPr sz="2400" b="1" i="0">
                 <a:solidFill>
                   <a:srgbClr val="EDAB0C"/>
                 </a:solidFill>
@@ -10137,7 +10137,7 @@
               <a:t>■  </a:t>
             </a:r>
             <a:r>
-              <a:rPr sz="1800" b="0" i="0">
+              <a:rPr sz="2400" b="0" i="0">
                 <a:solidFill>
                   <a:srgbClr val="2A2929"/>
                 </a:solidFill>
@@ -10159,7 +10159,7 @@
               </a:spcAft>
             </a:pPr>
             <a:r>
-              <a:rPr sz="1800" b="1" i="0">
+              <a:rPr sz="2400" b="1" i="0">
                 <a:solidFill>
                   <a:srgbClr val="EDAB0C"/>
                 </a:solidFill>
@@ -10168,7 +10168,7 @@
               <a:t>■  </a:t>
             </a:r>
             <a:r>
-              <a:rPr sz="1800" b="0" i="0">
+              <a:rPr sz="2400" b="0" i="0">
                 <a:solidFill>
                   <a:srgbClr val="2A2929"/>
                 </a:solidFill>

--- a/S1-CL2-Cloud-Disaster-Recovery/delivery/topic_04/Topic_04_Slides.pptx
+++ b/S1-CL2-Cloud-Disaster-Recovery/delivery/topic_04/Topic_04_Slides.pptx
@@ -7,23 +7,23 @@
   <p:sldIdLst>
     <p:sldId id="256" r:id="rId7"/>
     <p:sldId id="257" r:id="rId8"/>
-    <p:sldId id="258" r:id="rId9"/>
-    <p:sldId id="259" r:id="rId10"/>
-    <p:sldId id="260" r:id="rId11"/>
-    <p:sldId id="261" r:id="rId12"/>
-    <p:sldId id="262" r:id="rId13"/>
-    <p:sldId id="263" r:id="rId14"/>
-    <p:sldId id="264" r:id="rId15"/>
-    <p:sldId id="265" r:id="rId16"/>
-    <p:sldId id="266" r:id="rId17"/>
-    <p:sldId id="267" r:id="rId18"/>
-    <p:sldId id="268" r:id="rId19"/>
-    <p:sldId id="269" r:id="rId20"/>
-    <p:sldId id="270" r:id="rId21"/>
-    <p:sldId id="271" r:id="rId22"/>
-    <p:sldId id="272" r:id="rId23"/>
-    <p:sldId id="273" r:id="rId24"/>
-    <p:sldId id="274" r:id="rId25"/>
+    <p:sldId id="258" r:id="rId10"/>
+    <p:sldId id="259" r:id="rId11"/>
+    <p:sldId id="260" r:id="rId12"/>
+    <p:sldId id="261" r:id="rId13"/>
+    <p:sldId id="262" r:id="rId14"/>
+    <p:sldId id="263" r:id="rId15"/>
+    <p:sldId id="264" r:id="rId16"/>
+    <p:sldId id="265" r:id="rId17"/>
+    <p:sldId id="266" r:id="rId18"/>
+    <p:sldId id="267" r:id="rId19"/>
+    <p:sldId id="268" r:id="rId20"/>
+    <p:sldId id="269" r:id="rId21"/>
+    <p:sldId id="270" r:id="rId22"/>
+    <p:sldId id="271" r:id="rId23"/>
+    <p:sldId id="272" r:id="rId24"/>
+    <p:sldId id="273" r:id="rId25"/>
+    <p:sldId id="274" r:id="rId26"/>
   </p:sldIdLst>
   <p:sldSz cx="12191695" cy="6858000" type="screen4x3"/>
   <p:notesSz cx="6858000" cy="9144000"/>
@@ -123,6 +123,1636 @@
     </a:lvl9pPr>
   </p:defaultTextStyle>
 </p:presentation>
+</file>
+
+<file path=ppt/notesMasters/notesMaster1.xml><?xml version="1.0" encoding="utf-8"?>
+<p:notesMaster xmlns:a="http://schemas.openxmlformats.org/drawingml/2006/main" xmlns:p="http://schemas.openxmlformats.org/presentationml/2006/main" xmlns:r="http://schemas.openxmlformats.org/officeDocument/2006/relationships">
+  <p:cSld>
+    <p:bg>
+      <p:bgRef idx="1001">
+        <a:schemeClr val="bg1"/>
+      </p:bgRef>
+    </p:bg>
+    <p:spTree>
+      <p:nvGrpSpPr>
+        <p:cNvPr id="1" name=""/>
+        <p:cNvGrpSpPr/>
+        <p:nvPr/>
+      </p:nvGrpSpPr>
+      <p:grpSpPr>
+        <a:xfrm>
+          <a:off x="0" y="0"/>
+          <a:ext cx="0" cy="0"/>
+          <a:chOff x="0" y="0"/>
+          <a:chExt cx="0" cy="0"/>
+        </a:xfrm>
+      </p:grpSpPr>
+      <p:sp>
+        <p:nvSpPr>
+          <p:cNvPr id="2" name="Header Placeholder 1"/>
+          <p:cNvSpPr>
+            <a:spLocks noGrp="1"/>
+          </p:cNvSpPr>
+          <p:nvPr>
+            <p:ph type="hdr" sz="quarter"/>
+          </p:nvPr>
+        </p:nvSpPr>
+        <p:spPr>
+          <a:xfrm>
+            <a:off x="0" y="0"/>
+            <a:ext cx="2971800" cy="457200"/>
+          </a:xfrm>
+          <a:prstGeom prst="rect">
+            <a:avLst/>
+          </a:prstGeom>
+        </p:spPr>
+        <p:txBody>
+          <a:bodyPr vert="horz" lIns="91440" tIns="45720" rIns="91440" bIns="45720" rtlCol="0"/>
+          <a:lstStyle>
+            <a:lvl1pPr algn="l">
+              <a:defRPr sz="1200"/>
+            </a:lvl1pPr>
+          </a:lstStyle>
+          <a:p>
+            <a:endParaRPr lang="en-US"/>
+          </a:p>
+        </p:txBody>
+      </p:sp>
+      <p:sp>
+        <p:nvSpPr>
+          <p:cNvPr id="3" name="Date Placeholder 2"/>
+          <p:cNvSpPr>
+            <a:spLocks noGrp="1"/>
+          </p:cNvSpPr>
+          <p:nvPr>
+            <p:ph type="dt" idx="1"/>
+          </p:nvPr>
+        </p:nvSpPr>
+        <p:spPr>
+          <a:xfrm>
+            <a:off x="3884613" y="0"/>
+            <a:ext cx="2971800" cy="457200"/>
+          </a:xfrm>
+          <a:prstGeom prst="rect">
+            <a:avLst/>
+          </a:prstGeom>
+        </p:spPr>
+        <p:txBody>
+          <a:bodyPr vert="horz" lIns="91440" tIns="45720" rIns="91440" bIns="45720" rtlCol="0"/>
+          <a:lstStyle>
+            <a:lvl1pPr algn="r">
+              <a:defRPr sz="1200"/>
+            </a:lvl1pPr>
+          </a:lstStyle>
+          <a:p>
+            <a:fld id="{0F89C1C7-3DCD-1040-A9CF-14679D8B5DDD}" type="datetimeFigureOut">
+              <a:rPr lang="en-US" smtClean="0"/>
+              <a:t>10/17/16</a:t>
+            </a:fld>
+            <a:endParaRPr lang="en-US"/>
+          </a:p>
+        </p:txBody>
+      </p:sp>
+      <p:sp>
+        <p:nvSpPr>
+          <p:cNvPr id="4" name="Slide Image Placeholder 3"/>
+          <p:cNvSpPr>
+            <a:spLocks noGrp="1" noRot="1" noChangeAspect="1"/>
+          </p:cNvSpPr>
+          <p:nvPr>
+            <p:ph type="sldImg" idx="2"/>
+          </p:nvPr>
+        </p:nvSpPr>
+        <p:spPr>
+          <a:xfrm>
+            <a:off x="1143000" y="685800"/>
+            <a:ext cx="4572000" cy="3429000"/>
+          </a:xfrm>
+          <a:prstGeom prst="rect">
+            <a:avLst/>
+          </a:prstGeom>
+          <a:noFill/>
+          <a:ln w="12700">
+            <a:solidFill>
+              <a:prstClr val="black"/>
+            </a:solidFill>
+          </a:ln>
+        </p:spPr>
+        <p:txBody>
+          <a:bodyPr vert="horz" lIns="91440" tIns="45720" rIns="91440" bIns="45720" rtlCol="0" anchor="ctr"/>
+          <a:lstStyle/>
+          <a:p>
+            <a:endParaRPr lang="en-US"/>
+          </a:p>
+        </p:txBody>
+      </p:sp>
+      <p:sp>
+        <p:nvSpPr>
+          <p:cNvPr id="5" name="Notes Placeholder 4"/>
+          <p:cNvSpPr>
+            <a:spLocks noGrp="1"/>
+          </p:cNvSpPr>
+          <p:nvPr>
+            <p:ph type="body" sz="quarter" idx="3"/>
+          </p:nvPr>
+        </p:nvSpPr>
+        <p:spPr>
+          <a:xfrm>
+            <a:off x="685800" y="4343400"/>
+            <a:ext cx="5486400" cy="4114800"/>
+          </a:xfrm>
+          <a:prstGeom prst="rect">
+            <a:avLst/>
+          </a:prstGeom>
+        </p:spPr>
+        <p:txBody>
+          <a:bodyPr vert="horz" lIns="91440" tIns="45720" rIns="91440" bIns="45720" rtlCol="0"/>
+          <a:lstStyle/>
+          <a:p>
+            <a:pPr lvl="0"/>
+            <a:r>
+              <a:rPr lang="en-US" smtClean="0"/>
+              <a:t>Click to edit Master text styles</a:t>
+            </a:r>
+          </a:p>
+          <a:p>
+            <a:pPr lvl="1"/>
+            <a:r>
+              <a:rPr lang="en-US" smtClean="0"/>
+              <a:t>Second level</a:t>
+            </a:r>
+          </a:p>
+          <a:p>
+            <a:pPr lvl="2"/>
+            <a:r>
+              <a:rPr lang="en-US" smtClean="0"/>
+              <a:t>Third level</a:t>
+            </a:r>
+          </a:p>
+          <a:p>
+            <a:pPr lvl="3"/>
+            <a:r>
+              <a:rPr lang="en-US" smtClean="0"/>
+              <a:t>Fourth level</a:t>
+            </a:r>
+          </a:p>
+          <a:p>
+            <a:pPr lvl="4"/>
+            <a:r>
+              <a:rPr lang="en-US" smtClean="0"/>
+              <a:t>Fifth level</a:t>
+            </a:r>
+            <a:endParaRPr lang="en-US"/>
+          </a:p>
+        </p:txBody>
+      </p:sp>
+      <p:sp>
+        <p:nvSpPr>
+          <p:cNvPr id="6" name="Footer Placeholder 5"/>
+          <p:cNvSpPr>
+            <a:spLocks noGrp="1"/>
+          </p:cNvSpPr>
+          <p:nvPr>
+            <p:ph type="ftr" sz="quarter" idx="4"/>
+          </p:nvPr>
+        </p:nvSpPr>
+        <p:spPr>
+          <a:xfrm>
+            <a:off x="0" y="8685213"/>
+            <a:ext cx="2971800" cy="457200"/>
+          </a:xfrm>
+          <a:prstGeom prst="rect">
+            <a:avLst/>
+          </a:prstGeom>
+        </p:spPr>
+        <p:txBody>
+          <a:bodyPr vert="horz" lIns="91440" tIns="45720" rIns="91440" bIns="45720" rtlCol="0" anchor="b"/>
+          <a:lstStyle>
+            <a:lvl1pPr algn="l">
+              <a:defRPr sz="1200"/>
+            </a:lvl1pPr>
+          </a:lstStyle>
+          <a:p>
+            <a:endParaRPr lang="en-US"/>
+          </a:p>
+        </p:txBody>
+      </p:sp>
+      <p:sp>
+        <p:nvSpPr>
+          <p:cNvPr id="7" name="Slide Number Placeholder 6"/>
+          <p:cNvSpPr>
+            <a:spLocks noGrp="1"/>
+          </p:cNvSpPr>
+          <p:nvPr>
+            <p:ph type="sldNum" sz="quarter" idx="5"/>
+          </p:nvPr>
+        </p:nvSpPr>
+        <p:spPr>
+          <a:xfrm>
+            <a:off x="3884613" y="8685213"/>
+            <a:ext cx="2971800" cy="457200"/>
+          </a:xfrm>
+          <a:prstGeom prst="rect">
+            <a:avLst/>
+          </a:prstGeom>
+        </p:spPr>
+        <p:txBody>
+          <a:bodyPr vert="horz" lIns="91440" tIns="45720" rIns="91440" bIns="45720" rtlCol="0" anchor="b"/>
+          <a:lstStyle>
+            <a:lvl1pPr algn="r">
+              <a:defRPr sz="1200"/>
+            </a:lvl1pPr>
+          </a:lstStyle>
+          <a:p>
+            <a:fld id="{BB5E49A5-4136-284D-997B-48E1D791AD67}" type="slidenum">
+              <a:rPr lang="en-US" smtClean="0"/>
+              <a:t>‹#›</a:t>
+            </a:fld>
+            <a:endParaRPr lang="en-US"/>
+          </a:p>
+        </p:txBody>
+      </p:sp>
+    </p:spTree>
+    <p:extLst>
+      <p:ext uri="{BB962C8B-B14F-4D97-AF65-F5344CB8AC3E}">
+        <p14:creationId xmlns:p14="http://schemas.microsoft.com/office/powerpoint/2010/main" val="2623252185"/>
+      </p:ext>
+    </p:extLst>
+  </p:cSld>
+  <p:clrMap bg1="lt1" tx1="dk1" bg2="lt2" tx2="dk2" accent1="accent1" accent2="accent2" accent3="accent3" accent4="accent4" accent5="accent5" accent6="accent6" hlink="hlink" folHlink="folHlink"/>
+  <p:notesStyle>
+    <a:lvl1pPr marL="0" algn="l" defTabSz="457200" rtl="0" eaLnBrk="1" latinLnBrk="0" hangingPunct="1">
+      <a:defRPr sz="1200" kern="1200">
+        <a:solidFill>
+          <a:schemeClr val="tx1"/>
+        </a:solidFill>
+        <a:latin typeface="+mn-lt"/>
+        <a:ea typeface="+mn-ea"/>
+        <a:cs typeface="+mn-cs"/>
+      </a:defRPr>
+    </a:lvl1pPr>
+    <a:lvl2pPr marL="457200" algn="l" defTabSz="457200" rtl="0" eaLnBrk="1" latinLnBrk="0" hangingPunct="1">
+      <a:defRPr sz="1200" kern="1200">
+        <a:solidFill>
+          <a:schemeClr val="tx1"/>
+        </a:solidFill>
+        <a:latin typeface="+mn-lt"/>
+        <a:ea typeface="+mn-ea"/>
+        <a:cs typeface="+mn-cs"/>
+      </a:defRPr>
+    </a:lvl2pPr>
+    <a:lvl3pPr marL="914400" algn="l" defTabSz="457200" rtl="0" eaLnBrk="1" latinLnBrk="0" hangingPunct="1">
+      <a:defRPr sz="1200" kern="1200">
+        <a:solidFill>
+          <a:schemeClr val="tx1"/>
+        </a:solidFill>
+        <a:latin typeface="+mn-lt"/>
+        <a:ea typeface="+mn-ea"/>
+        <a:cs typeface="+mn-cs"/>
+      </a:defRPr>
+    </a:lvl3pPr>
+    <a:lvl4pPr marL="1371600" algn="l" defTabSz="457200" rtl="0" eaLnBrk="1" latinLnBrk="0" hangingPunct="1">
+      <a:defRPr sz="1200" kern="1200">
+        <a:solidFill>
+          <a:schemeClr val="tx1"/>
+        </a:solidFill>
+        <a:latin typeface="+mn-lt"/>
+        <a:ea typeface="+mn-ea"/>
+        <a:cs typeface="+mn-cs"/>
+      </a:defRPr>
+    </a:lvl4pPr>
+    <a:lvl5pPr marL="1828800" algn="l" defTabSz="457200" rtl="0" eaLnBrk="1" latinLnBrk="0" hangingPunct="1">
+      <a:defRPr sz="1200" kern="1200">
+        <a:solidFill>
+          <a:schemeClr val="tx1"/>
+        </a:solidFill>
+        <a:latin typeface="+mn-lt"/>
+        <a:ea typeface="+mn-ea"/>
+        <a:cs typeface="+mn-cs"/>
+      </a:defRPr>
+    </a:lvl5pPr>
+    <a:lvl6pPr marL="2286000" algn="l" defTabSz="457200" rtl="0" eaLnBrk="1" latinLnBrk="0" hangingPunct="1">
+      <a:defRPr sz="1200" kern="1200">
+        <a:solidFill>
+          <a:schemeClr val="tx1"/>
+        </a:solidFill>
+        <a:latin typeface="+mn-lt"/>
+        <a:ea typeface="+mn-ea"/>
+        <a:cs typeface="+mn-cs"/>
+      </a:defRPr>
+    </a:lvl6pPr>
+    <a:lvl7pPr marL="2743200" algn="l" defTabSz="457200" rtl="0" eaLnBrk="1" latinLnBrk="0" hangingPunct="1">
+      <a:defRPr sz="1200" kern="1200">
+        <a:solidFill>
+          <a:schemeClr val="tx1"/>
+        </a:solidFill>
+        <a:latin typeface="+mn-lt"/>
+        <a:ea typeface="+mn-ea"/>
+        <a:cs typeface="+mn-cs"/>
+      </a:defRPr>
+    </a:lvl7pPr>
+    <a:lvl8pPr marL="3200400" algn="l" defTabSz="457200" rtl="0" eaLnBrk="1" latinLnBrk="0" hangingPunct="1">
+      <a:defRPr sz="1200" kern="1200">
+        <a:solidFill>
+          <a:schemeClr val="tx1"/>
+        </a:solidFill>
+        <a:latin typeface="+mn-lt"/>
+        <a:ea typeface="+mn-ea"/>
+        <a:cs typeface="+mn-cs"/>
+      </a:defRPr>
+    </a:lvl8pPr>
+    <a:lvl9pPr marL="3657600" algn="l" defTabSz="457200" rtl="0" eaLnBrk="1" latinLnBrk="0" hangingPunct="1">
+      <a:defRPr sz="1200" kern="1200">
+        <a:solidFill>
+          <a:schemeClr val="tx1"/>
+        </a:solidFill>
+        <a:latin typeface="+mn-lt"/>
+        <a:ea typeface="+mn-ea"/>
+        <a:cs typeface="+mn-cs"/>
+      </a:defRPr>
+    </a:lvl9pPr>
+  </p:notesStyle>
+</p:notesMaster>
+</file>
+
+<file path=ppt/notesSlides/notesSlide1.xml><?xml version="1.0" encoding="utf-8"?>
+<p:notes xmlns:a="http://schemas.openxmlformats.org/drawingml/2006/main" xmlns:p="http://schemas.openxmlformats.org/presentationml/2006/main" xmlns:r="http://schemas.openxmlformats.org/officeDocument/2006/relationships">
+  <p:cSld>
+    <p:spTree>
+      <p:nvGrpSpPr>
+        <p:cNvPr id="1" name=""/>
+        <p:cNvGrpSpPr/>
+        <p:nvPr/>
+      </p:nvGrpSpPr>
+      <p:grpSpPr>
+        <a:xfrm>
+          <a:off x="0" y="0"/>
+          <a:ext cx="0" cy="0"/>
+          <a:chOff x="0" y="0"/>
+          <a:chExt cx="0" cy="0"/>
+        </a:xfrm>
+      </p:grpSpPr>
+      <p:sp>
+        <p:nvSpPr>
+          <p:cNvPr id="2" name="Slide Image Placeholder 1"/>
+          <p:cNvSpPr>
+            <a:spLocks noGrp="1"/>
+          </p:cNvSpPr>
+          <p:nvPr>
+            <p:ph type="sldImg" idx="2"/>
+          </p:nvPr>
+        </p:nvSpPr>
+        <p:spPr/>
+      </p:sp>
+      <p:sp>
+        <p:nvSpPr>
+          <p:cNvPr id="3" name="Notes Placeholder 2"/>
+          <p:cNvSpPr>
+            <a:spLocks noGrp="1"/>
+          </p:cNvSpPr>
+          <p:nvPr>
+            <p:ph type="body" idx="3" sz="quarter"/>
+          </p:nvPr>
+        </p:nvSpPr>
+        <p:spPr/>
+        <p:txBody>
+          <a:bodyPr/>
+          <a:lstStyle/>
+          <a:p>
+            <a:r>
+              <a:t>Frame the finalisation half — turn Topic 3's analysis into a chosen strategy and a documented plan. Set the three moves and the boundary.</a:t>
+            </a:r>
+          </a:p>
+          <a:p>
+            <a:r>
+              <a:t>• First bullet: callback — Topic 3 set the requirements, objectives and RISKS; Topic 4 turns them into a PLAN. Today consumes yesterday's output; keep the impact analysis on the desk.</a:t>
+            </a:r>
+          </a:p>
+          <a:p>
+            <a:r>
+              <a:t>• Second bullet: name the three moves — EVALUATE the DR strategies, CHOOSE one to the objectives, WRITE the plan. In that order.</a:t>
+            </a:r>
+          </a:p>
+          <a:p>
+            <a:r>
+              <a:t>• Third bullet (accent it): the plan must MAP to the prioritised risks AND meet the RTO/RPO you set — those two Topic-3 outputs are the acceptance test for everything today.</a:t>
+            </a:r>
+          </a:p>
+          <a:p>
+            <a:r>
+              <a:t>• Hold the boundary (last bullet): PLANNING ONLY — recovery is not executed here. A documented plan is the deliverable, not a failover.</a:t>
+            </a:r>
+          </a:p>
+          <a:p>
+            <a:r>
+              <a:t>Misconception to pre-empt: "the plan is just picking a DR strategy." No — a plan is strategy PLUS runbook, escalation, comms and DNS failover, aligned to the risks and provably meeting RTO/RPO. The strategy is one part.</a:t>
+            </a:r>
+          </a:p>
+          <a:p>
+            <a:r>
+              <a:t>Question to pose: "Before you choose a DR strategy, what two Topic-3 numbers must you already have in hand?" (the RTO/RPO objectives and the ranked risks — the strategy is chosen to meet them).</a:t>
+            </a:r>
+          </a:p>
+          <a:p>
+            <a:r>
+              <a:t>UoC/AT1 tie: this Topic develops [ICTCLD501 PC 3.1]–[ICTCLD501 PC 3.4], [ICTCLD501 PC 4.1]–[ICTCLD501 PC 4.3], [ICTCLD501 PE 1]/[ICTCLD501 PE 3] and [ICTCLD501 KE 3]/[ICTCLD501 KE 4], evidenced in AT1 Part B §5–6 and the KE appendix.</a:t>
+            </a:r>
+          </a:p>
+        </p:txBody>
+      </p:sp>
+      <p:sp>
+        <p:nvSpPr>
+          <p:cNvPr id="4" name="Slide Number Placeholder 3"/>
+          <p:cNvSpPr>
+            <a:spLocks noGrp="1"/>
+          </p:cNvSpPr>
+          <p:nvPr>
+            <p:ph type="sldNum" idx="5" sz="quarter"/>
+          </p:nvPr>
+        </p:nvSpPr>
+        <p:spPr/>
+      </p:sp>
+    </p:spTree>
+  </p:cSld>
+  <p:clrMapOvr>
+    <a:masterClrMapping/>
+  </p:clrMapOvr>
+</p:notes>
+</file>
+
+<file path=ppt/notesSlides/notesSlide10.xml><?xml version="1.0" encoding="utf-8"?>
+<p:notes xmlns:a="http://schemas.openxmlformats.org/drawingml/2006/main" xmlns:p="http://schemas.openxmlformats.org/presentationml/2006/main" xmlns:r="http://schemas.openxmlformats.org/officeDocument/2006/relationships">
+  <p:cSld>
+    <p:spTree>
+      <p:nvGrpSpPr>
+        <p:cNvPr id="1" name=""/>
+        <p:cNvGrpSpPr/>
+        <p:nvPr/>
+      </p:nvGrpSpPr>
+      <p:grpSpPr>
+        <a:xfrm>
+          <a:off x="0" y="0"/>
+          <a:ext cx="0" cy="0"/>
+          <a:chOff x="0" y="0"/>
+          <a:chExt cx="0" cy="0"/>
+        </a:xfrm>
+      </p:grpSpPr>
+      <p:sp>
+        <p:nvSpPr>
+          <p:cNvPr id="2" name="Slide Image Placeholder 1"/>
+          <p:cNvSpPr>
+            <a:spLocks noGrp="1"/>
+          </p:cNvSpPr>
+          <p:nvPr>
+            <p:ph type="sldImg" idx="2"/>
+          </p:nvPr>
+        </p:nvSpPr>
+        <p:spPr/>
+      </p:sp>
+      <p:sp>
+        <p:nvSpPr>
+          <p:cNvPr id="3" name="Notes Placeholder 2"/>
+          <p:cNvSpPr>
+            <a:spLocks noGrp="1"/>
+          </p:cNvSpPr>
+          <p:nvPr>
+            <p:ph type="body" idx="3" sz="quarter"/>
+          </p:nvPr>
+        </p:nvSpPr>
+        <p:spPr/>
+        <p:txBody>
+          <a:bodyPr/>
+          <a:lstStyle/>
+          <a:p>
+            <a:r>
+              <a:t>The keystone C3 slide — the runbook: ordered steps with timings that provably meet RTO/RPO. Use the runbook-flow diagram to walk the sequence and add up the time live.</a:t>
+            </a:r>
+          </a:p>
+          <a:p>
+            <a:r>
+              <a:t>• First bullet: outline the recovery STEPS, their TIMELINES, key FEATURES and the SERVICE PROVIDERS involved — a runbook is specific and sequenced, not a paragraph of intent.</a:t>
+            </a:r>
+          </a:p>
+          <a:p>
+            <a:r>
+              <a:t>• Second bullet (accent it): SHOW how the sequence MEETS the RTO/RPO targets — the timing has to ADD UP (PE 3). Sum the step timings and compare to the RTO; if the total exceeds it, the plan fails and must be revised.</a:t>
+            </a:r>
+          </a:p>
+          <a:p>
+            <a:r>
+              <a:t>• Third bullet: NAME who executes each step and what "RECOVERED" looks like — a definition of done, and an owner per step. No anonymous actions.</a:t>
+            </a:r>
+          </a:p>
+          <a:p>
+            <a:r>
+              <a:t>• On the diagram: trace detect → declare → recover-in-priority-order → verify, and point at where the RTO clock starts and stops.</a:t>
+            </a:r>
+          </a:p>
+          <a:p>
+            <a:r>
+              <a:t>Misconception to pre-empt: "if I list the right steps, RTO is met." No — you must ARITHMETICALLY show the timeline adds up to within RTO/RPO; PE 3 is explicitly about DOCUMENTING how the targets are reached, not just naming steps.</a:t>
+            </a:r>
+          </a:p>
+          <a:p>
+            <a:r>
+              <a:t>Question to pose: "Your steps total 90 minutes but the RTO is 60 — what has to change?" (re-sequence, parallelise, or step up the DR strategy; the timing must fit the target).</a:t>
+            </a:r>
+          </a:p>
+          <a:p>
+            <a:r>
+              <a:t>UoC/AT1 tie: [ICTCLD501 PC 4.2] (steps, timelines, features, providers) + [ICTCLD501 PE 3] (document how the plan reaches RTO/RPO) — AT1 Part B B13; this runbook is the PE 3 evidence.</a:t>
+            </a:r>
+          </a:p>
+        </p:txBody>
+      </p:sp>
+      <p:sp>
+        <p:nvSpPr>
+          <p:cNvPr id="4" name="Slide Number Placeholder 3"/>
+          <p:cNvSpPr>
+            <a:spLocks noGrp="1"/>
+          </p:cNvSpPr>
+          <p:nvPr>
+            <p:ph type="sldNum" idx="5" sz="quarter"/>
+          </p:nvPr>
+        </p:nvSpPr>
+        <p:spPr/>
+      </p:sp>
+    </p:spTree>
+  </p:cSld>
+  <p:clrMapOvr>
+    <a:masterClrMapping/>
+  </p:clrMapOvr>
+</p:notes>
+</file>
+
+<file path=ppt/notesSlides/notesSlide11.xml><?xml version="1.0" encoding="utf-8"?>
+<p:notes xmlns:a="http://schemas.openxmlformats.org/drawingml/2006/main" xmlns:p="http://schemas.openxmlformats.org/presentationml/2006/main" xmlns:r="http://schemas.openxmlformats.org/officeDocument/2006/relationships">
+  <p:cSld>
+    <p:spTree>
+      <p:nvGrpSpPr>
+        <p:cNvPr id="1" name=""/>
+        <p:cNvGrpSpPr/>
+        <p:nvPr/>
+      </p:nvGrpSpPr>
+      <p:grpSpPr>
+        <a:xfrm>
+          <a:off x="0" y="0"/>
+          <a:ext cx="0" cy="0"/>
+          <a:chOff x="0" y="0"/>
+          <a:chExt cx="0" cy="0"/>
+        </a:xfrm>
+      </p:grpSpPr>
+      <p:sp>
+        <p:nvSpPr>
+          <p:cNvPr id="2" name="Slide Image Placeholder 1"/>
+          <p:cNvSpPr>
+            <a:spLocks noGrp="1"/>
+          </p:cNvSpPr>
+          <p:nvPr>
+            <p:ph type="sldImg" idx="2"/>
+          </p:nvPr>
+        </p:nvSpPr>
+        <p:spPr/>
+      </p:sp>
+      <p:sp>
+        <p:nvSpPr>
+          <p:cNvPr id="3" name="Notes Placeholder 2"/>
+          <p:cNvSpPr>
+            <a:spLocks noGrp="1"/>
+          </p:cNvSpPr>
+          <p:nvPr>
+            <p:ph type="body" idx="3" sz="quarter"/>
+          </p:nvPr>
+        </p:nvSpPr>
+        <p:spPr/>
+        <p:txBody>
+          <a:bodyPr/>
+          <a:lstStyle/>
+          <a:p>
+            <a:r>
+              <a:t>Teach the DOCUMENTATION step — turning the aligned actions and runbook into the finished, professional DR plan. This is the Part B deliverable itself.</a:t>
+            </a:r>
+          </a:p>
+          <a:p>
+            <a:r>
+              <a:t>• First bullet: DOCUMENT the plan to the BUSINESS NEEDS, in the YAT TEMPLATE and PLAIN professional English — a client-ready document, written for the business, not a pile of engineer's notes.</a:t>
+            </a:r>
+          </a:p>
+          <a:p>
+            <a:r>
+              <a:t>• Second bullet: COMPLETE, internally CONSISTENT, and TRACEABLE back to the requirements and risks — the reader can follow any action back to the risk and requirement that drove it.</a:t>
+            </a:r>
+          </a:p>
+          <a:p>
+            <a:r>
+              <a:t>• Third bullet (accent it): this documented plan IS the Part B deliverable — everything in Topics 3–4 exists to produce this artefact.</a:t>
+            </a:r>
+          </a:p>
+          <a:p>
+            <a:r>
+              <a:t>Misconception to pre-empt: "documenting is a formatting pass at the end." No — documenting to business needs, to the template, and traceably is an assessed criterion (PC 4.3); it's the deliverable, not decoration.</a:t>
+            </a:r>
+          </a:p>
+          <a:p>
+            <a:r>
+              <a:t>Question to pose: "A marker reads your plan cold — what makes it traceable back to the risks and requirements?" (every recovery action references the prioritised risk and the objective it serves — no orphan actions).</a:t>
+            </a:r>
+          </a:p>
+          <a:p>
+            <a:r>
+              <a:t>UoC/AT1 tie: [ICTCLD501 PC 4.3] (document the DR plan to business needs) — AT1 Part B B14; the documented plan is the Part B §6 deliverable.</a:t>
+            </a:r>
+          </a:p>
+        </p:txBody>
+      </p:sp>
+      <p:sp>
+        <p:nvSpPr>
+          <p:cNvPr id="4" name="Slide Number Placeholder 3"/>
+          <p:cNvSpPr>
+            <a:spLocks noGrp="1"/>
+          </p:cNvSpPr>
+          <p:nvPr>
+            <p:ph type="sldNum" idx="5" sz="quarter"/>
+          </p:nvPr>
+        </p:nvSpPr>
+        <p:spPr/>
+      </p:sp>
+    </p:spTree>
+  </p:cSld>
+  <p:clrMapOvr>
+    <a:masterClrMapping/>
+  </p:clrMapOvr>
+</p:notes>
+</file>
+
+<file path=ppt/notesSlides/notesSlide12.xml><?xml version="1.0" encoding="utf-8"?>
+<p:notes xmlns:a="http://schemas.openxmlformats.org/drawingml/2006/main" xmlns:p="http://schemas.openxmlformats.org/presentationml/2006/main" xmlns:r="http://schemas.openxmlformats.org/officeDocument/2006/relationships">
+  <p:cSld>
+    <p:spTree>
+      <p:nvGrpSpPr>
+        <p:cNvPr id="1" name=""/>
+        <p:cNvGrpSpPr/>
+        <p:nvPr/>
+      </p:nvGrpSpPr>
+      <p:grpSpPr>
+        <a:xfrm>
+          <a:off x="0" y="0"/>
+          <a:ext cx="0" cy="0"/>
+          <a:chOff x="0" y="0"/>
+          <a:chExt cx="0" cy="0"/>
+        </a:xfrm>
+      </p:grpSpPr>
+      <p:sp>
+        <p:nvSpPr>
+          <p:cNvPr id="2" name="Slide Image Placeholder 1"/>
+          <p:cNvSpPr>
+            <a:spLocks noGrp="1"/>
+          </p:cNvSpPr>
+          <p:nvPr>
+            <p:ph type="sldImg" idx="2"/>
+          </p:nvPr>
+        </p:nvSpPr>
+        <p:spPr/>
+      </p:sp>
+      <p:sp>
+        <p:nvSpPr>
+          <p:cNvPr id="3" name="Notes Placeholder 2"/>
+          <p:cNvSpPr>
+            <a:spLocks noGrp="1"/>
+          </p:cNvSpPr>
+          <p:nvPr>
+            <p:ph type="body" idx="3" sz="quarter"/>
+          </p:nvPr>
+        </p:nvSpPr>
+        <p:spPr/>
+        <p:txBody>
+          <a:bodyPr/>
+          <a:lstStyle/>
+          <a:p>
+            <a:r>
+              <a:t>Facilitation — the biggest activity in the Topic: students write the full DR plan for the practice scenario. The capstone AT1 Part B §6 rehearsal, building on everything from Topics 3–4.</a:t>
+            </a:r>
+          </a:p>
+          <a:p>
+            <a:r>
+              <a:t>Tell students: "For the practice scenario, write the recovery plan — align an owned action to each prioritised risk, lay out the steps with timelines and providers, and MAKE THE ARITHMETIC show the sequence meets your RTO/RPO. Produce it as a documented runbook."</a:t>
+            </a:r>
+          </a:p>
+          <a:p>
+            <a:r>
+              <a:t>Steps (put on the board):</a:t>
+            </a:r>
+          </a:p>
+          <a:p>
+            <a:r>
+              <a:t>1. Map each prioritised risk to an owned recovery action (cover at least your three major risks).</a:t>
+            </a:r>
+          </a:p>
+          <a:p>
+            <a:r>
+              <a:t>2. Sequence the steps with timelines and the service providers involved.</a:t>
+            </a:r>
+          </a:p>
+          <a:p>
+            <a:r>
+              <a:t>3. Add up the timings and show they meet RTO/RPO — revise the sequence if they don't.</a:t>
+            </a:r>
+          </a:p>
+          <a:p>
+            <a:r>
+              <a:t>4. Document it to business needs, in plain professional English (the YAT template shape).</a:t>
+            </a:r>
+          </a:p>
+          <a:p>
+            <a:r>
+              <a:t>Must produce: a documented runbook — aligned actions, sequenced steps with timings, an explicit RTO/RPO argument.</a:t>
+            </a:r>
+          </a:p>
+          <a:p>
+            <a:r>
+              <a:t>Timing: ~30 min. Where they get stuck: they write steps but never prove the timing meets RTO (make them add it up — PE 3), and they leave actions unowned (every step needs a "who").</a:t>
+            </a:r>
+          </a:p>
+          <a:p>
+            <a:r>
+              <a:t>Share-back prompt: "Walk one risk from the register through to its recovery action and show the clock fits RTO" — surfaces alignment AND timing.</a:t>
+            </a:r>
+          </a:p>
+          <a:p>
+            <a:r>
+              <a:t>No-leakage note: practice scenario only (comparable, not identical); AT1 evidences the same plan-writing skill on the assessed system — keep them on the practice brief.</a:t>
+            </a:r>
+          </a:p>
+          <a:p>
+            <a:r>
+              <a:t>UoC/AT1 tie: [ICTCLD501 PC 4.1] · [ICTCLD501 PC 4.2] · [ICTCLD501 PC 4.3] · [ICTCLD501 PE 1] · [ICTCLD501 PE 3] — the full plan-writing core of AT1 Part B §6.</a:t>
+            </a:r>
+          </a:p>
+        </p:txBody>
+      </p:sp>
+      <p:sp>
+        <p:nvSpPr>
+          <p:cNvPr id="4" name="Slide Number Placeholder 3"/>
+          <p:cNvSpPr>
+            <a:spLocks noGrp="1"/>
+          </p:cNvSpPr>
+          <p:nvPr>
+            <p:ph type="sldNum" idx="5" sz="quarter"/>
+          </p:nvPr>
+        </p:nvSpPr>
+        <p:spPr/>
+      </p:sp>
+    </p:spTree>
+  </p:cSld>
+  <p:clrMapOvr>
+    <a:masterClrMapping/>
+  </p:clrMapOvr>
+</p:notes>
+</file>
+
+<file path=ppt/notesSlides/notesSlide2.xml><?xml version="1.0" encoding="utf-8"?>
+<p:notes xmlns:a="http://schemas.openxmlformats.org/drawingml/2006/main" xmlns:p="http://schemas.openxmlformats.org/presentationml/2006/main" xmlns:r="http://schemas.openxmlformats.org/officeDocument/2006/relationships">
+  <p:cSld>
+    <p:spTree>
+      <p:nvGrpSpPr>
+        <p:cNvPr id="1" name=""/>
+        <p:cNvGrpSpPr/>
+        <p:nvPr/>
+      </p:nvGrpSpPr>
+      <p:grpSpPr>
+        <a:xfrm>
+          <a:off x="0" y="0"/>
+          <a:ext cx="0" cy="0"/>
+          <a:chOff x="0" y="0"/>
+          <a:chExt cx="0" cy="0"/>
+        </a:xfrm>
+      </p:grpSpPr>
+      <p:sp>
+        <p:nvSpPr>
+          <p:cNvPr id="2" name="Slide Image Placeholder 1"/>
+          <p:cNvSpPr>
+            <a:spLocks noGrp="1"/>
+          </p:cNvSpPr>
+          <p:nvPr>
+            <p:ph type="sldImg" idx="2"/>
+          </p:nvPr>
+        </p:nvSpPr>
+        <p:spPr/>
+      </p:sp>
+      <p:sp>
+        <p:nvSpPr>
+          <p:cNvPr id="3" name="Notes Placeholder 2"/>
+          <p:cNvSpPr>
+            <a:spLocks noGrp="1"/>
+          </p:cNvSpPr>
+          <p:nvPr>
+            <p:ph type="body" idx="3" sz="quarter"/>
+          </p:nvPr>
+        </p:nvSpPr>
+        <p:spPr/>
+        <p:txBody>
+          <a:bodyPr/>
+          <a:lstStyle/>
+          <a:p>
+            <a:r>
+              <a:t>Teach the four cloud DR strategies as a SPECTRUM of cost vs speed — the core KE of the Topic. Walk them cheapest/slowest to priciest/fastest; the trade-off table on the next slide reinforces this.</a:t>
+            </a:r>
+          </a:p>
+          <a:p>
+            <a:r>
+              <a:t>• BACKUP &amp; RESTORE: cheapest, slowest — restore from backups after an event. Nothing runs until you need it; recovery is measured in hours.</a:t>
+            </a:r>
+          </a:p>
+          <a:p>
+            <a:r>
+              <a:t>• PILOT LIGHT: core DATA live in a second region, minimal standby; scale UP on failover. The data's already there; you spin up compute when disaster strikes.</a:t>
+            </a:r>
+          </a:p>
+          <a:p>
+            <a:r>
+              <a:t>• WARM STANDBY: a scaled-DOWN running copy, ready to take load quickly. It's already running, just small — faster failover, higher standing cost.</a:t>
+            </a:r>
+          </a:p>
+          <a:p>
+            <a:r>
+              <a:t>• ACTIVE-ACTIVE: full running copies, NEAR-ZERO RTO/RPO, HIGHEST cost. Both sides live all the time; you pay for a full duplicate.</a:t>
+            </a:r>
+          </a:p>
+          <a:p>
+            <a:r>
+              <a:t>Misconception to pre-empt: "active-active is the 'best' one." No — the BEST strategy is the SIMPLEST that meets the objectives; active-active is overkill (and overspend) unless the RTO/RPO genuinely demand it.</a:t>
+            </a:r>
+          </a:p>
+          <a:p>
+            <a:r>
+              <a:t>Question to pose: "As you move down the list, what are you buying, and what are you paying for it?" (faster recovery / less data loss, paid for with rising standing cost and complexity).</a:t>
+            </a:r>
+          </a:p>
+          <a:p>
+            <a:r>
+              <a:t>UoC/AT1 tie: [ICTCLD501 KE 3] (DR techniques for cloud) + [ICTCLD501 PC 3.1] (develop a range of DR solutions) — AT1 Part B B8 and the KE appendix.</a:t>
+            </a:r>
+          </a:p>
+        </p:txBody>
+      </p:sp>
+      <p:sp>
+        <p:nvSpPr>
+          <p:cNvPr id="4" name="Slide Number Placeholder 3"/>
+          <p:cNvSpPr>
+            <a:spLocks noGrp="1"/>
+          </p:cNvSpPr>
+          <p:nvPr>
+            <p:ph type="sldNum" idx="5" sz="quarter"/>
+          </p:nvPr>
+        </p:nvSpPr>
+        <p:spPr/>
+      </p:sp>
+    </p:spTree>
+  </p:cSld>
+  <p:clrMapOvr>
+    <a:masterClrMapping/>
+  </p:clrMapOvr>
+</p:notes>
+</file>
+
+<file path=ppt/notesSlides/notesSlide3.xml><?xml version="1.0" encoding="utf-8"?>
+<p:notes xmlns:a="http://schemas.openxmlformats.org/drawingml/2006/main" xmlns:p="http://schemas.openxmlformats.org/presentationml/2006/main" xmlns:r="http://schemas.openxmlformats.org/officeDocument/2006/relationships">
+  <p:cSld>
+    <p:spTree>
+      <p:nvGrpSpPr>
+        <p:cNvPr id="1" name=""/>
+        <p:cNvGrpSpPr/>
+        <p:nvPr/>
+      </p:nvGrpSpPr>
+      <p:grpSpPr>
+        <a:xfrm>
+          <a:off x="0" y="0"/>
+          <a:ext cx="0" cy="0"/>
+          <a:chOff x="0" y="0"/>
+          <a:chExt cx="0" cy="0"/>
+        </a:xfrm>
+      </p:grpSpPr>
+      <p:sp>
+        <p:nvSpPr>
+          <p:cNvPr id="2" name="Slide Image Placeholder 1"/>
+          <p:cNvSpPr>
+            <a:spLocks noGrp="1"/>
+          </p:cNvSpPr>
+          <p:nvPr>
+            <p:ph type="sldImg" idx="2"/>
+          </p:nvPr>
+        </p:nvSpPr>
+        <p:spPr/>
+      </p:sp>
+      <p:sp>
+        <p:nvSpPr>
+          <p:cNvPr id="3" name="Notes Placeholder 2"/>
+          <p:cNvSpPr>
+            <a:spLocks noGrp="1"/>
+          </p:cNvSpPr>
+          <p:nvPr>
+            <p:ph type="body" idx="3" sz="quarter"/>
+          </p:nvPr>
+        </p:nvSpPr>
+        <p:spPr/>
+        <p:txBody>
+          <a:bodyPr/>
+          <a:lstStyle/>
+          <a:p>
+            <a:r>
+              <a:t>Teach the CHOICE discipline — evaluate the four strategies against the Topic-3 objectives and pick deliberately. This is the assessable judgement, not the memorised list.</a:t>
+            </a:r>
+          </a:p>
+          <a:p>
+            <a:r>
+              <a:t>• First bullet: EVALUATE each strategy against the Topic-3 RTO/RPO and the BUDGET. You're matching a strategy's capability to your specific targets, not ranking them in the abstract.</a:t>
+            </a:r>
+          </a:p>
+          <a:p>
+            <a:r>
+              <a:t>• Second bullet: DEVELOP A RANGE of solutions, THEN choose the SIMPLEST that meets the requirements (PE 1). Showing the range considered is part of the evidence — don't jump straight to one.</a:t>
+            </a:r>
+          </a:p>
+          <a:p>
+            <a:r>
+              <a:t>• Third bullet (accent it): JUSTIFY the choice — "cheaper is right UNTIL it fails an objective." Start cheap and step up only when a target forces you to; that's the reasoning assessors look for.</a:t>
+            </a:r>
+          </a:p>
+          <a:p>
+            <a:r>
+              <a:t>Misconception to pre-empt: "choose the strongest strategy to be safe." No — choosing beyond the objectives is over-engineering and overspend; the mark is for the SIMPLEST strategy that still meets RTO/RPO and budget.</a:t>
+            </a:r>
+          </a:p>
+          <a:p>
+            <a:r>
+              <a:t>Question to pose: "Backup &amp; restore gives a 4-hour recovery but your RTO is 30 minutes — what's the CHEAPEST strategy that still meets it?" (step up the spectrum only as far as the objective forces — likely pilot light/warm standby).</a:t>
+            </a:r>
+          </a:p>
+          <a:p>
+            <a:r>
+              <a:t>UoC/AT1 tie: [ICTCLD501 PC 3.1] + [ICTCLD501 PE 1] (develop and evaluate a range, choose one) — AT1 Part B B8; the justification earns the criterion.</a:t>
+            </a:r>
+          </a:p>
+        </p:txBody>
+      </p:sp>
+      <p:sp>
+        <p:nvSpPr>
+          <p:cNvPr id="4" name="Slide Number Placeholder 3"/>
+          <p:cNvSpPr>
+            <a:spLocks noGrp="1"/>
+          </p:cNvSpPr>
+          <p:nvPr>
+            <p:ph type="sldNum" idx="5" sz="quarter"/>
+          </p:nvPr>
+        </p:nvSpPr>
+        <p:spPr/>
+      </p:sp>
+    </p:spTree>
+  </p:cSld>
+  <p:clrMapOvr>
+    <a:masterClrMapping/>
+  </p:clrMapOvr>
+</p:notes>
+</file>
+
+<file path=ppt/notesSlides/notesSlide4.xml><?xml version="1.0" encoding="utf-8"?>
+<p:notes xmlns:a="http://schemas.openxmlformats.org/drawingml/2006/main" xmlns:p="http://schemas.openxmlformats.org/presentationml/2006/main" xmlns:r="http://schemas.openxmlformats.org/officeDocument/2006/relationships">
+  <p:cSld>
+    <p:spTree>
+      <p:nvGrpSpPr>
+        <p:cNvPr id="1" name=""/>
+        <p:cNvGrpSpPr/>
+        <p:nvPr/>
+      </p:nvGrpSpPr>
+      <p:grpSpPr>
+        <a:xfrm>
+          <a:off x="0" y="0"/>
+          <a:ext cx="0" cy="0"/>
+          <a:chOff x="0" y="0"/>
+          <a:chExt cx="0" cy="0"/>
+        </a:xfrm>
+      </p:grpSpPr>
+      <p:sp>
+        <p:nvSpPr>
+          <p:cNvPr id="2" name="Slide Image Placeholder 1"/>
+          <p:cNvSpPr>
+            <a:spLocks noGrp="1"/>
+          </p:cNvSpPr>
+          <p:nvPr>
+            <p:ph type="sldImg" idx="2"/>
+          </p:nvPr>
+        </p:nvSpPr>
+        <p:spPr/>
+      </p:sp>
+      <p:sp>
+        <p:nvSpPr>
+          <p:cNvPr id="3" name="Notes Placeholder 2"/>
+          <p:cNvSpPr>
+            <a:spLocks noGrp="1"/>
+          </p:cNvSpPr>
+          <p:nvPr>
+            <p:ph type="body" idx="3" sz="quarter"/>
+          </p:nvPr>
+        </p:nvSpPr>
+        <p:spPr/>
+        <p:txBody>
+          <a:bodyPr/>
+          <a:lstStyle/>
+          <a:p>
+            <a:r>
+              <a:t>Facilitation — the C1 practice: evaluate the four strategies and choose one for the practice scenario. Rehearses AT1 Part B B8.</a:t>
+            </a:r>
+          </a:p>
+          <a:p>
+            <a:r>
+              <a:t>Tell students: "For the practice scenario, evaluate all four DR strategies against the RTO/RPO and budget you set in Topic 3 — then choose ONE and justify it. Show the range you considered, not just the winner."</a:t>
+            </a:r>
+          </a:p>
+          <a:p>
+            <a:r>
+              <a:t>Steps (put on the board):</a:t>
+            </a:r>
+          </a:p>
+          <a:p>
+            <a:r>
+              <a:t>1. Line up the four strategies against your objectives (use the trade-off table as a lens).</a:t>
+            </a:r>
+          </a:p>
+          <a:p>
+            <a:r>
+              <a:t>2. Eliminate the ones that miss RTO/RPO or blow the budget — say why each is out.</a:t>
+            </a:r>
+          </a:p>
+          <a:p>
+            <a:r>
+              <a:t>3. Choose the SIMPLEST survivor and justify it against RTO/RPO and cost.</a:t>
+            </a:r>
+          </a:p>
+          <a:p>
+            <a:r>
+              <a:t>Must produce: a short evaluation of all four plus a justified choice tied to the objectives.</a:t>
+            </a:r>
+          </a:p>
+          <a:p>
+            <a:r>
+              <a:t>Timing: ~20 min. Where they get stuck: they jump straight to active-active "to be safe" (push simplest-that-fits), and they choose with no numbers (make them cite their RTO/RPO).</a:t>
+            </a:r>
+          </a:p>
+          <a:p>
+            <a:r>
+              <a:t>Share-back prompt: "Name your choice and the objective that ruled out the cheaper option below it" — surfaces the step-up reasoning.</a:t>
+            </a:r>
+          </a:p>
+          <a:p>
+            <a:r>
+              <a:t>No-leakage note: practice scenario only (comparable, not identical); AT1 evidences the same evaluate-and-choose skill on the assessed system — keep them on the practice brief.</a:t>
+            </a:r>
+          </a:p>
+          <a:p>
+            <a:r>
+              <a:t>UoC/AT1 tie: [ICTCLD501 PC 3.1] · [ICTCLD501 PE 1] · [ICTCLD501 KE 3] — develop a range, evaluate, choose (AT1 Part B B8).</a:t>
+            </a:r>
+          </a:p>
+        </p:txBody>
+      </p:sp>
+      <p:sp>
+        <p:nvSpPr>
+          <p:cNvPr id="4" name="Slide Number Placeholder 3"/>
+          <p:cNvSpPr>
+            <a:spLocks noGrp="1"/>
+          </p:cNvSpPr>
+          <p:nvPr>
+            <p:ph type="sldNum" idx="5" sz="quarter"/>
+          </p:nvPr>
+        </p:nvSpPr>
+        <p:spPr/>
+      </p:sp>
+    </p:spTree>
+  </p:cSld>
+  <p:clrMapOvr>
+    <a:masterClrMapping/>
+  </p:clrMapOvr>
+</p:notes>
+</file>
+
+<file path=ppt/notesSlides/notesSlide5.xml><?xml version="1.0" encoding="utf-8"?>
+<p:notes xmlns:a="http://schemas.openxmlformats.org/drawingml/2006/main" xmlns:p="http://schemas.openxmlformats.org/presentationml/2006/main" xmlns:r="http://schemas.openxmlformats.org/officeDocument/2006/relationships">
+  <p:cSld>
+    <p:spTree>
+      <p:nvGrpSpPr>
+        <p:cNvPr id="1" name=""/>
+        <p:cNvGrpSpPr/>
+        <p:nvPr/>
+      </p:nvGrpSpPr>
+      <p:grpSpPr>
+        <a:xfrm>
+          <a:off x="0" y="0"/>
+          <a:ext cx="0" cy="0"/>
+          <a:chOff x="0" y="0"/>
+          <a:chExt cx="0" cy="0"/>
+        </a:xfrm>
+      </p:grpSpPr>
+      <p:sp>
+        <p:nvSpPr>
+          <p:cNvPr id="2" name="Slide Image Placeholder 1"/>
+          <p:cNvSpPr>
+            <a:spLocks noGrp="1"/>
+          </p:cNvSpPr>
+          <p:nvPr>
+            <p:ph type="sldImg" idx="2"/>
+          </p:nvPr>
+        </p:nvSpPr>
+        <p:spPr/>
+      </p:sp>
+      <p:sp>
+        <p:nvSpPr>
+          <p:cNvPr id="3" name="Notes Placeholder 2"/>
+          <p:cNvSpPr>
+            <a:spLocks noGrp="1"/>
+          </p:cNvSpPr>
+          <p:nvPr>
+            <p:ph type="body" idx="3" sz="quarter"/>
+          </p:nvPr>
+        </p:nvSpPr>
+        <p:spPr/>
+        <p:txBody>
+          <a:bodyPr/>
+          <a:lstStyle/>
+          <a:p>
+            <a:r>
+              <a:t>Open C2 — the rest of a plan beyond the strategy. Teach leaning on NATIVE protections and PRIORITISING recovery against the ranked risks.</a:t>
+            </a:r>
+          </a:p>
+          <a:p>
+            <a:r>
+              <a:t>• First bullet: use the vendor's NATIVE protections — automated backups, cross-region copy, durable/immutable storage. These are already reliable and cheap; build on them rather than rolling your own.</a:t>
+            </a:r>
+          </a:p>
+          <a:p>
+            <a:r>
+              <a:t>• Second bullet: PRIORITISE the recovery against the RISKS — restore the highest-severity, business-critical parts FIRST. This is where Topic 3's ranking pays off; recovery order is set by severity, not convenience.</a:t>
+            </a:r>
+          </a:p>
+          <a:p>
+            <a:r>
+              <a:t>• Third bullet (accent it): native durability does the HEAVY LIFTING; your plan SEQUENCES and GOVERNS it. Your value-add is orchestration and priority, not re-implementing storage durability.</a:t>
+            </a:r>
+          </a:p>
+          <a:p>
+            <a:r>
+              <a:t>Misconception to pre-empt: "restore everything at once." No — you SEQUENCE recovery by severity/criticality; some systems wait. Priority order, driven by the impact analysis, is the assessable decision.</a:t>
+            </a:r>
+          </a:p>
+          <a:p>
+            <a:r>
+              <a:t>Question to pose: "In a real recovery you can't bring everything back simultaneously — what decides the order?" (the risk ranking / business criticality from Topic 3 — restore highest-severity, critical systems first).</a:t>
+            </a:r>
+          </a:p>
+          <a:p>
+            <a:r>
+              <a:t>UoC/AT1 tie: [ICTCLD501 PC 3.2] (prioritise recovery against risks) + [ICTCLD501 PC 3.4] (other DR components) + [ICTCLD501 KE 4] — AT1 Part B B11.</a:t>
+            </a:r>
+          </a:p>
+        </p:txBody>
+      </p:sp>
+      <p:sp>
+        <p:nvSpPr>
+          <p:cNvPr id="4" name="Slide Number Placeholder 3"/>
+          <p:cNvSpPr>
+            <a:spLocks noGrp="1"/>
+          </p:cNvSpPr>
+          <p:nvPr>
+            <p:ph type="sldNum" idx="5" sz="quarter"/>
+          </p:nvPr>
+        </p:nvSpPr>
+        <p:spPr/>
+      </p:sp>
+    </p:spTree>
+  </p:cSld>
+  <p:clrMapOvr>
+    <a:masterClrMapping/>
+  </p:clrMapOvr>
+</p:notes>
+</file>
+
+<file path=ppt/notesSlides/notesSlide6.xml><?xml version="1.0" encoding="utf-8"?>
+<p:notes xmlns:a="http://schemas.openxmlformats.org/drawingml/2006/main" xmlns:p="http://schemas.openxmlformats.org/presentationml/2006/main" xmlns:r="http://schemas.openxmlformats.org/officeDocument/2006/relationships">
+  <p:cSld>
+    <p:spTree>
+      <p:nvGrpSpPr>
+        <p:cNvPr id="1" name=""/>
+        <p:cNvGrpSpPr/>
+        <p:nvPr/>
+      </p:nvGrpSpPr>
+      <p:grpSpPr>
+        <a:xfrm>
+          <a:off x="0" y="0"/>
+          <a:ext cx="0" cy="0"/>
+          <a:chOff x="0" y="0"/>
+          <a:chExt cx="0" cy="0"/>
+        </a:xfrm>
+      </p:grpSpPr>
+      <p:sp>
+        <p:nvSpPr>
+          <p:cNvPr id="2" name="Slide Image Placeholder 1"/>
+          <p:cNvSpPr>
+            <a:spLocks noGrp="1"/>
+          </p:cNvSpPr>
+          <p:nvPr>
+            <p:ph type="sldImg" idx="2"/>
+          </p:nvPr>
+        </p:nvSpPr>
+        <p:spPr/>
+      </p:sp>
+      <p:sp>
+        <p:nvSpPr>
+          <p:cNvPr id="3" name="Notes Placeholder 2"/>
+          <p:cNvSpPr>
+            <a:spLocks noGrp="1"/>
+          </p:cNvSpPr>
+          <p:nvPr>
+            <p:ph type="body" idx="3" sz="quarter"/>
+          </p:nvPr>
+        </p:nvSpPr>
+        <p:spPr/>
+        <p:txBody>
+          <a:bodyPr/>
+          <a:lstStyle/>
+          <a:p>
+            <a:r>
+              <a:t>Teach the OTHER plan components — insurance as a complement, plus the operational parts that turn a strategy into a usable plan.</a:t>
+            </a:r>
+          </a:p>
+          <a:p>
+            <a:r>
+              <a:t>• First bullet: INSURANCE is a COMPLEMENTARY risk-transfer control — it covers RESIDUAL loss, it does NOT restore service. Money back is not uptime; it sits alongside recovery, never replaces it.</a:t>
+            </a:r>
+          </a:p>
+          <a:p>
+            <a:r>
+              <a:t>• Second bullet: name the OTHER components — the RUNBOOK, DECLARATION/ESCALATION, COMMUNICATIONS, and DNS FAILOVER. Each is a plan ingredient students forget because they fixate on the strategy.</a:t>
+            </a:r>
+          </a:p>
+          <a:p>
+            <a:r>
+              <a:t>• Third bullet (accent it): a plan is MORE than a strategy — it's WHO does WHAT, in WHAT ORDER, and how PEOPLE are TOLD. The human/process side is as assessed as the technical one.</a:t>
+            </a:r>
+          </a:p>
+          <a:p>
+            <a:r>
+              <a:t>Misconception to pre-empt: "insurance is an alternative to DR." No — it transfers residual financial risk; it buys none of your RTO back. It's a complementary control, listed alongside the recovery components, not instead of them.</a:t>
+            </a:r>
+          </a:p>
+          <a:p>
+            <a:r>
+              <a:t>Question to pose: "Your cloud provider fully refunds the outage — are you recovered?" (No — a refund isn't restored service; insurance covers residual loss, recovery restores the system).</a:t>
+            </a:r>
+          </a:p>
+          <a:p>
+            <a:r>
+              <a:t>UoC/AT1 tie: [ICTCLD501 PC 3.3] (insurance as a complementary control) + [ICTCLD501 PC 3.4] (identify other DR components) — AT1 Part B B11.</a:t>
+            </a:r>
+          </a:p>
+        </p:txBody>
+      </p:sp>
+      <p:sp>
+        <p:nvSpPr>
+          <p:cNvPr id="4" name="Slide Number Placeholder 3"/>
+          <p:cNvSpPr>
+            <a:spLocks noGrp="1"/>
+          </p:cNvSpPr>
+          <p:nvPr>
+            <p:ph type="sldNum" idx="5" sz="quarter"/>
+          </p:nvPr>
+        </p:nvSpPr>
+        <p:spPr/>
+      </p:sp>
+    </p:spTree>
+  </p:cSld>
+  <p:clrMapOvr>
+    <a:masterClrMapping/>
+  </p:clrMapOvr>
+</p:notes>
+</file>
+
+<file path=ppt/notesSlides/notesSlide7.xml><?xml version="1.0" encoding="utf-8"?>
+<p:notes xmlns:a="http://schemas.openxmlformats.org/drawingml/2006/main" xmlns:p="http://schemas.openxmlformats.org/presentationml/2006/main" xmlns:r="http://schemas.openxmlformats.org/officeDocument/2006/relationships">
+  <p:cSld>
+    <p:spTree>
+      <p:nvGrpSpPr>
+        <p:cNvPr id="1" name=""/>
+        <p:cNvGrpSpPr/>
+        <p:nvPr/>
+      </p:nvGrpSpPr>
+      <p:grpSpPr>
+        <a:xfrm>
+          <a:off x="0" y="0"/>
+          <a:ext cx="0" cy="0"/>
+          <a:chOff x="0" y="0"/>
+          <a:chExt cx="0" cy="0"/>
+        </a:xfrm>
+      </p:grpSpPr>
+      <p:sp>
+        <p:nvSpPr>
+          <p:cNvPr id="2" name="Slide Image Placeholder 1"/>
+          <p:cNvSpPr>
+            <a:spLocks noGrp="1"/>
+          </p:cNvSpPr>
+          <p:nvPr>
+            <p:ph type="sldImg" idx="2"/>
+          </p:nvPr>
+        </p:nvSpPr>
+        <p:spPr/>
+      </p:sp>
+      <p:sp>
+        <p:nvSpPr>
+          <p:cNvPr id="3" name="Notes Placeholder 2"/>
+          <p:cNvSpPr>
+            <a:spLocks noGrp="1"/>
+          </p:cNvSpPr>
+          <p:nvPr>
+            <p:ph type="body" idx="3" sz="quarter"/>
+          </p:nvPr>
+        </p:nvSpPr>
+        <p:spPr/>
+        <p:txBody>
+          <a:bodyPr/>
+          <a:lstStyle/>
+          <a:p>
+            <a:r>
+              <a:t>Teach the CONTINUITY STANDARDS — the recognised frameworks that give the plan structure and assurance. Vendor-neutral; brief but examinable (KE 4).</a:t>
+            </a:r>
+          </a:p>
+          <a:p>
+            <a:r>
+              <a:t>• First bullet: ISO/IEC 27031 — ICT READINESS for business continuity (the DR-relevant one); 27001/27002 — the security MANAGEMENT context around it. Know which standard covers what.</a:t>
+            </a:r>
+          </a:p>
+          <a:p>
+            <a:r>
+              <a:t>• Second bullet: standards give the plan a RECOGNISED STRUCTURE and assurance LANGUAGE — you're not inventing terms; you're speaking a language auditors and clients already trust.</a:t>
+            </a:r>
+          </a:p>
+          <a:p>
+            <a:r>
+              <a:t>• Third bullet (accent it): REFERENCE them so the plan is AUDITABLE, not ad hoc. Citing the standard is what lets an external party assure the plan.</a:t>
+            </a:r>
+          </a:p>
+          <a:p>
+            <a:r>
+              <a:t>Misconception to pre-empt: "we have to fully implement ISO 27031." No — at this level you REFERENCE the relevant standards to structure and justify the plan; certification is a separate organisational undertaking.</a:t>
+            </a:r>
+          </a:p>
+          <a:p>
+            <a:r>
+              <a:t>Question to pose: "Which of these standards is the one specifically about ICT readiness for continuity?" (27031 — 27001/27002 are the broader security-management context).</a:t>
+            </a:r>
+          </a:p>
+          <a:p>
+            <a:r>
+              <a:t>UoC/AT1 tie: [ICTCLD501 KE 4] (ISO/IEC 27001/27002/27031) — AT1 Part B KE appendix (B15).</a:t>
+            </a:r>
+          </a:p>
+        </p:txBody>
+      </p:sp>
+      <p:sp>
+        <p:nvSpPr>
+          <p:cNvPr id="4" name="Slide Number Placeholder 3"/>
+          <p:cNvSpPr>
+            <a:spLocks noGrp="1"/>
+          </p:cNvSpPr>
+          <p:nvPr>
+            <p:ph type="sldNum" idx="5" sz="quarter"/>
+          </p:nvPr>
+        </p:nvSpPr>
+        <p:spPr/>
+      </p:sp>
+    </p:spTree>
+  </p:cSld>
+  <p:clrMapOvr>
+    <a:masterClrMapping/>
+  </p:clrMapOvr>
+</p:notes>
+</file>
+
+<file path=ppt/notesSlides/notesSlide8.xml><?xml version="1.0" encoding="utf-8"?>
+<p:notes xmlns:a="http://schemas.openxmlformats.org/drawingml/2006/main" xmlns:p="http://schemas.openxmlformats.org/presentationml/2006/main" xmlns:r="http://schemas.openxmlformats.org/officeDocument/2006/relationships">
+  <p:cSld>
+    <p:spTree>
+      <p:nvGrpSpPr>
+        <p:cNvPr id="1" name=""/>
+        <p:cNvGrpSpPr/>
+        <p:nvPr/>
+      </p:nvGrpSpPr>
+      <p:grpSpPr>
+        <a:xfrm>
+          <a:off x="0" y="0"/>
+          <a:ext cx="0" cy="0"/>
+          <a:chOff x="0" y="0"/>
+          <a:chExt cx="0" cy="0"/>
+        </a:xfrm>
+      </p:grpSpPr>
+      <p:sp>
+        <p:nvSpPr>
+          <p:cNvPr id="2" name="Slide Image Placeholder 1"/>
+          <p:cNvSpPr>
+            <a:spLocks noGrp="1"/>
+          </p:cNvSpPr>
+          <p:nvPr>
+            <p:ph type="sldImg" idx="2"/>
+          </p:nvPr>
+        </p:nvSpPr>
+        <p:spPr/>
+      </p:sp>
+      <p:sp>
+        <p:nvSpPr>
+          <p:cNvPr id="3" name="Notes Placeholder 2"/>
+          <p:cNvSpPr>
+            <a:spLocks noGrp="1"/>
+          </p:cNvSpPr>
+          <p:nvPr>
+            <p:ph type="body" idx="3" sz="quarter"/>
+          </p:nvPr>
+        </p:nvSpPr>
+        <p:spPr/>
+        <p:txBody>
+          <a:bodyPr/>
+          <a:lstStyle/>
+          <a:p>
+            <a:r>
+              <a:t>Facilitation — the C2 practice: set the recovery PRIORITY and list the plan's other components for the practice scenario. Rehearses AT1 Part B B11.</a:t>
+            </a:r>
+          </a:p>
+          <a:p>
+            <a:r>
+              <a:t>Tell students: "For the practice scenario, set the recovery PRIORITY order against your ranked risks — then list the vendor native protections you'll lean on and the other plan components: runbook, escalation, comms, DNS failover."</a:t>
+            </a:r>
+          </a:p>
+          <a:p>
+            <a:r>
+              <a:t>Steps (put on the board):</a:t>
+            </a:r>
+          </a:p>
+          <a:p>
+            <a:r>
+              <a:t>1. Order the recovery by severity/criticality — what comes back first, second, third, and why.</a:t>
+            </a:r>
+          </a:p>
+          <a:p>
+            <a:r>
+              <a:t>2. List the native protections you'll build on (backups, cross-region copy, durable storage).</a:t>
+            </a:r>
+          </a:p>
+          <a:p>
+            <a:r>
+              <a:t>3. List the other components: runbook, declaration/escalation, communications, DNS failover — note insurance if relevant as a residual-loss control.</a:t>
+            </a:r>
+          </a:p>
+          <a:p>
+            <a:r>
+              <a:t>Must produce: a prioritised recovery order plus a components checklist (native protections + operational components).</a:t>
+            </a:r>
+          </a:p>
+          <a:p>
+            <a:r>
+              <a:t>Timing: ~20 min. Where they get stuck: they try to recover everything at once (force a priority order tied to the risk ranking), and they list only technical parts (prompt "who declares the disaster? how are people told?").</a:t>
+            </a:r>
+          </a:p>
+          <a:p>
+            <a:r>
+              <a:t>Share-back prompt: "What recovers first, and which risk ranking put it there?" — ties priority back to Topic 3.</a:t>
+            </a:r>
+          </a:p>
+          <a:p>
+            <a:r>
+              <a:t>No-leakage note: practice scenario only (comparable, not identical); AT1 evidences the same prioritise-and-components skill on the assessed system — keep them on the practice brief.</a:t>
+            </a:r>
+          </a:p>
+          <a:p>
+            <a:r>
+              <a:t>UoC/AT1 tie: [ICTCLD501 PC 3.2] · [ICTCLD501 PC 3.3] · [ICTCLD501 PC 3.4] · [ICTCLD501 KE 4] — prioritisation + the other plan components (AT1 Part B B11).</a:t>
+            </a:r>
+          </a:p>
+        </p:txBody>
+      </p:sp>
+      <p:sp>
+        <p:nvSpPr>
+          <p:cNvPr id="4" name="Slide Number Placeholder 3"/>
+          <p:cNvSpPr>
+            <a:spLocks noGrp="1"/>
+          </p:cNvSpPr>
+          <p:nvPr>
+            <p:ph type="sldNum" idx="5" sz="quarter"/>
+          </p:nvPr>
+        </p:nvSpPr>
+        <p:spPr/>
+      </p:sp>
+    </p:spTree>
+  </p:cSld>
+  <p:clrMapOvr>
+    <a:masterClrMapping/>
+  </p:clrMapOvr>
+</p:notes>
+</file>
+
+<file path=ppt/notesSlides/notesSlide9.xml><?xml version="1.0" encoding="utf-8"?>
+<p:notes xmlns:a="http://schemas.openxmlformats.org/drawingml/2006/main" xmlns:p="http://schemas.openxmlformats.org/presentationml/2006/main" xmlns:r="http://schemas.openxmlformats.org/officeDocument/2006/relationships">
+  <p:cSld>
+    <p:spTree>
+      <p:nvGrpSpPr>
+        <p:cNvPr id="1" name=""/>
+        <p:cNvGrpSpPr/>
+        <p:nvPr/>
+      </p:nvGrpSpPr>
+      <p:grpSpPr>
+        <a:xfrm>
+          <a:off x="0" y="0"/>
+          <a:ext cx="0" cy="0"/>
+          <a:chOff x="0" y="0"/>
+          <a:chExt cx="0" cy="0"/>
+        </a:xfrm>
+      </p:grpSpPr>
+      <p:sp>
+        <p:nvSpPr>
+          <p:cNvPr id="2" name="Slide Image Placeholder 1"/>
+          <p:cNvSpPr>
+            <a:spLocks noGrp="1"/>
+          </p:cNvSpPr>
+          <p:nvPr>
+            <p:ph type="sldImg" idx="2"/>
+          </p:nvPr>
+        </p:nvSpPr>
+        <p:spPr/>
+      </p:sp>
+      <p:sp>
+        <p:nvSpPr>
+          <p:cNvPr id="3" name="Notes Placeholder 2"/>
+          <p:cNvSpPr>
+            <a:spLocks noGrp="1"/>
+          </p:cNvSpPr>
+          <p:nvPr>
+            <p:ph type="body" idx="3" sz="quarter"/>
+          </p:nvPr>
+        </p:nvSpPr>
+        <p:spPr/>
+        <p:txBody>
+          <a:bodyPr/>
+          <a:lstStyle/>
+          <a:p>
+            <a:r>
+              <a:t>Open C3 — assembling the actual plan. Teach ALIGNMENT: every prioritised risk maps to a recovery action. This is the plan's core integrity test.</a:t>
+            </a:r>
+          </a:p>
+          <a:p>
+            <a:r>
+              <a:t>• First bullet: for EACH prioritised risk, state the recovery ACTION that addresses it — a one-to-one mapping from risk to response, no risk left unanswered.</a:t>
+            </a:r>
+          </a:p>
+          <a:p>
+            <a:r>
+              <a:t>• Second bullet: the plan must cover at least the THREE major risk events from the impact analysis (PE 1) — the same three from Topic 3; the analysis and the plan must line up.</a:t>
+            </a:r>
+          </a:p>
+          <a:p>
+            <a:r>
+              <a:t>• Third bullet (accent it): ALIGNMENT is the test — every high-severity risk has an OWNED recovery action. "Owned" means a named responsible party, not just an action floating in the plan.</a:t>
+            </a:r>
+          </a:p>
+          <a:p>
+            <a:r>
+              <a:t>Misconception to pre-empt: "the plan is a general recovery procedure." No — it must trace RISK → ACTION for each prioritised risk; a generic procedure that doesn't map to the specific analysed risks fails alignment.</a:t>
+            </a:r>
+          </a:p>
+          <a:p>
+            <a:r>
+              <a:t>Question to pose: "You have five ranked risks and a plan with four actions — what does that gap tell you?" (a high-severity risk has no owned recovery action — the plan isn't aligned yet).</a:t>
+            </a:r>
+          </a:p>
+          <a:p>
+            <a:r>
+              <a:t>UoC/AT1 tie: [ICTCLD501 PC 4.1] (align DR actions to risks per requirements) + [ICTCLD501 PE 1] (plan covers ≥3 major risk events) — AT1 Part B B12.</a:t>
+            </a:r>
+          </a:p>
+        </p:txBody>
+      </p:sp>
+      <p:sp>
+        <p:nvSpPr>
+          <p:cNvPr id="4" name="Slide Number Placeholder 3"/>
+          <p:cNvSpPr>
+            <a:spLocks noGrp="1"/>
+          </p:cNvSpPr>
+          <p:nvPr>
+            <p:ph type="sldNum" idx="5" sz="quarter"/>
+          </p:nvPr>
+        </p:nvSpPr>
+        <p:spPr/>
+      </p:sp>
+    </p:spTree>
+  </p:cSld>
+  <p:clrMapOvr>
+    <a:masterClrMapping/>
+  </p:clrMapOvr>
+</p:notes>
 </file>
 
 <file path=ppt/slideLayouts/slideLayout1.xml><?xml version="1.0" encoding="utf-8"?>
@@ -10627,4 +12257,324 @@
   </a:objectDefaults>
   <a:extraClrSchemeLst/>
 </a:theme>
+</file>
+
+<file path=ppt/theme/theme2.xml><?xml version="1.0" encoding="utf-8"?>
+<a:theme xmlns:a="http://schemas.openxmlformats.org/drawingml/2006/main" name="Office Theme">
+  <a:themeElements>
+    <a:clrScheme name="Office">
+      <a:dk1>
+        <a:sysClr val="windowText" lastClr="000000"/>
+      </a:dk1>
+      <a:lt1>
+        <a:sysClr val="window" lastClr="FFFFFF"/>
+      </a:lt1>
+      <a:dk2>
+        <a:srgbClr val="1F497D"/>
+      </a:dk2>
+      <a:lt2>
+        <a:srgbClr val="EEECE1"/>
+      </a:lt2>
+      <a:accent1>
+        <a:srgbClr val="4F81BD"/>
+      </a:accent1>
+      <a:accent2>
+        <a:srgbClr val="C0504D"/>
+      </a:accent2>
+      <a:accent3>
+        <a:srgbClr val="9BBB59"/>
+      </a:accent3>
+      <a:accent4>
+        <a:srgbClr val="8064A2"/>
+      </a:accent4>
+      <a:accent5>
+        <a:srgbClr val="4BACC6"/>
+      </a:accent5>
+      <a:accent6>
+        <a:srgbClr val="F79646"/>
+      </a:accent6>
+      <a:hlink>
+        <a:srgbClr val="0000FF"/>
+      </a:hlink>
+      <a:folHlink>
+        <a:srgbClr val="800080"/>
+      </a:folHlink>
+    </a:clrScheme>
+    <a:fontScheme name="Office">
+      <a:majorFont>
+        <a:latin typeface="Calibri"/>
+        <a:ea typeface=""/>
+        <a:cs typeface=""/>
+        <a:font script="Jpan" typeface="ＭＳ Ｐゴシック"/>
+        <a:font script="Hang" typeface="맑은 고딕"/>
+        <a:font script="Hans" typeface="宋体"/>
+        <a:font script="Hant" typeface="新細明體"/>
+        <a:font script="Arab" typeface="Times New Roman"/>
+        <a:font script="Hebr" typeface="Times New Roman"/>
+        <a:font script="Thai" typeface="Angsana New"/>
+        <a:font script="Ethi" typeface="Nyala"/>
+        <a:font script="Beng" typeface="Vrinda"/>
+        <a:font script="Gujr" typeface="Shruti"/>
+        <a:font script="Khmr" typeface="MoolBoran"/>
+        <a:font script="Knda" typeface="Tunga"/>
+        <a:font script="Guru" typeface="Raavi"/>
+        <a:font script="Cans" typeface="Euphemia"/>
+        <a:font script="Cher" typeface="Plantagenet Cherokee"/>
+        <a:font script="Yiii" typeface="Microsoft Yi Baiti"/>
+        <a:font script="Tibt" typeface="Microsoft Himalaya"/>
+        <a:font script="Thaa" typeface="MV Boli"/>
+        <a:font script="Deva" typeface="Mangal"/>
+        <a:font script="Telu" typeface="Gautami"/>
+        <a:font script="Taml" typeface="Latha"/>
+        <a:font script="Syrc" typeface="Estrangelo Edessa"/>
+        <a:font script="Orya" typeface="Kalinga"/>
+        <a:font script="Mlym" typeface="Kartika"/>
+        <a:font script="Laoo" typeface="DokChampa"/>
+        <a:font script="Sinh" typeface="Iskoola Pota"/>
+        <a:font script="Mong" typeface="Mongolian Baiti"/>
+        <a:font script="Viet" typeface="Times New Roman"/>
+        <a:font script="Uigh" typeface="Microsoft Uighur"/>
+        <a:font script="Geor" typeface="Sylfaen"/>
+      </a:majorFont>
+      <a:minorFont>
+        <a:latin typeface="Calibri"/>
+        <a:ea typeface=""/>
+        <a:cs typeface=""/>
+        <a:font script="Jpan" typeface="ＭＳ Ｐゴシック"/>
+        <a:font script="Hang" typeface="맑은 고딕"/>
+        <a:font script="Hans" typeface="宋体"/>
+        <a:font script="Hant" typeface="新細明體"/>
+        <a:font script="Arab" typeface="Arial"/>
+        <a:font script="Hebr" typeface="Arial"/>
+        <a:font script="Thai" typeface="Cordia New"/>
+        <a:font script="Ethi" typeface="Nyala"/>
+        <a:font script="Beng" typeface="Vrinda"/>
+        <a:font script="Gujr" typeface="Shruti"/>
+        <a:font script="Khmr" typeface="DaunPenh"/>
+        <a:font script="Knda" typeface="Tunga"/>
+        <a:font script="Guru" typeface="Raavi"/>
+        <a:font script="Cans" typeface="Euphemia"/>
+        <a:font script="Cher" typeface="Plantagenet Cherokee"/>
+        <a:font script="Yiii" typeface="Microsoft Yi Baiti"/>
+        <a:font script="Tibt" typeface="Microsoft Himalaya"/>
+        <a:font script="Thaa" typeface="MV Boli"/>
+        <a:font script="Deva" typeface="Mangal"/>
+        <a:font script="Telu" typeface="Gautami"/>
+        <a:font script="Taml" typeface="Latha"/>
+        <a:font script="Syrc" typeface="Estrangelo Edessa"/>
+        <a:font script="Orya" typeface="Kalinga"/>
+        <a:font script="Mlym" typeface="Kartika"/>
+        <a:font script="Laoo" typeface="DokChampa"/>
+        <a:font script="Sinh" typeface="Iskoola Pota"/>
+        <a:font script="Mong" typeface="Mongolian Baiti"/>
+        <a:font script="Viet" typeface="Arial"/>
+        <a:font script="Uigh" typeface="Microsoft Uighur"/>
+        <a:font script="Geor" typeface="Sylfaen"/>
+      </a:minorFont>
+    </a:fontScheme>
+    <a:fmtScheme name="Office">
+      <a:fillStyleLst>
+        <a:solidFill>
+          <a:schemeClr val="phClr"/>
+        </a:solidFill>
+        <a:gradFill rotWithShape="1">
+          <a:gsLst>
+            <a:gs pos="0">
+              <a:schemeClr val="phClr">
+                <a:tint val="50000"/>
+                <a:satMod val="300000"/>
+              </a:schemeClr>
+            </a:gs>
+            <a:gs pos="35000">
+              <a:schemeClr val="phClr">
+                <a:tint val="37000"/>
+                <a:satMod val="300000"/>
+              </a:schemeClr>
+            </a:gs>
+            <a:gs pos="100000">
+              <a:schemeClr val="phClr">
+                <a:tint val="15000"/>
+                <a:satMod val="350000"/>
+              </a:schemeClr>
+            </a:gs>
+          </a:gsLst>
+          <a:lin ang="16200000" scaled="1"/>
+        </a:gradFill>
+        <a:gradFill rotWithShape="1">
+          <a:gsLst>
+            <a:gs pos="0">
+              <a:schemeClr val="phClr">
+                <a:tint val="100000"/>
+                <a:shade val="100000"/>
+                <a:satMod val="130000"/>
+              </a:schemeClr>
+            </a:gs>
+            <a:gs pos="100000">
+              <a:schemeClr val="phClr">
+                <a:tint val="50000"/>
+                <a:shade val="100000"/>
+                <a:satMod val="350000"/>
+              </a:schemeClr>
+            </a:gs>
+          </a:gsLst>
+          <a:lin ang="16200000" scaled="0"/>
+        </a:gradFill>
+      </a:fillStyleLst>
+      <a:lnStyleLst>
+        <a:ln w="9525" cap="flat" cmpd="sng" algn="ctr">
+          <a:solidFill>
+            <a:schemeClr val="phClr">
+              <a:shade val="95000"/>
+              <a:satMod val="105000"/>
+            </a:schemeClr>
+          </a:solidFill>
+          <a:prstDash val="solid"/>
+        </a:ln>
+        <a:ln w="25400" cap="flat" cmpd="sng" algn="ctr">
+          <a:solidFill>
+            <a:schemeClr val="phClr"/>
+          </a:solidFill>
+          <a:prstDash val="solid"/>
+        </a:ln>
+        <a:ln w="38100" cap="flat" cmpd="sng" algn="ctr">
+          <a:solidFill>
+            <a:schemeClr val="phClr"/>
+          </a:solidFill>
+          <a:prstDash val="solid"/>
+        </a:ln>
+      </a:lnStyleLst>
+      <a:effectStyleLst>
+        <a:effectStyle>
+          <a:effectLst>
+            <a:outerShdw blurRad="40000" dist="20000" dir="5400000" rotWithShape="0">
+              <a:srgbClr val="000000">
+                <a:alpha val="38000"/>
+              </a:srgbClr>
+            </a:outerShdw>
+          </a:effectLst>
+        </a:effectStyle>
+        <a:effectStyle>
+          <a:effectLst>
+            <a:outerShdw blurRad="40000" dist="23000" dir="5400000" rotWithShape="0">
+              <a:srgbClr val="000000">
+                <a:alpha val="35000"/>
+              </a:srgbClr>
+            </a:outerShdw>
+          </a:effectLst>
+        </a:effectStyle>
+        <a:effectStyle>
+          <a:effectLst>
+            <a:outerShdw blurRad="40000" dist="23000" dir="5400000" rotWithShape="0">
+              <a:srgbClr val="000000">
+                <a:alpha val="35000"/>
+              </a:srgbClr>
+            </a:outerShdw>
+          </a:effectLst>
+          <a:scene3d>
+            <a:camera prst="orthographicFront">
+              <a:rot lat="0" lon="0" rev="0"/>
+            </a:camera>
+            <a:lightRig rig="threePt" dir="t">
+              <a:rot lat="0" lon="0" rev="1200000"/>
+            </a:lightRig>
+          </a:scene3d>
+          <a:sp3d>
+            <a:bevelT w="63500" h="25400"/>
+          </a:sp3d>
+        </a:effectStyle>
+      </a:effectStyleLst>
+      <a:bgFillStyleLst>
+        <a:solidFill>
+          <a:schemeClr val="phClr"/>
+        </a:solidFill>
+        <a:gradFill rotWithShape="1">
+          <a:gsLst>
+            <a:gs pos="0">
+              <a:schemeClr val="phClr">
+                <a:tint val="40000"/>
+                <a:satMod val="350000"/>
+              </a:schemeClr>
+            </a:gs>
+            <a:gs pos="40000">
+              <a:schemeClr val="phClr">
+                <a:tint val="45000"/>
+                <a:shade val="99000"/>
+                <a:satMod val="350000"/>
+              </a:schemeClr>
+            </a:gs>
+            <a:gs pos="100000">
+              <a:schemeClr val="phClr">
+                <a:shade val="20000"/>
+                <a:satMod val="255000"/>
+              </a:schemeClr>
+            </a:gs>
+          </a:gsLst>
+          <a:path path="circle">
+            <a:fillToRect l="50000" t="-80000" r="50000" b="180000"/>
+          </a:path>
+        </a:gradFill>
+        <a:gradFill rotWithShape="1">
+          <a:gsLst>
+            <a:gs pos="0">
+              <a:schemeClr val="phClr">
+                <a:tint val="80000"/>
+                <a:satMod val="300000"/>
+              </a:schemeClr>
+            </a:gs>
+            <a:gs pos="100000">
+              <a:schemeClr val="phClr">
+                <a:shade val="30000"/>
+                <a:satMod val="200000"/>
+              </a:schemeClr>
+            </a:gs>
+          </a:gsLst>
+          <a:path path="circle">
+            <a:fillToRect l="50000" t="50000" r="50000" b="50000"/>
+          </a:path>
+        </a:gradFill>
+      </a:bgFillStyleLst>
+    </a:fmtScheme>
+  </a:themeElements>
+  <a:objectDefaults>
+    <a:spDef>
+      <a:spPr/>
+      <a:bodyPr/>
+      <a:lstStyle/>
+      <a:style>
+        <a:lnRef idx="1">
+          <a:schemeClr val="accent1"/>
+        </a:lnRef>
+        <a:fillRef idx="3">
+          <a:schemeClr val="accent1"/>
+        </a:fillRef>
+        <a:effectRef idx="2">
+          <a:schemeClr val="accent1"/>
+        </a:effectRef>
+        <a:fontRef idx="minor">
+          <a:schemeClr val="lt1"/>
+        </a:fontRef>
+      </a:style>
+    </a:spDef>
+    <a:lnDef>
+      <a:spPr/>
+      <a:bodyPr/>
+      <a:lstStyle/>
+      <a:style>
+        <a:lnRef idx="2">
+          <a:schemeClr val="accent1"/>
+        </a:lnRef>
+        <a:fillRef idx="0">
+          <a:schemeClr val="accent1"/>
+        </a:fillRef>
+        <a:effectRef idx="1">
+          <a:schemeClr val="accent1"/>
+        </a:effectRef>
+        <a:fontRef idx="minor">
+          <a:schemeClr val="tx1"/>
+        </a:fontRef>
+      </a:style>
+    </a:lnDef>
+  </a:objectDefaults>
+  <a:extraClrSchemeLst/>
+</a:theme>
 </file>
--- a/S1-CL2-Cloud-Disaster-Recovery/delivery/topic_04/Topic_04_Slides.pptx
+++ b/S1-CL2-Cloud-Disaster-Recovery/delivery/topic_04/Topic_04_Slides.pptx
@@ -24,6 +24,12 @@
     <p:sldId id="272" r:id="rId24"/>
     <p:sldId id="273" r:id="rId25"/>
     <p:sldId id="274" r:id="rId26"/>
+    <p:sldId id="275" r:id="rId27"/>
+    <p:sldId id="276" r:id="rId28"/>
+    <p:sldId id="277" r:id="rId29"/>
+    <p:sldId id="278" r:id="rId30"/>
+    <p:sldId id="279" r:id="rId31"/>
+    <p:sldId id="280" r:id="rId32"/>
   </p:sldIdLst>
   <p:sldSz cx="12191695" cy="6858000" type="screen4x3"/>
   <p:notesSz cx="6858000" cy="9144000"/>
@@ -520,42 +526,12 @@
           <a:lstStyle/>
           <a:p>
             <a:r>
-              <a:t>Frame the finalisation half — turn Topic 3's analysis into a chosen strategy and a documented plan. Set the three moves and the boundary.</a:t>
-            </a:r>
-          </a:p>
-          <a:p>
-            <a:r>
-              <a:t>• First bullet: callback — Topic 3 set the requirements, objectives and RISKS; Topic 4 turns them into a PLAN. Today consumes yesterday's output; keep the impact analysis on the desk.</a:t>
-            </a:r>
-          </a:p>
-          <a:p>
-            <a:r>
-              <a:t>• Second bullet: name the three moves — EVALUATE the DR strategies, CHOOSE one to the objectives, WRITE the plan. In that order.</a:t>
-            </a:r>
-          </a:p>
-          <a:p>
-            <a:r>
-              <a:t>• Third bullet (accent it): the plan must MAP to the prioritised risks AND meet the RTO/RPO you set — those two Topic-3 outputs are the acceptance test for everything today.</a:t>
-            </a:r>
-          </a:p>
-          <a:p>
-            <a:r>
-              <a:t>• Hold the boundary (last bullet): PLANNING ONLY — recovery is not executed here. A documented plan is the deliverable, not a failover.</a:t>
-            </a:r>
-          </a:p>
-          <a:p>
-            <a:r>
-              <a:t>Misconception to pre-empt: "the plan is just picking a DR strategy." No — a plan is strategy PLUS runbook, escalation, comms and DNS failover, aligned to the risks and provably meeting RTO/RPO. The strategy is one part.</a:t>
-            </a:r>
-          </a:p>
-          <a:p>
-            <a:r>
-              <a:t>Question to pose: "Before you choose a DR strategy, what two Topic-3 numbers must you already have in hand?" (the RTO/RPO objectives and the ranked risks — the strategy is chosen to meet them).</a:t>
-            </a:r>
-          </a:p>
-          <a:p>
-            <a:r>
-              <a:t>UoC/AT1 tie: this Topic develops [ICTCLD501 PC 3.1]–[ICTCLD501 PC 3.4], [ICTCLD501 PC 4.1]–[ICTCLD501 PC 4.3], [ICTCLD501 PE 1]/[ICTCLD501 PE 3] and [ICTCLD501 KE 3]/[ICTCLD501 KE 4], evidenced in AT1 Part B §5–6 and the KE appendix.</a:t>
+              <a:t>Today consumes Topic 3's output — the register and objectives stay on the desk; workbook tasks 28 to 37 in order.</a:t>
+            </a:r>
+          </a:p>
+          <a:p>
+            <a:r>
+              <a:t>Misconception: the plan is just picking a strategy. The strategy is one row; the plan is everything from detection to sign-off.</a:t>
             </a:r>
           </a:p>
         </p:txBody>
@@ -625,42 +601,12 @@
           <a:lstStyle/>
           <a:p>
             <a:r>
-              <a:t>The keystone C3 slide — the runbook: ordered steps with timings that provably meet RTO/RPO. Use the runbook-flow diagram to walk the sequence and add up the time live.</a:t>
-            </a:r>
-          </a:p>
-          <a:p>
-            <a:r>
-              <a:t>• First bullet: outline the recovery STEPS, their TIMELINES, key FEATURES and the SERVICE PROVIDERS involved — a runbook is specific and sequenced, not a paragraph of intent.</a:t>
-            </a:r>
-          </a:p>
-          <a:p>
-            <a:r>
-              <a:t>• Second bullet (accent it): SHOW how the sequence MEETS the RTO/RPO targets — the timing has to ADD UP (PE 3). Sum the step timings and compare to the RTO; if the total exceeds it, the plan fails and must be revised.</a:t>
-            </a:r>
-          </a:p>
-          <a:p>
-            <a:r>
-              <a:t>• Third bullet: NAME who executes each step and what "RECOVERED" looks like — a definition of done, and an owner per step. No anonymous actions.</a:t>
-            </a:r>
-          </a:p>
-          <a:p>
-            <a:r>
-              <a:t>• On the diagram: trace detect → declare → recover-in-priority-order → verify, and point at where the RTO clock starts and stops.</a:t>
-            </a:r>
-          </a:p>
-          <a:p>
-            <a:r>
-              <a:t>Misconception to pre-empt: "if I list the right steps, RTO is met." No — you must ARITHMETICALLY show the timeline adds up to within RTO/RPO; PE 3 is explicitly about DOCUMENTING how the targets are reached, not just naming steps.</a:t>
-            </a:r>
-          </a:p>
-          <a:p>
-            <a:r>
-              <a:t>Question to pose: "Your steps total 90 minutes but the RTO is 60 — what has to change?" (re-sequence, parallelise, or step up the DR strategy; the timing must fit the target).</a:t>
-            </a:r>
-          </a:p>
-          <a:p>
-            <a:r>
-              <a:t>UoC/AT1 tie: [ICTCLD501 PC 4.2] (steps, timelines, features, providers) + [ICTCLD501 PE 3] (document how the plan reaches RTO/RPO) — AT1 Part B B13; this runbook is the PE 3 evidence.</a:t>
+              <a:t>Workbook task 35 — the explicit objectives argument. Listing the right steps is not proof; the addition is.</a:t>
+            </a:r>
+          </a:p>
+          <a:p>
+            <a:r>
+              <a:t>This is where a cheap strategy honestly fails and gets stepped up — that revision is good evidence.</a:t>
             </a:r>
           </a:p>
         </p:txBody>
@@ -730,37 +676,12 @@
           <a:lstStyle/>
           <a:p>
             <a:r>
-              <a:t>Teach the DOCUMENTATION step — turning the aligned actions and runbook into the finished, professional DR plan. This is the Part B deliverable itself.</a:t>
-            </a:r>
-          </a:p>
-          <a:p>
-            <a:r>
-              <a:t>• First bullet: DOCUMENT the plan to the BUSINESS NEEDS, in the YAT TEMPLATE and PLAIN professional English — a client-ready document, written for the business, not a pile of engineer's notes.</a:t>
-            </a:r>
-          </a:p>
-          <a:p>
-            <a:r>
-              <a:t>• Second bullet: COMPLETE, internally CONSISTENT, and TRACEABLE back to the requirements and risks — the reader can follow any action back to the risk and requirement that drove it.</a:t>
-            </a:r>
-          </a:p>
-          <a:p>
-            <a:r>
-              <a:t>• Third bullet (accent it): this documented plan IS the Part B deliverable — everything in Topics 3–4 exists to produce this artefact.</a:t>
-            </a:r>
-          </a:p>
-          <a:p>
-            <a:r>
-              <a:t>Misconception to pre-empt: "documenting is a formatting pass at the end." No — documenting to business needs, to the template, and traceably is an assessed criterion (PC 4.3); it's the deliverable, not decoration.</a:t>
-            </a:r>
-          </a:p>
-          <a:p>
-            <a:r>
-              <a:t>Question to pose: "A marker reads your plan cold — what makes it traceable back to the risks and requirements?" (every recovery action references the prioritised risk and the objective it serves — no orphan actions).</a:t>
-            </a:r>
-          </a:p>
-          <a:p>
-            <a:r>
-              <a:t>UoC/AT1 tie: [ICTCLD501 PC 4.3] (document the DR plan to business needs) — AT1 Part B B14; the documented plan is the Part B §6 deliverable.</a:t>
+              <a:t>Activity = practice workbook tasks 33–35.</a:t>
+            </a:r>
+          </a:p>
+          <a:p>
+            <a:r>
+              <a:t>Make them add the timings up — the missing arithmetic is the most common gap in the whole Part B.</a:t>
             </a:r>
           </a:p>
         </p:txBody>
@@ -830,62 +751,162 @@
           <a:lstStyle/>
           <a:p>
             <a:r>
-              <a:t>Facilitation — the biggest activity in the Topic: students write the full DR plan for the practice scenario. The capstone AT1 Part B §6 rehearsal, building on everything from Topics 3–4.</a:t>
-            </a:r>
-          </a:p>
-          <a:p>
-            <a:r>
-              <a:t>Tell students: "For the practice scenario, write the recovery plan — align an owned action to each prioritised risk, lay out the steps with timelines and providers, and MAKE THE ARITHMETIC show the sequence meets your RTO/RPO. Produce it as a documented runbook."</a:t>
-            </a:r>
-          </a:p>
-          <a:p>
-            <a:r>
-              <a:t>Steps (put on the board):</a:t>
-            </a:r>
-          </a:p>
-          <a:p>
-            <a:r>
-              <a:t>1. Map each prioritised risk to an owned recovery action (cover at least your three major risks).</a:t>
-            </a:r>
-          </a:p>
-          <a:p>
-            <a:r>
-              <a:t>2. Sequence the steps with timelines and the service providers involved.</a:t>
-            </a:r>
-          </a:p>
-          <a:p>
-            <a:r>
-              <a:t>3. Add up the timings and show they meet RTO/RPO — revise the sequence if they don't.</a:t>
-            </a:r>
-          </a:p>
-          <a:p>
-            <a:r>
-              <a:t>4. Document it to business needs, in plain professional English (the YAT template shape).</a:t>
-            </a:r>
-          </a:p>
-          <a:p>
-            <a:r>
-              <a:t>Must produce: a documented runbook — aligned actions, sequenced steps with timings, an explicit RTO/RPO argument.</a:t>
-            </a:r>
-          </a:p>
-          <a:p>
-            <a:r>
-              <a:t>Timing: ~30 min. Where they get stuck: they write steps but never prove the timing meets RTO (make them add it up — PE 3), and they leave actions unowned (every step needs a "who").</a:t>
-            </a:r>
-          </a:p>
-          <a:p>
-            <a:r>
-              <a:t>Share-back prompt: "Walk one risk from the register through to its recovery action and show the clock fits RTO" — surfaces alignment AND timing.</a:t>
-            </a:r>
-          </a:p>
-          <a:p>
-            <a:r>
-              <a:t>No-leakage note: practice scenario only (comparable, not identical); AT1 evidences the same plan-writing skill on the assessed system — keep them on the practice brief.</a:t>
-            </a:r>
-          </a:p>
-          <a:p>
-            <a:r>
-              <a:t>UoC/AT1 tie: [ICTCLD501 PC 4.1] · [ICTCLD501 PC 4.2] · [ICTCLD501 PC 4.3] · [ICTCLD501 PE 1] · [ICTCLD501 PE 3] — the full plan-writing core of AT1 Part B §6.</a:t>
+              <a:t>Workbook task 36 — which standards the plan reflects, and why referencing them matters.</a:t>
+            </a:r>
+          </a:p>
+          <a:p>
+            <a:r>
+              <a:t>Misconception: you must implement the standard. At this level you reference it to structure and justify the plan.</a:t>
+            </a:r>
+          </a:p>
+        </p:txBody>
+      </p:sp>
+      <p:sp>
+        <p:nvSpPr>
+          <p:cNvPr id="4" name="Slide Number Placeholder 3"/>
+          <p:cNvSpPr>
+            <a:spLocks noGrp="1"/>
+          </p:cNvSpPr>
+          <p:nvPr>
+            <p:ph type="sldNum" idx="5" sz="quarter"/>
+          </p:nvPr>
+        </p:nvSpPr>
+        <p:spPr/>
+      </p:sp>
+    </p:spTree>
+  </p:cSld>
+  <p:clrMapOvr>
+    <a:masterClrMapping/>
+  </p:clrMapOvr>
+</p:notes>
+</file>
+
+<file path=ppt/notesSlides/notesSlide13.xml><?xml version="1.0" encoding="utf-8"?>
+<p:notes xmlns:a="http://schemas.openxmlformats.org/drawingml/2006/main" xmlns:p="http://schemas.openxmlformats.org/presentationml/2006/main" xmlns:r="http://schemas.openxmlformats.org/officeDocument/2006/relationships">
+  <p:cSld>
+    <p:spTree>
+      <p:nvGrpSpPr>
+        <p:cNvPr id="1" name=""/>
+        <p:cNvGrpSpPr/>
+        <p:nvPr/>
+      </p:nvGrpSpPr>
+      <p:grpSpPr>
+        <a:xfrm>
+          <a:off x="0" y="0"/>
+          <a:ext cx="0" cy="0"/>
+          <a:chOff x="0" y="0"/>
+          <a:chExt cx="0" cy="0"/>
+        </a:xfrm>
+      </p:grpSpPr>
+      <p:sp>
+        <p:nvSpPr>
+          <p:cNvPr id="2" name="Slide Image Placeholder 1"/>
+          <p:cNvSpPr>
+            <a:spLocks noGrp="1"/>
+          </p:cNvSpPr>
+          <p:nvPr>
+            <p:ph type="sldImg" idx="2"/>
+          </p:nvPr>
+        </p:nvSpPr>
+        <p:spPr/>
+      </p:sp>
+      <p:sp>
+        <p:nvSpPr>
+          <p:cNvPr id="3" name="Notes Placeholder 2"/>
+          <p:cNvSpPr>
+            <a:spLocks noGrp="1"/>
+          </p:cNvSpPr>
+          <p:nvPr>
+            <p:ph type="body" idx="3" sz="quarter"/>
+          </p:nvPr>
+        </p:nvSpPr>
+        <p:spPr/>
+        <p:txBody>
+          <a:bodyPr/>
+          <a:lstStyle/>
+          <a:p>
+            <a:r>
+              <a:t>Workbook task 37 — assembly. The reader test: someone cold can follow any recovery action back to its risk.</a:t>
+            </a:r>
+          </a:p>
+          <a:p>
+            <a:r>
+              <a:t>Everything from Topics 3 and 4 exists to produce this one artefact.</a:t>
+            </a:r>
+          </a:p>
+        </p:txBody>
+      </p:sp>
+      <p:sp>
+        <p:nvSpPr>
+          <p:cNvPr id="4" name="Slide Number Placeholder 3"/>
+          <p:cNvSpPr>
+            <a:spLocks noGrp="1"/>
+          </p:cNvSpPr>
+          <p:nvPr>
+            <p:ph type="sldNum" idx="5" sz="quarter"/>
+          </p:nvPr>
+        </p:nvSpPr>
+        <p:spPr/>
+      </p:sp>
+    </p:spTree>
+  </p:cSld>
+  <p:clrMapOvr>
+    <a:masterClrMapping/>
+  </p:clrMapOvr>
+</p:notes>
+</file>
+
+<file path=ppt/notesSlides/notesSlide14.xml><?xml version="1.0" encoding="utf-8"?>
+<p:notes xmlns:a="http://schemas.openxmlformats.org/drawingml/2006/main" xmlns:p="http://schemas.openxmlformats.org/presentationml/2006/main" xmlns:r="http://schemas.openxmlformats.org/officeDocument/2006/relationships">
+  <p:cSld>
+    <p:spTree>
+      <p:nvGrpSpPr>
+        <p:cNvPr id="1" name=""/>
+        <p:cNvGrpSpPr/>
+        <p:nvPr/>
+      </p:nvGrpSpPr>
+      <p:grpSpPr>
+        <a:xfrm>
+          <a:off x="0" y="0"/>
+          <a:ext cx="0" cy="0"/>
+          <a:chOff x="0" y="0"/>
+          <a:chExt cx="0" cy="0"/>
+        </a:xfrm>
+      </p:grpSpPr>
+      <p:sp>
+        <p:nvSpPr>
+          <p:cNvPr id="2" name="Slide Image Placeholder 1"/>
+          <p:cNvSpPr>
+            <a:spLocks noGrp="1"/>
+          </p:cNvSpPr>
+          <p:nvPr>
+            <p:ph type="sldImg" idx="2"/>
+          </p:nvPr>
+        </p:nvSpPr>
+        <p:spPr/>
+      </p:sp>
+      <p:sp>
+        <p:nvSpPr>
+          <p:cNvPr id="3" name="Notes Placeholder 2"/>
+          <p:cNvSpPr>
+            <a:spLocks noGrp="1"/>
+          </p:cNvSpPr>
+          <p:nvPr>
+            <p:ph type="body" idx="3" sz="quarter"/>
+          </p:nvPr>
+        </p:nvSpPr>
+        <p:spPr/>
+        <p:txBody>
+          <a:bodyPr/>
+          <a:lstStyle/>
+          <a:p>
+            <a:r>
+              <a:t>Activity = practice workbook tasks 36–37 + assessment Q7 rehearsed from the assembled plan.</a:t>
+            </a:r>
+          </a:p>
+          <a:p>
+            <a:r>
+              <a:t>The practice workbook carries no questions — use the assessment's, answered from the plan just written.</a:t>
             </a:r>
           </a:p>
         </p:txBody>
@@ -955,42 +976,12 @@
           <a:lstStyle/>
           <a:p>
             <a:r>
-              <a:t>Teach the four cloud DR strategies as a SPECTRUM of cost vs speed — the core KE of the Topic. Walk them cheapest/slowest to priciest/fastest; the trade-off table on the next slide reinforces this.</a:t>
-            </a:r>
-          </a:p>
-          <a:p>
-            <a:r>
-              <a:t>• BACKUP &amp; RESTORE: cheapest, slowest — restore from backups after an event. Nothing runs until you need it; recovery is measured in hours.</a:t>
-            </a:r>
-          </a:p>
-          <a:p>
-            <a:r>
-              <a:t>• PILOT LIGHT: core DATA live in a second region, minimal standby; scale UP on failover. The data's already there; you spin up compute when disaster strikes.</a:t>
-            </a:r>
-          </a:p>
-          <a:p>
-            <a:r>
-              <a:t>• WARM STANDBY: a scaled-DOWN running copy, ready to take load quickly. It's already running, just small — faster failover, higher standing cost.</a:t>
-            </a:r>
-          </a:p>
-          <a:p>
-            <a:r>
-              <a:t>• ACTIVE-ACTIVE: full running copies, NEAR-ZERO RTO/RPO, HIGHEST cost. Both sides live all the time; you pay for a full duplicate.</a:t>
-            </a:r>
-          </a:p>
-          <a:p>
-            <a:r>
-              <a:t>Misconception to pre-empt: "active-active is the 'best' one." No — the BEST strategy is the SIMPLEST that meets the objectives; active-active is overkill (and overspend) unless the RTO/RPO genuinely demand it.</a:t>
-            </a:r>
-          </a:p>
-          <a:p>
-            <a:r>
-              <a:t>Question to pose: "As you move down the list, what are you buying, and what are you paying for it?" (faster recovery / less data loss, paid for with rising standing cost and complexity).</a:t>
-            </a:r>
-          </a:p>
-          <a:p>
-            <a:r>
-              <a:t>UoC/AT1 tie: [ICTCLD501 KE 3] (DR techniques for cloud) + [ICTCLD501 PC 3.1] (develop a range of DR solutions) — AT1 Part B B8 and the KE appendix.</a:t>
+              <a:t>A spectrum of cost against speed, walked cheapest to priciest — the core examinable content of the Topic.</a:t>
+            </a:r>
+          </a:p>
+          <a:p>
+            <a:r>
+              <a:t>Misconception: active-active is "best". The best strategy is the simplest that meets the objectives.</a:t>
             </a:r>
           </a:p>
         </p:txBody>
@@ -1060,37 +1051,12 @@
           <a:lstStyle/>
           <a:p>
             <a:r>
-              <a:t>Teach the CHOICE discipline — evaluate the four strategies against the Topic-3 objectives and pick deliberately. This is the assessable judgement, not the memorised list.</a:t>
-            </a:r>
-          </a:p>
-          <a:p>
-            <a:r>
-              <a:t>• First bullet: EVALUATE each strategy against the Topic-3 RTO/RPO and the BUDGET. You're matching a strategy's capability to your specific targets, not ranking them in the abstract.</a:t>
-            </a:r>
-          </a:p>
-          <a:p>
-            <a:r>
-              <a:t>• Second bullet: DEVELOP A RANGE of solutions, THEN choose the SIMPLEST that meets the requirements (PE 1). Showing the range considered is part of the evidence — don't jump straight to one.</a:t>
-            </a:r>
-          </a:p>
-          <a:p>
-            <a:r>
-              <a:t>• Third bullet (accent it): JUSTIFY the choice — "cheaper is right UNTIL it fails an objective." Start cheap and step up only when a target forces you to; that's the reasoning assessors look for.</a:t>
-            </a:r>
-          </a:p>
-          <a:p>
-            <a:r>
-              <a:t>Misconception to pre-empt: "choose the strongest strategy to be safe." No — choosing beyond the objectives is over-engineering and overspend; the mark is for the SIMPLEST strategy that still meets RTO/RPO and budget.</a:t>
-            </a:r>
-          </a:p>
-          <a:p>
-            <a:r>
-              <a:t>Question to pose: "Backup &amp; restore gives a 4-hour recovery but your RTO is 30 minutes — what's the CHEAPEST strategy that still meets it?" (step up the spectrum only as far as the objective forces — likely pilot light/warm standby).</a:t>
-            </a:r>
-          </a:p>
-          <a:p>
-            <a:r>
-              <a:t>UoC/AT1 tie: [ICTCLD501 PC 3.1] + [ICTCLD501 PE 1] (develop and evaluate a range, choose one) — AT1 Part B B8; the justification earns the criterion.</a:t>
+              <a:t>Workbook tasks 28 and 29 — the evaluation then the recommendation, as separate written steps.</a:t>
+            </a:r>
+          </a:p>
+          <a:p>
+            <a:r>
+              <a:t>The step-up reasoning is what markers look for: start cheap, move up only when a target forces it.</a:t>
             </a:r>
           </a:p>
         </p:txBody>
@@ -1160,57 +1126,12 @@
           <a:lstStyle/>
           <a:p>
             <a:r>
-              <a:t>Facilitation — the C1 practice: evaluate the four strategies and choose one for the practice scenario. Rehearses AT1 Part B B8.</a:t>
-            </a:r>
-          </a:p>
-          <a:p>
-            <a:r>
-              <a:t>Tell students: "For the practice scenario, evaluate all four DR strategies against the RTO/RPO and budget you set in Topic 3 — then choose ONE and justify it. Show the range you considered, not just the winner."</a:t>
-            </a:r>
-          </a:p>
-          <a:p>
-            <a:r>
-              <a:t>Steps (put on the board):</a:t>
-            </a:r>
-          </a:p>
-          <a:p>
-            <a:r>
-              <a:t>1. Line up the four strategies against your objectives (use the trade-off table as a lens).</a:t>
-            </a:r>
-          </a:p>
-          <a:p>
-            <a:r>
-              <a:t>2. Eliminate the ones that miss RTO/RPO or blow the budget — say why each is out.</a:t>
-            </a:r>
-          </a:p>
-          <a:p>
-            <a:r>
-              <a:t>3. Choose the SIMPLEST survivor and justify it against RTO/RPO and cost.</a:t>
-            </a:r>
-          </a:p>
-          <a:p>
-            <a:r>
-              <a:t>Must produce: a short evaluation of all four plus a justified choice tied to the objectives.</a:t>
-            </a:r>
-          </a:p>
-          <a:p>
-            <a:r>
-              <a:t>Timing: ~20 min. Where they get stuck: they jump straight to active-active "to be safe" (push simplest-that-fits), and they choose with no numbers (make them cite their RTO/RPO).</a:t>
-            </a:r>
-          </a:p>
-          <a:p>
-            <a:r>
-              <a:t>Share-back prompt: "Name your choice and the objective that ruled out the cheaper option below it" — surfaces the step-up reasoning.</a:t>
-            </a:r>
-          </a:p>
-          <a:p>
-            <a:r>
-              <a:t>No-leakage note: practice scenario only (comparable, not identical); AT1 evidences the same evaluate-and-choose skill on the assessed system — keep them on the practice brief.</a:t>
-            </a:r>
-          </a:p>
-          <a:p>
-            <a:r>
-              <a:t>UoC/AT1 tie: [ICTCLD501 PC 3.1] · [ICTCLD501 PE 1] · [ICTCLD501 KE 3] — develop a range, evaluate, choose (AT1 Part B B8).</a:t>
+              <a:t>Activity = practice workbook tasks 28–29.</a:t>
+            </a:r>
+          </a:p>
+          <a:p>
+            <a:r>
+              <a:t>Watch for jumping straight to active-active "to be safe", and choices made with no numbers cited.</a:t>
             </a:r>
           </a:p>
         </p:txBody>
@@ -1280,37 +1201,12 @@
           <a:lstStyle/>
           <a:p>
             <a:r>
-              <a:t>Open C2 — the rest of a plan beyond the strategy. Teach leaning on NATIVE protections and PRIORITISING recovery against the ranked risks.</a:t>
-            </a:r>
-          </a:p>
-          <a:p>
-            <a:r>
-              <a:t>• First bullet: use the vendor's NATIVE protections — automated backups, cross-region copy, durable/immutable storage. These are already reliable and cheap; build on them rather than rolling your own.</a:t>
-            </a:r>
-          </a:p>
-          <a:p>
-            <a:r>
-              <a:t>• Second bullet: PRIORITISE the recovery against the RISKS — restore the highest-severity, business-critical parts FIRST. This is where Topic 3's ranking pays off; recovery order is set by severity, not convenience.</a:t>
-            </a:r>
-          </a:p>
-          <a:p>
-            <a:r>
-              <a:t>• Third bullet (accent it): native durability does the HEAVY LIFTING; your plan SEQUENCES and GOVERNS it. Your value-add is orchestration and priority, not re-implementing storage durability.</a:t>
-            </a:r>
-          </a:p>
-          <a:p>
-            <a:r>
-              <a:t>Misconception to pre-empt: "restore everything at once." No — you SEQUENCE recovery by severity/criticality; some systems wait. Priority order, driven by the impact analysis, is the assessable decision.</a:t>
-            </a:r>
-          </a:p>
-          <a:p>
-            <a:r>
-              <a:t>Question to pose: "In a real recovery you can't bring everything back simultaneously — what decides the order?" (the risk ranking / business criticality from Topic 3 — restore highest-severity, critical systems first).</a:t>
-            </a:r>
-          </a:p>
-          <a:p>
-            <a:r>
-              <a:t>UoC/AT1 tie: [ICTCLD501 PC 3.2] (prioritise recovery against risks) + [ICTCLD501 PC 3.4] (other DR components) + [ICTCLD501 KE 4] — AT1 Part B B11.</a:t>
+              <a:t>Workbook task 30. Recovery order is set by the Topic 3 ranking, not by convenience.</a:t>
+            </a:r>
+          </a:p>
+          <a:p>
+            <a:r>
+              <a:t>Question to pose: you can't bring everything back at once — what decides the order?</a:t>
             </a:r>
           </a:p>
         </p:txBody>
@@ -1380,37 +1276,12 @@
           <a:lstStyle/>
           <a:p>
             <a:r>
-              <a:t>Teach the OTHER plan components — insurance as a complement, plus the operational parts that turn a strategy into a usable plan.</a:t>
-            </a:r>
-          </a:p>
-          <a:p>
-            <a:r>
-              <a:t>• First bullet: INSURANCE is a COMPLEMENTARY risk-transfer control — it covers RESIDUAL loss, it does NOT restore service. Money back is not uptime; it sits alongside recovery, never replaces it.</a:t>
-            </a:r>
-          </a:p>
-          <a:p>
-            <a:r>
-              <a:t>• Second bullet: name the OTHER components — the RUNBOOK, DECLARATION/ESCALATION, COMMUNICATIONS, and DNS FAILOVER. Each is a plan ingredient students forget because they fixate on the strategy.</a:t>
-            </a:r>
-          </a:p>
-          <a:p>
-            <a:r>
-              <a:t>• Third bullet (accent it): a plan is MORE than a strategy — it's WHO does WHAT, in WHAT ORDER, and how PEOPLE are TOLD. The human/process side is as assessed as the technical one.</a:t>
-            </a:r>
-          </a:p>
-          <a:p>
-            <a:r>
-              <a:t>Misconception to pre-empt: "insurance is an alternative to DR." No — it transfers residual financial risk; it buys none of your RTO back. It's a complementary control, listed alongside the recovery components, not instead of them.</a:t>
-            </a:r>
-          </a:p>
-          <a:p>
-            <a:r>
-              <a:t>Question to pose: "Your cloud provider fully refunds the outage — are you recovered?" (No — a refund isn't restored service; insurance covers residual loss, recovery restores the system).</a:t>
-            </a:r>
-          </a:p>
-          <a:p>
-            <a:r>
-              <a:t>UoC/AT1 tie: [ICTCLD501 PC 3.3] (insurance as a complementary control) + [ICTCLD501 PC 3.4] (identify other DR components) — AT1 Part B B11.</a:t>
+              <a:t>Workbook tasks 31 and 32. Insurance sits alongside recovery, never instead of it — a refund buys back none of your recovery time.</a:t>
+            </a:r>
+          </a:p>
+          <a:p>
+            <a:r>
+              <a:t>The human components are the ones students forget; prompt "who declares the disaster?"</a:t>
             </a:r>
           </a:p>
         </p:txBody>
@@ -1480,37 +1351,12 @@
           <a:lstStyle/>
           <a:p>
             <a:r>
-              <a:t>Teach the CONTINUITY STANDARDS — the recognised frameworks that give the plan structure and assurance. Vendor-neutral; brief but examinable (KE 4).</a:t>
-            </a:r>
-          </a:p>
-          <a:p>
-            <a:r>
-              <a:t>• First bullet: ISO/IEC 27031 — ICT READINESS for business continuity (the DR-relevant one); 27001/27002 — the security MANAGEMENT context around it. Know which standard covers what.</a:t>
-            </a:r>
-          </a:p>
-          <a:p>
-            <a:r>
-              <a:t>• Second bullet: standards give the plan a RECOGNISED STRUCTURE and assurance LANGUAGE — you're not inventing terms; you're speaking a language auditors and clients already trust.</a:t>
-            </a:r>
-          </a:p>
-          <a:p>
-            <a:r>
-              <a:t>• Third bullet (accent it): REFERENCE them so the plan is AUDITABLE, not ad hoc. Citing the standard is what lets an external party assure the plan.</a:t>
-            </a:r>
-          </a:p>
-          <a:p>
-            <a:r>
-              <a:t>Misconception to pre-empt: "we have to fully implement ISO 27031." No — at this level you REFERENCE the relevant standards to structure and justify the plan; certification is a separate organisational undertaking.</a:t>
-            </a:r>
-          </a:p>
-          <a:p>
-            <a:r>
-              <a:t>Question to pose: "Which of these standards is the one specifically about ICT readiness for continuity?" (27031 — 27001/27002 are the broader security-management context).</a:t>
-            </a:r>
-          </a:p>
-          <a:p>
-            <a:r>
-              <a:t>UoC/AT1 tie: [ICTCLD501 KE 4] (ISO/IEC 27001/27002/27031) — AT1 Part B KE appendix (B15).</a:t>
+              <a:t>Activity = practice workbook tasks 30–32.</a:t>
+            </a:r>
+          </a:p>
+          <a:p>
+            <a:r>
+              <a:t>Push past the technical parts — escalation, communications and ownership are assessed components too.</a:t>
             </a:r>
           </a:p>
         </p:txBody>
@@ -1580,57 +1426,12 @@
           <a:lstStyle/>
           <a:p>
             <a:r>
-              <a:t>Facilitation — the C2 practice: set the recovery PRIORITY and list the plan's other components for the practice scenario. Rehearses AT1 Part B B11.</a:t>
-            </a:r>
-          </a:p>
-          <a:p>
-            <a:r>
-              <a:t>Tell students: "For the practice scenario, set the recovery PRIORITY order against your ranked risks — then list the vendor native protections you'll lean on and the other plan components: runbook, escalation, comms, DNS failover."</a:t>
-            </a:r>
-          </a:p>
-          <a:p>
-            <a:r>
-              <a:t>Steps (put on the board):</a:t>
-            </a:r>
-          </a:p>
-          <a:p>
-            <a:r>
-              <a:t>1. Order the recovery by severity/criticality — what comes back first, second, third, and why.</a:t>
-            </a:r>
-          </a:p>
-          <a:p>
-            <a:r>
-              <a:t>2. List the native protections you'll build on (backups, cross-region copy, durable storage).</a:t>
-            </a:r>
-          </a:p>
-          <a:p>
-            <a:r>
-              <a:t>3. List the other components: runbook, declaration/escalation, communications, DNS failover — note insurance if relevant as a residual-loss control.</a:t>
-            </a:r>
-          </a:p>
-          <a:p>
-            <a:r>
-              <a:t>Must produce: a prioritised recovery order plus a components checklist (native protections + operational components).</a:t>
-            </a:r>
-          </a:p>
-          <a:p>
-            <a:r>
-              <a:t>Timing: ~20 min. Where they get stuck: they try to recover everything at once (force a priority order tied to the risk ranking), and they list only technical parts (prompt "who declares the disaster? how are people told?").</a:t>
-            </a:r>
-          </a:p>
-          <a:p>
-            <a:r>
-              <a:t>Share-back prompt: "What recovers first, and which risk ranking put it there?" — ties priority back to Topic 3.</a:t>
-            </a:r>
-          </a:p>
-          <a:p>
-            <a:r>
-              <a:t>No-leakage note: practice scenario only (comparable, not identical); AT1 evidences the same prioritise-and-components skill on the assessed system — keep them on the practice brief.</a:t>
-            </a:r>
-          </a:p>
-          <a:p>
-            <a:r>
-              <a:t>UoC/AT1 tie: [ICTCLD501 PC 3.2] · [ICTCLD501 PC 3.3] · [ICTCLD501 PC 3.4] · [ICTCLD501 KE 4] — prioritisation + the other plan components (AT1 Part B B11).</a:t>
+              <a:t>Workbook task 33 — detection as part of the plan, not an assumption. The RTO clock starts at the event, not at the discovery.</a:t>
+            </a:r>
+          </a:p>
+          <a:p>
+            <a:r>
+              <a:t>Tie back to the alarm work they'll do in AT2 — same machinery, planning-side view.</a:t>
             </a:r>
           </a:p>
         </p:txBody>
@@ -1700,37 +1501,12 @@
           <a:lstStyle/>
           <a:p>
             <a:r>
-              <a:t>Open C3 — assembling the actual plan. Teach ALIGNMENT: every prioritised risk maps to a recovery action. This is the plan's core integrity test.</a:t>
-            </a:r>
-          </a:p>
-          <a:p>
-            <a:r>
-              <a:t>• First bullet: for EACH prioritised risk, state the recovery ACTION that addresses it — a one-to-one mapping from risk to response, no risk left unanswered.</a:t>
-            </a:r>
-          </a:p>
-          <a:p>
-            <a:r>
-              <a:t>• Second bullet: the plan must cover at least the THREE major risk events from the impact analysis (PE 1) — the same three from Topic 3; the analysis and the plan must line up.</a:t>
-            </a:r>
-          </a:p>
-          <a:p>
-            <a:r>
-              <a:t>• Third bullet (accent it): ALIGNMENT is the test — every high-severity risk has an OWNED recovery action. "Owned" means a named responsible party, not just an action floating in the plan.</a:t>
-            </a:r>
-          </a:p>
-          <a:p>
-            <a:r>
-              <a:t>Misconception to pre-empt: "the plan is a general recovery procedure." No — it must trace RISK → ACTION for each prioritised risk; a generic procedure that doesn't map to the specific analysed risks fails alignment.</a:t>
-            </a:r>
-          </a:p>
-          <a:p>
-            <a:r>
-              <a:t>Question to pose: "You have five ranked risks and a plan with four actions — what does that gap tell you?" (a high-severity risk has no owned recovery action — the plan isn't aligned yet).</a:t>
-            </a:r>
-          </a:p>
-          <a:p>
-            <a:r>
-              <a:t>UoC/AT1 tie: [ICTCLD501 PC 4.1] (align DR actions to risks per requirements) + [ICTCLD501 PE 1] (plan covers ≥3 major risk events) — AT1 Part B B12.</a:t>
+              <a:t>Workbook task 34 — the runbook. Walk the diagram: detect, declare, recover in priority order, verify.</a:t>
+            </a:r>
+          </a:p>
+          <a:p>
+            <a:r>
+              <a:t>No anonymous actions; every step carries a who and a done.</a:t>
             </a:r>
           </a:p>
         </p:txBody>
@@ -4849,7 +4625,7 @@
                 </a:solidFill>
                 <a:latin typeface="Roboto Light"/>
               </a:rPr>
-              <a:t>Choose a recovery strategy to the objectives and produce the documented DR plan</a:t>
+              <a:t>Choose a recovery strategy to the objectives and assemble the documented DR plan</a:t>
             </a:r>
           </a:p>
         </p:txBody>
@@ -4952,7 +4728,7 @@
                 </a:solidFill>
                 <a:latin typeface="Roboto"/>
               </a:rPr>
-              <a:t>Insurance &amp; the other plan components</a:t>
+              <a:t>Lean on native protections and prioritise</a:t>
             </a:r>
           </a:p>
         </p:txBody>
@@ -5050,7 +4826,7 @@
                 </a:solidFill>
                 <a:latin typeface="Roboto"/>
               </a:rPr>
-              <a:t>Insurance is a complementary risk-transfer control — it covers residual loss, it does not restore service.</a:t>
+              <a:t>Use the vendor's native protections: automated backups, cross-region copy, durable storage.</a:t>
             </a:r>
           </a:p>
           <a:p>
@@ -5081,7 +4857,7 @@
                 </a:solidFill>
                 <a:latin typeface="Roboto"/>
               </a:rPr>
-              <a:t>Other components: the runbook, declaration/escalation, communications, and DNS failover.</a:t>
+              <a:t>Prioritise recovery against the ranked risks — the highest-severity, business-critical parts come back first.</a:t>
             </a:r>
           </a:p>
           <a:p>
@@ -5112,7 +4888,7 @@
                 </a:solidFill>
                 <a:latin typeface="Roboto"/>
               </a:rPr>
-              <a:t>A plan is more than a strategy — it is who does what, in what order, and how people are told.</a:t>
+              <a:t>Native durability does the heavy lifting; your plan sequences and governs it.</a:t>
             </a:r>
           </a:p>
         </p:txBody>
@@ -5294,7 +5070,7 @@
                 </a:solidFill>
                 <a:latin typeface="Roboto"/>
               </a:rPr>
-              <a:t>Continuity standards</a:t>
+              <a:t>Insurance, and the other components</a:t>
             </a:r>
           </a:p>
         </p:txBody>
@@ -5392,7 +5168,7 @@
                 </a:solidFill>
                 <a:latin typeface="Roboto"/>
               </a:rPr>
-              <a:t>ISO/IEC 27031 — ICT readiness for business continuity; 27001/27002 — the security management context.</a:t>
+              <a:t>Insurance transfers residual loss — it covers money, it does not restore service.</a:t>
             </a:r>
           </a:p>
           <a:p>
@@ -5423,7 +5199,7 @@
                 </a:solidFill>
                 <a:latin typeface="Roboto"/>
               </a:rPr>
-              <a:t>Standards give the plan a recognised structure and assurance language.</a:t>
+              <a:t>The other components: the runbook, declaration and escalation, communications, failover of the entry point.</a:t>
             </a:r>
           </a:p>
           <a:p>
@@ -5454,7 +5230,7 @@
                 </a:solidFill>
                 <a:latin typeface="Roboto"/>
               </a:rPr>
-              <a:t>Reference them so the plan is auditable, not ad hoc.</a:t>
+              <a:t>A plan is who does what, in what order, and how people are told — not just a strategy name.</a:t>
             </a:r>
           </a:p>
         </p:txBody>
@@ -5733,7 +5509,7 @@
                 </a:solidFill>
                 <a:latin typeface="Roboto"/>
               </a:rPr>
-              <a:t>Prioritise &amp; list the other components</a:t>
+              <a:t>Priorities, insurance and components</a:t>
             </a:r>
           </a:p>
         </p:txBody>
@@ -5787,7 +5563,7 @@
                 </a:solidFill>
                 <a:latin typeface="Roboto"/>
               </a:rPr>
-              <a:t>For the practice scenario, set the recovery priority against the risks.</a:t>
+              <a:t>Workbook — tasks 30, 31 and 32.</a:t>
             </a:r>
           </a:p>
           <a:p>
@@ -5818,7 +5594,7 @@
                 </a:solidFill>
                 <a:latin typeface="Roboto"/>
               </a:rPr>
-              <a:t>List the vendor protections leaned on and the other plan components (runbook, escalation, comms, DNS).</a:t>
+              <a:t>Record the vendor protections leaned on and the recovery priorities, the role insurance plays, and the other components your plan carries.</a:t>
             </a:r>
           </a:p>
         </p:txBody>
@@ -5898,7 +5674,7 @@
                 </a:solidFill>
                 <a:latin typeface="Roboto"/>
               </a:rPr>
-              <a:t>⏱  ~20 min</a:t>
+              <a:t>⏱  ~25 min</a:t>
             </a:r>
           </a:p>
         </p:txBody>
@@ -6039,7 +5815,7 @@
     <p:bg>
       <p:bgPr>
         <a:solidFill>
-          <a:srgbClr val="FFFFFF"/>
+          <a:srgbClr val="F9F9F9"/>
         </a:solidFill>
         <a:effectLst/>
       </p:bgPr>
@@ -6053,20 +5829,70 @@
       <p:grpSpPr/>
       <p:sp>
         <p:nvSpPr>
-          <p:cNvPr id="2" name="Rectangle 1"/>
+          <p:cNvPr id="2" name="TextBox 1"/>
+          <p:cNvSpPr txBox="1"/>
+          <p:nvPr/>
+        </p:nvSpPr>
+        <p:spPr>
+          <a:xfrm>
+            <a:off x="640080" y="548640"/>
+            <a:ext cx="10881360" cy="1097280"/>
+          </a:xfrm>
+          <a:prstGeom prst="rect">
+            <a:avLst/>
+          </a:prstGeom>
+          <a:noFill/>
+        </p:spPr>
+        <p:txBody>
+          <a:bodyPr wrap="square" anchor="t" lIns="0" rIns="0" tIns="0" bIns="0">
+            <a:spAutoFit/>
+          </a:bodyPr>
+          <a:lstStyle/>
+          <a:p>
+            <a:r>
+              <a:rPr sz="3200" b="1" i="0">
+                <a:solidFill>
+                  <a:srgbClr val="2A2929"/>
+                </a:solidFill>
+                <a:latin typeface="Roboto"/>
+              </a:rPr>
+              <a:t>Key takeaways</a:t>
+            </a:r>
+          </a:p>
+          <a:p>
+            <a:pPr>
+              <a:spcBef>
+                <a:spcPts val="200"/>
+              </a:spcBef>
+            </a:pPr>
+            <a:r>
+              <a:rPr sz="1800" b="1" i="0">
+                <a:solidFill>
+                  <a:srgbClr val="27B5CE"/>
+                </a:solidFill>
+                <a:latin typeface="Roboto"/>
+              </a:rPr>
+              <a:t>Section 2 · The components</a:t>
+            </a:r>
+          </a:p>
+        </p:txBody>
+      </p:sp>
+      <p:sp>
+        <p:nvSpPr>
+          <p:cNvPr id="3" name="Rectangle 2"/>
           <p:cNvSpPr/>
           <p:nvPr/>
         </p:nvSpPr>
         <p:spPr>
           <a:xfrm>
-            <a:off x="0" y="0"/>
-            <a:ext cx="3931920" cy="6858000"/>
+            <a:off x="658368" y="1600200"/>
+            <a:ext cx="1463040" cy="50800"/>
           </a:xfrm>
           <a:prstGeom prst="rect">
             <a:avLst/>
           </a:prstGeom>
           <a:solidFill>
-            <a:srgbClr val="205F61"/>
+            <a:srgbClr val="27B5CE"/>
           </a:solidFill>
           <a:ln>
             <a:noFill/>
@@ -6097,101 +5923,47 @@
       </p:sp>
       <p:sp>
         <p:nvSpPr>
-          <p:cNvPr id="3" name="TextBox 2"/>
-          <p:cNvSpPr txBox="1"/>
-          <p:nvPr/>
-        </p:nvSpPr>
-        <p:spPr>
-          <a:xfrm>
-            <a:off x="365760" y="2103120"/>
-            <a:ext cx="3291840" cy="2194560"/>
-          </a:xfrm>
-          <a:prstGeom prst="rect">
-            <a:avLst/>
-          </a:prstGeom>
-          <a:noFill/>
-        </p:spPr>
-        <p:txBody>
-          <a:bodyPr wrap="square" anchor="t" lIns="0" rIns="0" tIns="0" bIns="0">
-            <a:spAutoFit/>
-          </a:bodyPr>
-          <a:lstStyle/>
-          <a:p>
-            <a:r>
-              <a:rPr sz="13000" b="1" i="0">
-                <a:solidFill>
-                  <a:srgbClr val="FFFFFF"/>
-                </a:solidFill>
-                <a:latin typeface="Roboto"/>
-              </a:rPr>
-              <a:t>03</a:t>
-            </a:r>
-          </a:p>
-        </p:txBody>
-      </p:sp>
-      <p:sp>
-        <p:nvSpPr>
-          <p:cNvPr id="4" name="TextBox 3"/>
-          <p:cNvSpPr txBox="1"/>
-          <p:nvPr/>
-        </p:nvSpPr>
-        <p:spPr>
-          <a:xfrm>
-            <a:off x="4480560" y="2468880"/>
-            <a:ext cx="7132320" cy="2194560"/>
-          </a:xfrm>
-          <a:prstGeom prst="rect">
-            <a:avLst/>
-          </a:prstGeom>
-          <a:noFill/>
-        </p:spPr>
-        <p:txBody>
-          <a:bodyPr wrap="square" anchor="t" lIns="0" rIns="0" tIns="0" bIns="0">
-            <a:spAutoFit/>
-          </a:bodyPr>
-          <a:lstStyle/>
-          <a:p>
-            <a:r>
-              <a:rPr sz="1600" b="1" i="0">
-                <a:solidFill>
-                  <a:srgbClr val="205F61"/>
-                </a:solidFill>
-                <a:latin typeface="Roboto"/>
-              </a:rPr>
-              <a:t>SECTION</a:t>
-            </a:r>
-          </a:p>
-          <a:p>
-            <a:pPr>
-              <a:spcBef>
-                <a:spcPts val="600"/>
-              </a:spcBef>
-            </a:pPr>
-            <a:r>
-              <a:rPr sz="3800" b="1" i="0">
-                <a:solidFill>
-                  <a:srgbClr val="2A2929"/>
-                </a:solidFill>
-                <a:latin typeface="Roboto"/>
-              </a:rPr>
-              <a:t>The disaster recovery plan</a:t>
-            </a:r>
-          </a:p>
-          <a:p>
-            <a:pPr>
-              <a:spcBef>
-                <a:spcPts val="1000"/>
-              </a:spcBef>
-            </a:pPr>
-            <a:r>
-              <a:rPr sz="2000" b="0" i="1">
-                <a:solidFill>
-                  <a:srgbClr val="484848"/>
-                </a:solidFill>
-                <a:latin typeface="Roboto Light"/>
-              </a:rPr>
-              <a:t>aligned, timed, and provably on target</a:t>
-            </a:r>
+          <p:cNvPr id="4" name="Rectangle 3"/>
+          <p:cNvSpPr/>
+          <p:nvPr/>
+        </p:nvSpPr>
+        <p:spPr>
+          <a:xfrm>
+            <a:off x="640080" y="1965960"/>
+            <a:ext cx="10927080" cy="841248"/>
+          </a:xfrm>
+          <a:prstGeom prst="rect">
+            <a:avLst/>
+          </a:prstGeom>
+          <a:solidFill>
+            <a:srgbClr val="FFFFFF"/>
+          </a:solidFill>
+          <a:ln w="12700">
+            <a:solidFill>
+              <a:srgbClr val="CCCCCC"/>
+            </a:solidFill>
+          </a:ln>
+          <a:effectLst/>
+        </p:spPr>
+        <p:style>
+          <a:lnRef idx="1">
+            <a:schemeClr val="accent1"/>
+          </a:lnRef>
+          <a:fillRef idx="3">
+            <a:schemeClr val="accent1"/>
+          </a:fillRef>
+          <a:effectRef idx="2">
+            <a:schemeClr val="accent1"/>
+          </a:effectRef>
+          <a:fontRef idx="minor">
+            <a:schemeClr val="lt1"/>
+          </a:fontRef>
+        </p:style>
+        <p:txBody>
+          <a:bodyPr rtlCol="0" anchor="ctr"/>
+          <a:lstStyle/>
+          <a:p>
+            <a:pPr algn="ctr"/>
           </a:p>
         </p:txBody>
       </p:sp>
@@ -6203,14 +5975,14 @@
         </p:nvSpPr>
         <p:spPr>
           <a:xfrm>
-            <a:off x="0" y="6565392"/>
-            <a:ext cx="12191695" cy="38100"/>
+            <a:off x="640080" y="1965960"/>
+            <a:ext cx="109728" cy="841248"/>
           </a:xfrm>
           <a:prstGeom prst="rect">
             <a:avLst/>
           </a:prstGeom>
           <a:solidFill>
-            <a:srgbClr val="205F61"/>
+            <a:srgbClr val="27B5CE"/>
           </a:solidFill>
           <a:ln>
             <a:noFill/>
@@ -6247,6 +6019,347 @@
         </p:nvSpPr>
         <p:spPr>
           <a:xfrm>
+            <a:off x="960120" y="1965960"/>
+            <a:ext cx="10424160" cy="841248"/>
+          </a:xfrm>
+          <a:prstGeom prst="rect">
+            <a:avLst/>
+          </a:prstGeom>
+          <a:noFill/>
+        </p:spPr>
+        <p:txBody>
+          <a:bodyPr wrap="square" anchor="ctr" lIns="0" rIns="0" tIns="0" bIns="0">
+            <a:spAutoFit/>
+          </a:bodyPr>
+          <a:lstStyle/>
+          <a:p>
+            <a:pPr>
+              <a:lnSpc>
+                <a:spcPct val="100000"/>
+              </a:lnSpc>
+            </a:pPr>
+            <a:r>
+              <a:rPr sz="1700" b="0" i="0">
+                <a:solidFill>
+                  <a:srgbClr val="2A2929"/>
+                </a:solidFill>
+                <a:latin typeface="Roboto"/>
+              </a:rPr>
+              <a:t>Build on native protections; sequence by severity.</a:t>
+            </a:r>
+          </a:p>
+        </p:txBody>
+      </p:sp>
+      <p:sp>
+        <p:nvSpPr>
+          <p:cNvPr id="7" name="Rectangle 6"/>
+          <p:cNvSpPr/>
+          <p:nvPr/>
+        </p:nvSpPr>
+        <p:spPr>
+          <a:xfrm>
+            <a:off x="640080" y="2916936"/>
+            <a:ext cx="10927080" cy="841248"/>
+          </a:xfrm>
+          <a:prstGeom prst="rect">
+            <a:avLst/>
+          </a:prstGeom>
+          <a:solidFill>
+            <a:srgbClr val="FFFFFF"/>
+          </a:solidFill>
+          <a:ln w="12700">
+            <a:solidFill>
+              <a:srgbClr val="CCCCCC"/>
+            </a:solidFill>
+          </a:ln>
+          <a:effectLst/>
+        </p:spPr>
+        <p:style>
+          <a:lnRef idx="1">
+            <a:schemeClr val="accent1"/>
+          </a:lnRef>
+          <a:fillRef idx="3">
+            <a:schemeClr val="accent1"/>
+          </a:fillRef>
+          <a:effectRef idx="2">
+            <a:schemeClr val="accent1"/>
+          </a:effectRef>
+          <a:fontRef idx="minor">
+            <a:schemeClr val="lt1"/>
+          </a:fontRef>
+        </p:style>
+        <p:txBody>
+          <a:bodyPr rtlCol="0" anchor="ctr"/>
+          <a:lstStyle/>
+          <a:p>
+            <a:pPr algn="ctr"/>
+          </a:p>
+        </p:txBody>
+      </p:sp>
+      <p:sp>
+        <p:nvSpPr>
+          <p:cNvPr id="8" name="Rectangle 7"/>
+          <p:cNvSpPr/>
+          <p:nvPr/>
+        </p:nvSpPr>
+        <p:spPr>
+          <a:xfrm>
+            <a:off x="640080" y="2916936"/>
+            <a:ext cx="109728" cy="841248"/>
+          </a:xfrm>
+          <a:prstGeom prst="rect">
+            <a:avLst/>
+          </a:prstGeom>
+          <a:solidFill>
+            <a:srgbClr val="27B5CE"/>
+          </a:solidFill>
+          <a:ln>
+            <a:noFill/>
+          </a:ln>
+          <a:effectLst/>
+        </p:spPr>
+        <p:style>
+          <a:lnRef idx="1">
+            <a:schemeClr val="accent1"/>
+          </a:lnRef>
+          <a:fillRef idx="3">
+            <a:schemeClr val="accent1"/>
+          </a:fillRef>
+          <a:effectRef idx="2">
+            <a:schemeClr val="accent1"/>
+          </a:effectRef>
+          <a:fontRef idx="minor">
+            <a:schemeClr val="lt1"/>
+          </a:fontRef>
+        </p:style>
+        <p:txBody>
+          <a:bodyPr rtlCol="0" anchor="ctr"/>
+          <a:lstStyle/>
+          <a:p>
+            <a:pPr algn="ctr"/>
+          </a:p>
+        </p:txBody>
+      </p:sp>
+      <p:sp>
+        <p:nvSpPr>
+          <p:cNvPr id="9" name="TextBox 8"/>
+          <p:cNvSpPr txBox="1"/>
+          <p:nvPr/>
+        </p:nvSpPr>
+        <p:spPr>
+          <a:xfrm>
+            <a:off x="960120" y="2916936"/>
+            <a:ext cx="10424160" cy="841248"/>
+          </a:xfrm>
+          <a:prstGeom prst="rect">
+            <a:avLst/>
+          </a:prstGeom>
+          <a:noFill/>
+        </p:spPr>
+        <p:txBody>
+          <a:bodyPr wrap="square" anchor="ctr" lIns="0" rIns="0" tIns="0" bIns="0">
+            <a:spAutoFit/>
+          </a:bodyPr>
+          <a:lstStyle/>
+          <a:p>
+            <a:pPr>
+              <a:lnSpc>
+                <a:spcPct val="100000"/>
+              </a:lnSpc>
+            </a:pPr>
+            <a:r>
+              <a:rPr sz="1700" b="0" i="0">
+                <a:solidFill>
+                  <a:srgbClr val="2A2929"/>
+                </a:solidFill>
+                <a:latin typeface="Roboto"/>
+              </a:rPr>
+              <a:t>Insurance covers residual loss only.</a:t>
+            </a:r>
+          </a:p>
+        </p:txBody>
+      </p:sp>
+      <p:sp>
+        <p:nvSpPr>
+          <p:cNvPr id="10" name="Rectangle 9"/>
+          <p:cNvSpPr/>
+          <p:nvPr/>
+        </p:nvSpPr>
+        <p:spPr>
+          <a:xfrm>
+            <a:off x="640080" y="3867912"/>
+            <a:ext cx="10927080" cy="841248"/>
+          </a:xfrm>
+          <a:prstGeom prst="rect">
+            <a:avLst/>
+          </a:prstGeom>
+          <a:solidFill>
+            <a:srgbClr val="FFFFFF"/>
+          </a:solidFill>
+          <a:ln w="12700">
+            <a:solidFill>
+              <a:srgbClr val="CCCCCC"/>
+            </a:solidFill>
+          </a:ln>
+          <a:effectLst/>
+        </p:spPr>
+        <p:style>
+          <a:lnRef idx="1">
+            <a:schemeClr val="accent1"/>
+          </a:lnRef>
+          <a:fillRef idx="3">
+            <a:schemeClr val="accent1"/>
+          </a:fillRef>
+          <a:effectRef idx="2">
+            <a:schemeClr val="accent1"/>
+          </a:effectRef>
+          <a:fontRef idx="minor">
+            <a:schemeClr val="lt1"/>
+          </a:fontRef>
+        </p:style>
+        <p:txBody>
+          <a:bodyPr rtlCol="0" anchor="ctr"/>
+          <a:lstStyle/>
+          <a:p>
+            <a:pPr algn="ctr"/>
+          </a:p>
+        </p:txBody>
+      </p:sp>
+      <p:sp>
+        <p:nvSpPr>
+          <p:cNvPr id="11" name="Rectangle 10"/>
+          <p:cNvSpPr/>
+          <p:nvPr/>
+        </p:nvSpPr>
+        <p:spPr>
+          <a:xfrm>
+            <a:off x="640080" y="3867912"/>
+            <a:ext cx="109728" cy="841248"/>
+          </a:xfrm>
+          <a:prstGeom prst="rect">
+            <a:avLst/>
+          </a:prstGeom>
+          <a:solidFill>
+            <a:srgbClr val="27B5CE"/>
+          </a:solidFill>
+          <a:ln>
+            <a:noFill/>
+          </a:ln>
+          <a:effectLst/>
+        </p:spPr>
+        <p:style>
+          <a:lnRef idx="1">
+            <a:schemeClr val="accent1"/>
+          </a:lnRef>
+          <a:fillRef idx="3">
+            <a:schemeClr val="accent1"/>
+          </a:fillRef>
+          <a:effectRef idx="2">
+            <a:schemeClr val="accent1"/>
+          </a:effectRef>
+          <a:fontRef idx="minor">
+            <a:schemeClr val="lt1"/>
+          </a:fontRef>
+        </p:style>
+        <p:txBody>
+          <a:bodyPr rtlCol="0" anchor="ctr"/>
+          <a:lstStyle/>
+          <a:p>
+            <a:pPr algn="ctr"/>
+          </a:p>
+        </p:txBody>
+      </p:sp>
+      <p:sp>
+        <p:nvSpPr>
+          <p:cNvPr id="12" name="TextBox 11"/>
+          <p:cNvSpPr txBox="1"/>
+          <p:nvPr/>
+        </p:nvSpPr>
+        <p:spPr>
+          <a:xfrm>
+            <a:off x="960120" y="3867912"/>
+            <a:ext cx="10424160" cy="841248"/>
+          </a:xfrm>
+          <a:prstGeom prst="rect">
+            <a:avLst/>
+          </a:prstGeom>
+          <a:noFill/>
+        </p:spPr>
+        <p:txBody>
+          <a:bodyPr wrap="square" anchor="ctr" lIns="0" rIns="0" tIns="0" bIns="0">
+            <a:spAutoFit/>
+          </a:bodyPr>
+          <a:lstStyle/>
+          <a:p>
+            <a:pPr>
+              <a:lnSpc>
+                <a:spcPct val="100000"/>
+              </a:lnSpc>
+            </a:pPr>
+            <a:r>
+              <a:rPr sz="1700" b="0" i="0">
+                <a:solidFill>
+                  <a:srgbClr val="2A2929"/>
+                </a:solidFill>
+                <a:latin typeface="Roboto"/>
+              </a:rPr>
+              <a:t>Runbook, escalation, communications, failover — the plan's working parts.</a:t>
+            </a:r>
+          </a:p>
+        </p:txBody>
+      </p:sp>
+      <p:sp>
+        <p:nvSpPr>
+          <p:cNvPr id="13" name="Rectangle 12"/>
+          <p:cNvSpPr/>
+          <p:nvPr/>
+        </p:nvSpPr>
+        <p:spPr>
+          <a:xfrm>
+            <a:off x="0" y="6565392"/>
+            <a:ext cx="12191695" cy="38100"/>
+          </a:xfrm>
+          <a:prstGeom prst="rect">
+            <a:avLst/>
+          </a:prstGeom>
+          <a:solidFill>
+            <a:srgbClr val="27B5CE"/>
+          </a:solidFill>
+          <a:ln>
+            <a:noFill/>
+          </a:ln>
+          <a:effectLst/>
+        </p:spPr>
+        <p:style>
+          <a:lnRef idx="1">
+            <a:schemeClr val="accent1"/>
+          </a:lnRef>
+          <a:fillRef idx="3">
+            <a:schemeClr val="accent1"/>
+          </a:fillRef>
+          <a:effectRef idx="2">
+            <a:schemeClr val="accent1"/>
+          </a:effectRef>
+          <a:fontRef idx="minor">
+            <a:schemeClr val="lt1"/>
+          </a:fontRef>
+        </p:style>
+        <p:txBody>
+          <a:bodyPr rtlCol="0" anchor="ctr"/>
+          <a:lstStyle/>
+          <a:p>
+            <a:pPr algn="ctr"/>
+          </a:p>
+        </p:txBody>
+      </p:sp>
+      <p:sp>
+        <p:nvSpPr>
+          <p:cNvPr id="14" name="TextBox 13"/>
+          <p:cNvSpPr txBox="1"/>
+          <p:nvPr/>
+        </p:nvSpPr>
+        <p:spPr>
+          <a:xfrm>
             <a:off x="502920" y="6400800"/>
             <a:ext cx="5486400" cy="320040"/>
           </a:xfrm>
@@ -6284,7 +6397,7 @@
       </p:sp>
       <p:sp>
         <p:nvSpPr>
-          <p:cNvPr id="7" name="TextBox 6"/>
+          <p:cNvPr id="15" name="TextBox 14"/>
           <p:cNvSpPr txBox="1"/>
           <p:nvPr/>
         </p:nvSpPr>
@@ -6312,7 +6425,7 @@
                 </a:solidFill>
                 <a:latin typeface="Roboto"/>
               </a:rPr>
-              <a:t/>
+              <a:t>10</a:t>
             </a:r>
           </a:p>
         </p:txBody>
@@ -6345,48 +6458,14 @@
       <p:grpSpPr/>
       <p:sp>
         <p:nvSpPr>
-          <p:cNvPr id="2" name="TextBox 1"/>
-          <p:cNvSpPr txBox="1"/>
-          <p:nvPr/>
-        </p:nvSpPr>
-        <p:spPr>
-          <a:xfrm>
-            <a:off x="640080" y="457200"/>
-            <a:ext cx="10881360" cy="960120"/>
-          </a:xfrm>
-          <a:prstGeom prst="rect">
-            <a:avLst/>
-          </a:prstGeom>
-          <a:noFill/>
-        </p:spPr>
-        <p:txBody>
-          <a:bodyPr wrap="square" anchor="t" lIns="0" rIns="0" tIns="0" bIns="0">
-            <a:spAutoFit/>
-          </a:bodyPr>
-          <a:lstStyle/>
-          <a:p>
-            <a:r>
-              <a:rPr sz="2800" b="1" i="0">
-                <a:solidFill>
-                  <a:srgbClr val="2A2929"/>
-                </a:solidFill>
-                <a:latin typeface="Roboto"/>
-              </a:rPr>
-              <a:t>Align actions to the prioritised risks</a:t>
-            </a:r>
-          </a:p>
-        </p:txBody>
-      </p:sp>
-      <p:sp>
-        <p:nvSpPr>
-          <p:cNvPr id="3" name="Rectangle 2"/>
+          <p:cNvPr id="2" name="Rectangle 1"/>
           <p:cNvSpPr/>
           <p:nvPr/>
         </p:nvSpPr>
         <p:spPr>
           <a:xfrm>
-            <a:off x="658368" y="1371600"/>
-            <a:ext cx="1463040" cy="50800"/>
+            <a:off x="0" y="0"/>
+            <a:ext cx="3931920" cy="6858000"/>
           </a:xfrm>
           <a:prstGeom prst="rect">
             <a:avLst/>
@@ -6423,14 +6502,48 @@
       </p:sp>
       <p:sp>
         <p:nvSpPr>
+          <p:cNvPr id="3" name="TextBox 2"/>
+          <p:cNvSpPr txBox="1"/>
+          <p:nvPr/>
+        </p:nvSpPr>
+        <p:spPr>
+          <a:xfrm>
+            <a:off x="365760" y="2103120"/>
+            <a:ext cx="3291840" cy="2194560"/>
+          </a:xfrm>
+          <a:prstGeom prst="rect">
+            <a:avLst/>
+          </a:prstGeom>
+          <a:noFill/>
+        </p:spPr>
+        <p:txBody>
+          <a:bodyPr wrap="square" anchor="t" lIns="0" rIns="0" tIns="0" bIns="0">
+            <a:spAutoFit/>
+          </a:bodyPr>
+          <a:lstStyle/>
+          <a:p>
+            <a:r>
+              <a:rPr sz="13000" b="1" i="0">
+                <a:solidFill>
+                  <a:srgbClr val="FFFFFF"/>
+                </a:solidFill>
+                <a:latin typeface="Roboto"/>
+              </a:rPr>
+              <a:t>03</a:t>
+            </a:r>
+          </a:p>
+        </p:txBody>
+      </p:sp>
+      <p:sp>
+        <p:nvSpPr>
           <p:cNvPr id="4" name="TextBox 3"/>
           <p:cNvSpPr txBox="1"/>
           <p:nvPr/>
         </p:nvSpPr>
         <p:spPr>
           <a:xfrm>
-            <a:off x="658368" y="1691640"/>
-            <a:ext cx="10881360" cy="4480560"/>
+            <a:off x="4480560" y="2468880"/>
+            <a:ext cx="7132320" cy="2194560"/>
           </a:xfrm>
           <a:prstGeom prst="rect">
             <a:avLst/>
@@ -6438,101 +6551,51 @@
           <a:noFill/>
         </p:spPr>
         <p:txBody>
-          <a:bodyPr wrap="square" anchor="ctr" lIns="0" rIns="0" tIns="0" bIns="0">
+          <a:bodyPr wrap="square" anchor="t" lIns="0" rIns="0" tIns="0" bIns="0">
             <a:spAutoFit/>
           </a:bodyPr>
           <a:lstStyle/>
           <a:p>
-            <a:pPr marL="0" indent="0">
-              <a:lnSpc>
-                <a:spcPct val="105000"/>
-              </a:lnSpc>
+            <a:r>
+              <a:rPr sz="1600" b="1" i="0">
+                <a:solidFill>
+                  <a:srgbClr val="205F61"/>
+                </a:solidFill>
+                <a:latin typeface="Roboto"/>
+              </a:rPr>
+              <a:t>SECTION</a:t>
+            </a:r>
+          </a:p>
+          <a:p>
+            <a:pPr>
               <a:spcBef>
-                <a:spcPts val="0"/>
+                <a:spcPts val="600"/>
               </a:spcBef>
-              <a:spcAft>
+            </a:pPr>
+            <a:r>
+              <a:rPr sz="3800" b="1" i="0">
+                <a:solidFill>
+                  <a:srgbClr val="2A2929"/>
+                </a:solidFill>
+                <a:latin typeface="Roboto"/>
+              </a:rPr>
+              <a:t>Detection, steps, and proving the targets</a:t>
+            </a:r>
+          </a:p>
+          <a:p>
+            <a:pPr>
+              <a:spcBef>
                 <a:spcPts val="1000"/>
-              </a:spcAft>
+              </a:spcBef>
             </a:pPr>
             <a:r>
-              <a:rPr sz="2400" b="1" i="0">
-                <a:solidFill>
-                  <a:srgbClr val="EDAB0C"/>
-                </a:solidFill>
-                <a:latin typeface="Roboto"/>
-              </a:rPr>
-              <a:t>■  </a:t>
-            </a:r>
-            <a:r>
-              <a:rPr sz="2400" b="0" i="0">
-                <a:solidFill>
-                  <a:srgbClr val="2A2929"/>
-                </a:solidFill>
-                <a:latin typeface="Roboto"/>
-              </a:rPr>
-              <a:t>For each prioritised risk, state the recovery action that addresses it.</a:t>
-            </a:r>
-          </a:p>
-          <a:p>
-            <a:pPr marL="0" indent="0">
-              <a:lnSpc>
-                <a:spcPct val="105000"/>
-              </a:lnSpc>
-              <a:spcBef>
-                <a:spcPts val="0"/>
-              </a:spcBef>
-              <a:spcAft>
-                <a:spcPts val="1000"/>
-              </a:spcAft>
-            </a:pPr>
-            <a:r>
-              <a:rPr sz="2400" b="1" i="0">
-                <a:solidFill>
-                  <a:srgbClr val="EDAB0C"/>
-                </a:solidFill>
-                <a:latin typeface="Roboto"/>
-              </a:rPr>
-              <a:t>■  </a:t>
-            </a:r>
-            <a:r>
-              <a:rPr sz="2400" b="0" i="0">
-                <a:solidFill>
-                  <a:srgbClr val="2A2929"/>
-                </a:solidFill>
-                <a:latin typeface="Roboto"/>
-              </a:rPr>
-              <a:t>The plan must cover at least the three major risk events from the impact analysis (PE 1).</a:t>
-            </a:r>
-          </a:p>
-          <a:p>
-            <a:pPr marL="0" indent="0">
-              <a:lnSpc>
-                <a:spcPct val="105000"/>
-              </a:lnSpc>
-              <a:spcBef>
-                <a:spcPts val="0"/>
-              </a:spcBef>
-              <a:spcAft>
-                <a:spcPts val="1000"/>
-              </a:spcAft>
-            </a:pPr>
-            <a:r>
-              <a:rPr sz="2400" b="1" i="0">
-                <a:solidFill>
-                  <a:srgbClr val="EDAB0C"/>
-                </a:solidFill>
-                <a:latin typeface="Roboto"/>
-              </a:rPr>
-              <a:t>■  </a:t>
-            </a:r>
-            <a:r>
-              <a:rPr sz="2400" b="0" i="0">
-                <a:solidFill>
-                  <a:srgbClr val="2A2929"/>
-                </a:solidFill>
-                <a:latin typeface="Roboto"/>
-              </a:rPr>
-              <a:t>Alignment is the test: every high-severity risk has an owned recovery action.</a:t>
+              <a:rPr sz="2000" b="0" i="1">
+                <a:solidFill>
+                  <a:srgbClr val="484848"/>
+                </a:solidFill>
+                <a:latin typeface="Roboto Light"/>
+              </a:rPr>
+              <a:t>detect it, recover it, prove the clock fits</a:t>
             </a:r>
           </a:p>
         </p:txBody>
@@ -6654,7 +6717,7 @@
                 </a:solidFill>
                 <a:latin typeface="Roboto"/>
               </a:rPr>
-              <a:t>10</a:t>
+              <a:t/>
             </a:r>
           </a:p>
         </p:txBody>
@@ -6714,7 +6777,7 @@
                 </a:solidFill>
                 <a:latin typeface="Roboto"/>
               </a:rPr>
-              <a:t>Steps, timelines &amp; meeting RTO/RPO</a:t>
+              <a:t>Detection and alerting</a:t>
             </a:r>
           </a:p>
         </p:txBody>
@@ -6771,8 +6834,8 @@
         </p:nvSpPr>
         <p:spPr>
           <a:xfrm>
-            <a:off x="658368" y="1737360"/>
-            <a:ext cx="5486400" cy="4297680"/>
+            <a:off x="658368" y="1691640"/>
+            <a:ext cx="10881360" cy="4480560"/>
           </a:xfrm>
           <a:prstGeom prst="rect">
             <a:avLst/>
@@ -6780,7 +6843,7 @@
           <a:noFill/>
         </p:spPr>
         <p:txBody>
-          <a:bodyPr wrap="square" anchor="t" lIns="0" rIns="0" tIns="0" bIns="0">
+          <a:bodyPr wrap="square" anchor="ctr" lIns="0" rIns="0" tIns="0" bIns="0">
             <a:spAutoFit/>
           </a:bodyPr>
           <a:lstStyle/>
@@ -6797,7 +6860,7 @@
               </a:spcAft>
             </a:pPr>
             <a:r>
-              <a:rPr sz="1700" b="1" i="0">
+              <a:rPr sz="2400" b="1" i="0">
                 <a:solidFill>
                   <a:srgbClr val="EDAB0C"/>
                 </a:solidFill>
@@ -6806,13 +6869,13 @@
               <a:t>■  </a:t>
             </a:r>
             <a:r>
-              <a:rPr sz="1700" b="0" i="0">
+              <a:rPr sz="2400" b="0" i="0">
                 <a:solidFill>
                   <a:srgbClr val="2A2929"/>
                 </a:solidFill>
                 <a:latin typeface="Roboto"/>
               </a:rPr>
-              <a:t>Outline the recovery steps, their timelines, key features and the service providers involved.</a:t>
+              <a:t>A plan that starts with "when someone notices" has already spent its recovery time.</a:t>
             </a:r>
           </a:p>
           <a:p>
@@ -6828,7 +6891,7 @@
               </a:spcAft>
             </a:pPr>
             <a:r>
-              <a:rPr sz="1700" b="1" i="0">
+              <a:rPr sz="2400" b="1" i="0">
                 <a:solidFill>
                   <a:srgbClr val="EDAB0C"/>
                 </a:solidFill>
@@ -6837,13 +6900,13 @@
               <a:t>■  </a:t>
             </a:r>
             <a:r>
-              <a:rPr sz="1700" b="0" i="0">
+              <a:rPr sz="2400" b="0" i="0">
                 <a:solidFill>
                   <a:srgbClr val="2A2929"/>
                 </a:solidFill>
                 <a:latin typeface="Roboto"/>
               </a:rPr>
-              <a:t>Show how the sequence meets the RTO/RPO targets — the timing has to add up (PE 3).</a:t>
+              <a:t>State what detects each event class — monitoring, alarms, health checks — and who gets told, how.</a:t>
             </a:r>
           </a:p>
           <a:p>
@@ -6859,7 +6922,7 @@
               </a:spcAft>
             </a:pPr>
             <a:r>
-              <a:rPr sz="1700" b="1" i="0">
+              <a:rPr sz="2400" b="1" i="0">
                 <a:solidFill>
                   <a:srgbClr val="EDAB0C"/>
                 </a:solidFill>
@@ -6868,44 +6931,20 @@
               <a:t>■  </a:t>
             </a:r>
             <a:r>
-              <a:rPr sz="1700" b="0" i="0">
+              <a:rPr sz="2400" b="0" i="0">
                 <a:solidFill>
                   <a:srgbClr val="2A2929"/>
                 </a:solidFill>
                 <a:latin typeface="Roboto"/>
               </a:rPr>
-              <a:t>Name who executes each step and what "recovered" looks like.</a:t>
-            </a:r>
-          </a:p>
-        </p:txBody>
-      </p:sp>
-      <p:pic>
-        <p:nvPicPr>
-          <p:cNvPr id="5" name="Picture 4" descr="dr-runbook-flow.png"/>
-          <p:cNvPicPr>
-            <a:picLocks noChangeAspect="1"/>
-          </p:cNvPicPr>
-          <p:nvPr/>
-        </p:nvPicPr>
-        <p:blipFill>
-          <a:blip r:embed="rId2"/>
-          <a:stretch>
-            <a:fillRect/>
-          </a:stretch>
-        </p:blipFill>
-        <p:spPr>
-          <a:xfrm>
-            <a:off x="8167781" y="1783080"/>
-            <a:ext cx="1586677" cy="4023360"/>
-          </a:xfrm>
-          <a:prstGeom prst="rect">
-            <a:avLst/>
-          </a:prstGeom>
-        </p:spPr>
-      </p:pic>
-      <p:sp>
-        <p:nvSpPr>
-          <p:cNvPr id="6" name="Rectangle 5"/>
+              <a:t>Detection time is inside the recovery clock; the objective includes it.</a:t>
+            </a:r>
+          </a:p>
+        </p:txBody>
+      </p:sp>
+      <p:sp>
+        <p:nvSpPr>
+          <p:cNvPr id="5" name="Rectangle 4"/>
           <p:cNvSpPr/>
           <p:nvPr/>
         </p:nvSpPr>
@@ -6949,7 +6988,7 @@
       </p:sp>
       <p:sp>
         <p:nvSpPr>
-          <p:cNvPr id="7" name="TextBox 6"/>
+          <p:cNvPr id="6" name="TextBox 5"/>
           <p:cNvSpPr txBox="1"/>
           <p:nvPr/>
         </p:nvSpPr>
@@ -6992,7 +7031,7 @@
       </p:sp>
       <p:sp>
         <p:nvSpPr>
-          <p:cNvPr id="8" name="TextBox 7"/>
+          <p:cNvPr id="7" name="TextBox 6"/>
           <p:cNvSpPr txBox="1"/>
           <p:nvPr/>
         </p:nvSpPr>
@@ -7080,7 +7119,7 @@
                 </a:solidFill>
                 <a:latin typeface="Roboto"/>
               </a:rPr>
-              <a:t>Document the plan</a:t>
+              <a:t>The recovery steps</a:t>
             </a:r>
           </a:p>
         </p:txBody>
@@ -7137,8 +7176,8 @@
         </p:nvSpPr>
         <p:spPr>
           <a:xfrm>
-            <a:off x="658368" y="1691640"/>
-            <a:ext cx="10881360" cy="4480560"/>
+            <a:off x="658368" y="1737360"/>
+            <a:ext cx="5486400" cy="4297680"/>
           </a:xfrm>
           <a:prstGeom prst="rect">
             <a:avLst/>
@@ -7146,7 +7185,7 @@
           <a:noFill/>
         </p:spPr>
         <p:txBody>
-          <a:bodyPr wrap="square" anchor="ctr" lIns="0" rIns="0" tIns="0" bIns="0">
+          <a:bodyPr wrap="square" anchor="t" lIns="0" rIns="0" tIns="0" bIns="0">
             <a:spAutoFit/>
           </a:bodyPr>
           <a:lstStyle/>
@@ -7163,7 +7202,7 @@
               </a:spcAft>
             </a:pPr>
             <a:r>
-              <a:rPr sz="2400" b="1" i="0">
+              <a:rPr sz="1700" b="1" i="0">
                 <a:solidFill>
                   <a:srgbClr val="EDAB0C"/>
                 </a:solidFill>
@@ -7172,13 +7211,13 @@
               <a:t>■  </a:t>
             </a:r>
             <a:r>
-              <a:rPr sz="2400" b="0" i="0">
+              <a:rPr sz="1700" b="0" i="0">
                 <a:solidFill>
                   <a:srgbClr val="2A2929"/>
                 </a:solidFill>
                 <a:latin typeface="Roboto"/>
               </a:rPr>
-              <a:t>Document the DR plan to the business needs, in the YAT template and plain professional English.</a:t>
+              <a:t>Ordered steps with timelines, key features, and the service providers involved.</a:t>
             </a:r>
           </a:p>
           <a:p>
@@ -7194,7 +7233,7 @@
               </a:spcAft>
             </a:pPr>
             <a:r>
-              <a:rPr sz="2400" b="1" i="0">
+              <a:rPr sz="1700" b="1" i="0">
                 <a:solidFill>
                   <a:srgbClr val="EDAB0C"/>
                 </a:solidFill>
@@ -7203,13 +7242,13 @@
               <a:t>■  </a:t>
             </a:r>
             <a:r>
-              <a:rPr sz="2400" b="0" i="0">
+              <a:rPr sz="1700" b="0" i="0">
                 <a:solidFill>
                   <a:srgbClr val="2A2929"/>
                 </a:solidFill>
                 <a:latin typeface="Roboto"/>
               </a:rPr>
-              <a:t>Complete, internally consistent, and traceable back to the requirements and risks.</a:t>
+              <a:t>Name who executes each step and what recovered looks like — an owner and a definition of done per step.</a:t>
             </a:r>
           </a:p>
           <a:p>
@@ -7225,7 +7264,7 @@
               </a:spcAft>
             </a:pPr>
             <a:r>
-              <a:rPr sz="2400" b="1" i="0">
+              <a:rPr sz="1700" b="1" i="0">
                 <a:solidFill>
                   <a:srgbClr val="EDAB0C"/>
                 </a:solidFill>
@@ -7234,20 +7273,44 @@
               <a:t>■  </a:t>
             </a:r>
             <a:r>
-              <a:rPr sz="2400" b="0" i="0">
+              <a:rPr sz="1700" b="0" i="0">
                 <a:solidFill>
                   <a:srgbClr val="2A2929"/>
                 </a:solidFill>
                 <a:latin typeface="Roboto"/>
               </a:rPr>
-              <a:t>This documented plan is the Part B deliverable.</a:t>
-            </a:r>
-          </a:p>
-        </p:txBody>
-      </p:sp>
-      <p:sp>
-        <p:nvSpPr>
-          <p:cNvPr id="5" name="Rectangle 4"/>
+              <a:t>Recover in priority order; the sequence comes from your ranking, not from habit.</a:t>
+            </a:r>
+          </a:p>
+        </p:txBody>
+      </p:sp>
+      <p:pic>
+        <p:nvPicPr>
+          <p:cNvPr id="5" name="Picture 4" descr="dr-runbook-flow.png"/>
+          <p:cNvPicPr>
+            <a:picLocks noChangeAspect="1"/>
+          </p:cNvPicPr>
+          <p:nvPr/>
+        </p:nvPicPr>
+        <p:blipFill>
+          <a:blip r:embed="rId2"/>
+          <a:stretch>
+            <a:fillRect/>
+          </a:stretch>
+        </p:blipFill>
+        <p:spPr>
+          <a:xfrm>
+            <a:off x="8167781" y="1783080"/>
+            <a:ext cx="1586677" cy="4023360"/>
+          </a:xfrm>
+          <a:prstGeom prst="rect">
+            <a:avLst/>
+          </a:prstGeom>
+        </p:spPr>
+      </p:pic>
+      <p:sp>
+        <p:nvSpPr>
+          <p:cNvPr id="6" name="Rectangle 5"/>
           <p:cNvSpPr/>
           <p:nvPr/>
         </p:nvSpPr>
@@ -7291,7 +7354,7 @@
       </p:sp>
       <p:sp>
         <p:nvSpPr>
-          <p:cNvPr id="6" name="TextBox 5"/>
+          <p:cNvPr id="7" name="TextBox 6"/>
           <p:cNvSpPr txBox="1"/>
           <p:nvPr/>
         </p:nvSpPr>
@@ -7334,7 +7397,7 @@
       </p:sp>
       <p:sp>
         <p:nvSpPr>
-          <p:cNvPr id="7" name="TextBox 6"/>
+          <p:cNvPr id="8" name="TextBox 7"/>
           <p:cNvSpPr txBox="1"/>
           <p:nvPr/>
         </p:nvSpPr>
@@ -7395,14 +7458,48 @@
       <p:grpSpPr/>
       <p:sp>
         <p:nvSpPr>
-          <p:cNvPr id="2" name="Rectangle 1"/>
+          <p:cNvPr id="2" name="TextBox 1"/>
+          <p:cNvSpPr txBox="1"/>
+          <p:nvPr/>
+        </p:nvSpPr>
+        <p:spPr>
+          <a:xfrm>
+            <a:off x="640080" y="457200"/>
+            <a:ext cx="10881360" cy="960120"/>
+          </a:xfrm>
+          <a:prstGeom prst="rect">
+            <a:avLst/>
+          </a:prstGeom>
+          <a:noFill/>
+        </p:spPr>
+        <p:txBody>
+          <a:bodyPr wrap="square" anchor="t" lIns="0" rIns="0" tIns="0" bIns="0">
+            <a:spAutoFit/>
+          </a:bodyPr>
+          <a:lstStyle/>
+          <a:p>
+            <a:r>
+              <a:rPr sz="2800" b="1" i="0">
+                <a:solidFill>
+                  <a:srgbClr val="2A2929"/>
+                </a:solidFill>
+                <a:latin typeface="Roboto"/>
+              </a:rPr>
+              <a:t>Show the plan meets the objectives</a:t>
+            </a:r>
+          </a:p>
+        </p:txBody>
+      </p:sp>
+      <p:sp>
+        <p:nvSpPr>
+          <p:cNvPr id="3" name="Rectangle 2"/>
           <p:cNvSpPr/>
           <p:nvPr/>
         </p:nvSpPr>
         <p:spPr>
           <a:xfrm>
-            <a:off x="0" y="0"/>
-            <a:ext cx="12191695" cy="1234440"/>
+            <a:off x="658368" y="1371600"/>
+            <a:ext cx="1463040" cy="50800"/>
           </a:xfrm>
           <a:prstGeom prst="rect">
             <a:avLst/>
@@ -7439,67 +7536,14 @@
       </p:sp>
       <p:sp>
         <p:nvSpPr>
-          <p:cNvPr id="3" name="Rounded Rectangle 2"/>
-          <p:cNvSpPr/>
-          <p:nvPr/>
-        </p:nvSpPr>
-        <p:spPr>
-          <a:xfrm>
-            <a:off x="640080" y="384048"/>
-            <a:ext cx="1691640" cy="457200"/>
-          </a:xfrm>
-          <a:prstGeom prst="roundRect">
-            <a:avLst/>
-          </a:prstGeom>
-          <a:solidFill>
-            <a:srgbClr val="2A2929"/>
-          </a:solidFill>
-          <a:ln>
-            <a:noFill/>
-          </a:ln>
-          <a:effectLst/>
-        </p:spPr>
-        <p:style>
-          <a:lnRef idx="1">
-            <a:schemeClr val="accent1"/>
-          </a:lnRef>
-          <a:fillRef idx="3">
-            <a:schemeClr val="accent1"/>
-          </a:fillRef>
-          <a:effectRef idx="2">
-            <a:schemeClr val="accent1"/>
-          </a:effectRef>
-          <a:fontRef idx="minor">
-            <a:schemeClr val="lt1"/>
-          </a:fontRef>
-        </p:style>
-        <p:txBody>
-          <a:bodyPr rtlCol="0" anchor="ctr"/>
-          <a:lstStyle/>
-          <a:p>
-            <a:pPr algn="ctr"/>
-            <a:r>
-              <a:rPr sz="1400" b="1" i="0">
-                <a:solidFill>
-                  <a:srgbClr val="FBB900"/>
-                </a:solidFill>
-                <a:latin typeface="Roboto"/>
-              </a:rPr>
-              <a:t>ACTIVITY</a:t>
-            </a:r>
-          </a:p>
-        </p:txBody>
-      </p:sp>
-      <p:sp>
-        <p:nvSpPr>
           <p:cNvPr id="4" name="TextBox 3"/>
           <p:cNvSpPr txBox="1"/>
           <p:nvPr/>
         </p:nvSpPr>
         <p:spPr>
           <a:xfrm>
-            <a:off x="2560320" y="310896"/>
-            <a:ext cx="8961120" cy="685800"/>
+            <a:off x="658368" y="1691640"/>
+            <a:ext cx="10881360" cy="4480560"/>
           </a:xfrm>
           <a:prstGeom prst="rect">
             <a:avLst/>
@@ -7508,40 +7552,6 @@
         </p:spPr>
         <p:txBody>
           <a:bodyPr wrap="square" anchor="ctr" lIns="0" rIns="0" tIns="0" bIns="0">
-            <a:spAutoFit/>
-          </a:bodyPr>
-          <a:lstStyle/>
-          <a:p>
-            <a:r>
-              <a:rPr sz="2600" b="1" i="0">
-                <a:solidFill>
-                  <a:srgbClr val="FFFFFF"/>
-                </a:solidFill>
-                <a:latin typeface="Roboto"/>
-              </a:rPr>
-              <a:t>Write the DR plan</a:t>
-            </a:r>
-          </a:p>
-        </p:txBody>
-      </p:sp>
-      <p:sp>
-        <p:nvSpPr>
-          <p:cNvPr id="5" name="TextBox 4"/>
-          <p:cNvSpPr txBox="1"/>
-          <p:nvPr/>
-        </p:nvSpPr>
-        <p:spPr>
-          <a:xfrm>
-            <a:off x="658368" y="1554480"/>
-            <a:ext cx="10881360" cy="4297680"/>
-          </a:xfrm>
-          <a:prstGeom prst="rect">
-            <a:avLst/>
-          </a:prstGeom>
-          <a:noFill/>
-        </p:spPr>
-        <p:txBody>
-          <a:bodyPr wrap="square" anchor="t" lIns="0" rIns="0" tIns="0" bIns="0">
             <a:spAutoFit/>
           </a:bodyPr>
           <a:lstStyle/>
@@ -7558,7 +7568,7 @@
               </a:spcAft>
             </a:pPr>
             <a:r>
-              <a:rPr sz="1700" b="1" i="0">
+              <a:rPr sz="2400" b="1" i="0">
                 <a:solidFill>
                   <a:srgbClr val="EDAB0C"/>
                 </a:solidFill>
@@ -7567,13 +7577,13 @@
               <a:t>■  </a:t>
             </a:r>
             <a:r>
-              <a:rPr sz="1700" b="0" i="0">
+              <a:rPr sz="2400" b="0" i="0">
                 <a:solidFill>
                   <a:srgbClr val="2A2929"/>
                 </a:solidFill>
                 <a:latin typeface="Roboto"/>
               </a:rPr>
-              <a:t>For the practice scenario, write the recovery plan: aligned actions, steps/timelines/providers, and the RTO/RPO argument.</a:t>
+              <a:t>Add the step timings up and set the total against the recovery time objective — the arithmetic is the proof.</a:t>
             </a:r>
           </a:p>
           <a:p>
@@ -7589,6 +7599,370 @@
               </a:spcAft>
             </a:pPr>
             <a:r>
+              <a:rPr sz="2400" b="1" i="0">
+                <a:solidFill>
+                  <a:srgbClr val="EDAB0C"/>
+                </a:solidFill>
+                <a:latin typeface="Roboto"/>
+              </a:rPr>
+              <a:t>■  </a:t>
+            </a:r>
+            <a:r>
+              <a:rPr sz="2400" b="0" i="0">
+                <a:solidFill>
+                  <a:srgbClr val="2A2929"/>
+                </a:solidFill>
+                <a:latin typeface="Roboto"/>
+              </a:rPr>
+              <a:t>Do the same for data: what the plan can lose against what the objective allows.</a:t>
+            </a:r>
+          </a:p>
+          <a:p>
+            <a:pPr marL="0" indent="0">
+              <a:lnSpc>
+                <a:spcPct val="105000"/>
+              </a:lnSpc>
+              <a:spcBef>
+                <a:spcPts val="0"/>
+              </a:spcBef>
+              <a:spcAft>
+                <a:spcPts val="1000"/>
+              </a:spcAft>
+            </a:pPr>
+            <a:r>
+              <a:rPr sz="2400" b="1" i="0">
+                <a:solidFill>
+                  <a:srgbClr val="EDAB0C"/>
+                </a:solidFill>
+                <a:latin typeface="Roboto"/>
+              </a:rPr>
+              <a:t>■  </a:t>
+            </a:r>
+            <a:r>
+              <a:rPr sz="2400" b="0" i="0">
+                <a:solidFill>
+                  <a:srgbClr val="2A2929"/>
+                </a:solidFill>
+                <a:latin typeface="Roboto"/>
+              </a:rPr>
+              <a:t>If the numbers don't fit, the plan changes — re-sequence, parallelise, or step the strategy up.</a:t>
+            </a:r>
+          </a:p>
+        </p:txBody>
+      </p:sp>
+      <p:sp>
+        <p:nvSpPr>
+          <p:cNvPr id="5" name="Rectangle 4"/>
+          <p:cNvSpPr/>
+          <p:nvPr/>
+        </p:nvSpPr>
+        <p:spPr>
+          <a:xfrm>
+            <a:off x="0" y="6565392"/>
+            <a:ext cx="12191695" cy="38100"/>
+          </a:xfrm>
+          <a:prstGeom prst="rect">
+            <a:avLst/>
+          </a:prstGeom>
+          <a:solidFill>
+            <a:srgbClr val="205F61"/>
+          </a:solidFill>
+          <a:ln>
+            <a:noFill/>
+          </a:ln>
+          <a:effectLst/>
+        </p:spPr>
+        <p:style>
+          <a:lnRef idx="1">
+            <a:schemeClr val="accent1"/>
+          </a:lnRef>
+          <a:fillRef idx="3">
+            <a:schemeClr val="accent1"/>
+          </a:fillRef>
+          <a:effectRef idx="2">
+            <a:schemeClr val="accent1"/>
+          </a:effectRef>
+          <a:fontRef idx="minor">
+            <a:schemeClr val="lt1"/>
+          </a:fontRef>
+        </p:style>
+        <p:txBody>
+          <a:bodyPr rtlCol="0" anchor="ctr"/>
+          <a:lstStyle/>
+          <a:p>
+            <a:pPr algn="ctr"/>
+          </a:p>
+        </p:txBody>
+      </p:sp>
+      <p:sp>
+        <p:nvSpPr>
+          <p:cNvPr id="6" name="TextBox 5"/>
+          <p:cNvSpPr txBox="1"/>
+          <p:nvPr/>
+        </p:nvSpPr>
+        <p:spPr>
+          <a:xfrm>
+            <a:off x="502920" y="6400800"/>
+            <a:ext cx="5486400" cy="320040"/>
+          </a:xfrm>
+          <a:prstGeom prst="rect">
+            <a:avLst/>
+          </a:prstGeom>
+          <a:noFill/>
+        </p:spPr>
+        <p:txBody>
+          <a:bodyPr wrap="square" anchor="t" lIns="0" rIns="0" tIns="0" bIns="0">
+            <a:spAutoFit/>
+          </a:bodyPr>
+          <a:lstStyle/>
+          <a:p>
+            <a:r>
+              <a:rPr sz="1100" b="1" i="0">
+                <a:solidFill>
+                  <a:srgbClr val="2A2929"/>
+                </a:solidFill>
+                <a:latin typeface="Roboto"/>
+              </a:rPr>
+              <a:t>Kangan </a:t>
+            </a:r>
+            <a:r>
+              <a:rPr sz="1100" b="1" i="0">
+                <a:solidFill>
+                  <a:srgbClr val="D68E10"/>
+                </a:solidFill>
+                <a:latin typeface="Roboto"/>
+              </a:rPr>
+              <a:t>Institute</a:t>
+            </a:r>
+          </a:p>
+        </p:txBody>
+      </p:sp>
+      <p:sp>
+        <p:nvSpPr>
+          <p:cNvPr id="7" name="TextBox 6"/>
+          <p:cNvSpPr txBox="1"/>
+          <p:nvPr/>
+        </p:nvSpPr>
+        <p:spPr>
+          <a:xfrm>
+            <a:off x="10515600" y="6400800"/>
+            <a:ext cx="1188720" cy="320040"/>
+          </a:xfrm>
+          <a:prstGeom prst="rect">
+            <a:avLst/>
+          </a:prstGeom>
+          <a:noFill/>
+        </p:spPr>
+        <p:txBody>
+          <a:bodyPr wrap="square" anchor="t" lIns="0" rIns="0" tIns="0" bIns="0">
+            <a:spAutoFit/>
+          </a:bodyPr>
+          <a:lstStyle/>
+          <a:p>
+            <a:pPr algn="r"/>
+            <a:r>
+              <a:rPr sz="1100" b="0" i="0">
+                <a:solidFill>
+                  <a:srgbClr val="7A7A7A"/>
+                </a:solidFill>
+                <a:latin typeface="Roboto"/>
+              </a:rPr>
+              <a:t>13</a:t>
+            </a:r>
+          </a:p>
+        </p:txBody>
+      </p:sp>
+    </p:spTree>
+  </p:cSld>
+  <p:clrMapOvr>
+    <a:masterClrMapping/>
+  </p:clrMapOvr>
+</p:sld>
+</file>
+
+<file path=ppt/slides/slide18.xml><?xml version="1.0" encoding="utf-8"?>
+<p:sld xmlns:a="http://schemas.openxmlformats.org/drawingml/2006/main" xmlns:p="http://schemas.openxmlformats.org/presentationml/2006/main" xmlns:r="http://schemas.openxmlformats.org/officeDocument/2006/relationships">
+  <p:cSld>
+    <p:bg>
+      <p:bgPr>
+        <a:solidFill>
+          <a:srgbClr val="FFFFFF"/>
+        </a:solidFill>
+        <a:effectLst/>
+      </p:bgPr>
+    </p:bg>
+    <p:spTree>
+      <p:nvGrpSpPr>
+        <p:cNvPr id="1" name=""/>
+        <p:cNvGrpSpPr/>
+        <p:nvPr/>
+      </p:nvGrpSpPr>
+      <p:grpSpPr/>
+      <p:sp>
+        <p:nvSpPr>
+          <p:cNvPr id="2" name="Rectangle 1"/>
+          <p:cNvSpPr/>
+          <p:nvPr/>
+        </p:nvSpPr>
+        <p:spPr>
+          <a:xfrm>
+            <a:off x="0" y="0"/>
+            <a:ext cx="12191695" cy="1234440"/>
+          </a:xfrm>
+          <a:prstGeom prst="rect">
+            <a:avLst/>
+          </a:prstGeom>
+          <a:solidFill>
+            <a:srgbClr val="205F61"/>
+          </a:solidFill>
+          <a:ln>
+            <a:noFill/>
+          </a:ln>
+          <a:effectLst/>
+        </p:spPr>
+        <p:style>
+          <a:lnRef idx="1">
+            <a:schemeClr val="accent1"/>
+          </a:lnRef>
+          <a:fillRef idx="3">
+            <a:schemeClr val="accent1"/>
+          </a:fillRef>
+          <a:effectRef idx="2">
+            <a:schemeClr val="accent1"/>
+          </a:effectRef>
+          <a:fontRef idx="minor">
+            <a:schemeClr val="lt1"/>
+          </a:fontRef>
+        </p:style>
+        <p:txBody>
+          <a:bodyPr rtlCol="0" anchor="ctr"/>
+          <a:lstStyle/>
+          <a:p>
+            <a:pPr algn="ctr"/>
+          </a:p>
+        </p:txBody>
+      </p:sp>
+      <p:sp>
+        <p:nvSpPr>
+          <p:cNvPr id="3" name="Rounded Rectangle 2"/>
+          <p:cNvSpPr/>
+          <p:nvPr/>
+        </p:nvSpPr>
+        <p:spPr>
+          <a:xfrm>
+            <a:off x="640080" y="384048"/>
+            <a:ext cx="1691640" cy="457200"/>
+          </a:xfrm>
+          <a:prstGeom prst="roundRect">
+            <a:avLst/>
+          </a:prstGeom>
+          <a:solidFill>
+            <a:srgbClr val="2A2929"/>
+          </a:solidFill>
+          <a:ln>
+            <a:noFill/>
+          </a:ln>
+          <a:effectLst/>
+        </p:spPr>
+        <p:style>
+          <a:lnRef idx="1">
+            <a:schemeClr val="accent1"/>
+          </a:lnRef>
+          <a:fillRef idx="3">
+            <a:schemeClr val="accent1"/>
+          </a:fillRef>
+          <a:effectRef idx="2">
+            <a:schemeClr val="accent1"/>
+          </a:effectRef>
+          <a:fontRef idx="minor">
+            <a:schemeClr val="lt1"/>
+          </a:fontRef>
+        </p:style>
+        <p:txBody>
+          <a:bodyPr rtlCol="0" anchor="ctr"/>
+          <a:lstStyle/>
+          <a:p>
+            <a:pPr algn="ctr"/>
+            <a:r>
+              <a:rPr sz="1400" b="1" i="0">
+                <a:solidFill>
+                  <a:srgbClr val="FBB900"/>
+                </a:solidFill>
+                <a:latin typeface="Roboto"/>
+              </a:rPr>
+              <a:t>ACTIVITY</a:t>
+            </a:r>
+          </a:p>
+        </p:txBody>
+      </p:sp>
+      <p:sp>
+        <p:nvSpPr>
+          <p:cNvPr id="4" name="TextBox 3"/>
+          <p:cNvSpPr txBox="1"/>
+          <p:nvPr/>
+        </p:nvSpPr>
+        <p:spPr>
+          <a:xfrm>
+            <a:off x="2560320" y="310896"/>
+            <a:ext cx="8961120" cy="685800"/>
+          </a:xfrm>
+          <a:prstGeom prst="rect">
+            <a:avLst/>
+          </a:prstGeom>
+          <a:noFill/>
+        </p:spPr>
+        <p:txBody>
+          <a:bodyPr wrap="square" anchor="ctr" lIns="0" rIns="0" tIns="0" bIns="0">
+            <a:spAutoFit/>
+          </a:bodyPr>
+          <a:lstStyle/>
+          <a:p>
+            <a:r>
+              <a:rPr sz="2600" b="1" i="0">
+                <a:solidFill>
+                  <a:srgbClr val="FFFFFF"/>
+                </a:solidFill>
+                <a:latin typeface="Roboto"/>
+              </a:rPr>
+              <a:t>Detection, steps and the proof</a:t>
+            </a:r>
+          </a:p>
+        </p:txBody>
+      </p:sp>
+      <p:sp>
+        <p:nvSpPr>
+          <p:cNvPr id="5" name="TextBox 4"/>
+          <p:cNvSpPr txBox="1"/>
+          <p:nvPr/>
+        </p:nvSpPr>
+        <p:spPr>
+          <a:xfrm>
+            <a:off x="658368" y="1554480"/>
+            <a:ext cx="10881360" cy="4297680"/>
+          </a:xfrm>
+          <a:prstGeom prst="rect">
+            <a:avLst/>
+          </a:prstGeom>
+          <a:noFill/>
+        </p:spPr>
+        <p:txBody>
+          <a:bodyPr wrap="square" anchor="t" lIns="0" rIns="0" tIns="0" bIns="0">
+            <a:spAutoFit/>
+          </a:bodyPr>
+          <a:lstStyle/>
+          <a:p>
+            <a:pPr marL="0" indent="0">
+              <a:lnSpc>
+                <a:spcPct val="105000"/>
+              </a:lnSpc>
+              <a:spcBef>
+                <a:spcPts val="0"/>
+              </a:spcBef>
+              <a:spcAft>
+                <a:spcPts val="1000"/>
+              </a:spcAft>
+            </a:pPr>
+            <a:r>
               <a:rPr sz="1700" b="1" i="0">
                 <a:solidFill>
                   <a:srgbClr val="EDAB0C"/>
@@ -7604,7 +7978,38 @@
                 </a:solidFill>
                 <a:latin typeface="Roboto"/>
               </a:rPr>
-              <a:t>Produce it as a documented runbook.</a:t>
+              <a:t>Workbook — tasks 33, 34 and 35.</a:t>
+            </a:r>
+          </a:p>
+          <a:p>
+            <a:pPr marL="0" indent="0">
+              <a:lnSpc>
+                <a:spcPct val="105000"/>
+              </a:lnSpc>
+              <a:spcBef>
+                <a:spcPts val="0"/>
+              </a:spcBef>
+              <a:spcAft>
+                <a:spcPts val="1000"/>
+              </a:spcAft>
+            </a:pPr>
+            <a:r>
+              <a:rPr sz="1700" b="1" i="0">
+                <a:solidFill>
+                  <a:srgbClr val="EDAB0C"/>
+                </a:solidFill>
+                <a:latin typeface="Roboto"/>
+              </a:rPr>
+              <a:t>■  </a:t>
+            </a:r>
+            <a:r>
+              <a:rPr sz="1700" b="0" i="0">
+                <a:solidFill>
+                  <a:srgbClr val="2A2929"/>
+                </a:solidFill>
+                <a:latin typeface="Roboto"/>
+              </a:rPr>
+              <a:t>State the detection and alerting, write the recovery steps with owners and timings, then show the plan meets the recovery objectives.</a:t>
             </a:r>
           </a:p>
         </p:txBody>
@@ -7684,7 +8089,7 @@
                 </a:solidFill>
                 <a:latin typeface="Roboto"/>
               </a:rPr>
-              <a:t>⏱  ~30 min</a:t>
+              <a:t>⏱  ~35 min</a:t>
             </a:r>
           </a:p>
         </p:txBody>
@@ -7806,7 +8211,7 @@
                 </a:solidFill>
                 <a:latin typeface="Roboto"/>
               </a:rPr>
-              <a:t>13</a:t>
+              <a:t>14</a:t>
             </a:r>
           </a:p>
         </p:txBody>
@@ -7819,7 +8224,7 @@
 </p:sld>
 </file>
 
-<file path=ppt/slides/slide18.xml><?xml version="1.0" encoding="utf-8"?>
+<file path=ppt/slides/slide19.xml><?xml version="1.0" encoding="utf-8"?>
 <p:sld xmlns:a="http://schemas.openxmlformats.org/drawingml/2006/main" xmlns:p="http://schemas.openxmlformats.org/presentationml/2006/main" xmlns:r="http://schemas.openxmlformats.org/officeDocument/2006/relationships">
   <p:cSld>
     <p:bg>
@@ -7882,7 +8287,7 @@
                 </a:solidFill>
                 <a:latin typeface="Roboto"/>
               </a:rPr>
-              <a:t>Topic 4 · Key takeaways</a:t>
+              <a:t>Section 3 · The proof</a:t>
             </a:r>
           </a:p>
         </p:txBody>
@@ -8055,7 +8460,7 @@
                 </a:solidFill>
                 <a:latin typeface="Roboto"/>
               </a:rPr>
-              <a:t>Four strategies (backup-restore → active-active) trade RTO/RPO against cost; choose the simplest that fits.</a:t>
+              <a:t>Detection time is inside the recovery clock.</a:t>
             </a:r>
           </a:p>
         </p:txBody>
@@ -8184,7 +8589,7 @@
                 </a:solidFill>
                 <a:latin typeface="Roboto"/>
               </a:rPr>
-              <a:t>Lean on native protections; prioritise recovery against the risks; insurance transfers residual loss only.</a:t>
+              <a:t>Every step has an owner, a timing, and a definition of done.</a:t>
             </a:r>
           </a:p>
         </p:txBody>
@@ -8313,7 +8718,7 @@
                 </a:solidFill>
                 <a:latin typeface="Roboto"/>
               </a:rPr>
-              <a:t>A plan is strategy + runbook + escalation + comms + DNS failover, to a continuity standard.</a:t>
+              <a:t>The arithmetic against the objectives is the proof.</a:t>
             </a:r>
           </a:p>
         </p:txBody>
@@ -8326,54 +8731,8 @@
         </p:nvSpPr>
         <p:spPr>
           <a:xfrm>
-            <a:off x="640080" y="4818888"/>
-            <a:ext cx="10927080" cy="841248"/>
-          </a:xfrm>
-          <a:prstGeom prst="rect">
-            <a:avLst/>
-          </a:prstGeom>
-          <a:solidFill>
-            <a:srgbClr val="FFFFFF"/>
-          </a:solidFill>
-          <a:ln w="12700">
-            <a:solidFill>
-              <a:srgbClr val="CCCCCC"/>
-            </a:solidFill>
-          </a:ln>
-          <a:effectLst/>
-        </p:spPr>
-        <p:style>
-          <a:lnRef idx="1">
-            <a:schemeClr val="accent1"/>
-          </a:lnRef>
-          <a:fillRef idx="3">
-            <a:schemeClr val="accent1"/>
-          </a:fillRef>
-          <a:effectRef idx="2">
-            <a:schemeClr val="accent1"/>
-          </a:effectRef>
-          <a:fontRef idx="minor">
-            <a:schemeClr val="lt1"/>
-          </a:fontRef>
-        </p:style>
-        <p:txBody>
-          <a:bodyPr rtlCol="0" anchor="ctr"/>
-          <a:lstStyle/>
-          <a:p>
-            <a:pPr algn="ctr"/>
-          </a:p>
-        </p:txBody>
-      </p:sp>
-      <p:sp>
-        <p:nvSpPr>
-          <p:cNvPr id="14" name="Rectangle 13"/>
-          <p:cNvSpPr/>
-          <p:nvPr/>
-        </p:nvSpPr>
-        <p:spPr>
-          <a:xfrm>
-            <a:off x="640080" y="4818888"/>
-            <a:ext cx="109728" cy="841248"/>
+            <a:off x="0" y="6565392"/>
+            <a:ext cx="12191695" cy="38100"/>
           </a:xfrm>
           <a:prstGeom prst="rect">
             <a:avLst/>
@@ -8410,90 +8769,7 @@
       </p:sp>
       <p:sp>
         <p:nvSpPr>
-          <p:cNvPr id="15" name="TextBox 14"/>
-          <p:cNvSpPr txBox="1"/>
-          <p:nvPr/>
-        </p:nvSpPr>
-        <p:spPr>
-          <a:xfrm>
-            <a:off x="960120" y="4818888"/>
-            <a:ext cx="10424160" cy="841248"/>
-          </a:xfrm>
-          <a:prstGeom prst="rect">
-            <a:avLst/>
-          </a:prstGeom>
-          <a:noFill/>
-        </p:spPr>
-        <p:txBody>
-          <a:bodyPr wrap="square" anchor="ctr" lIns="0" rIns="0" tIns="0" bIns="0">
-            <a:spAutoFit/>
-          </a:bodyPr>
-          <a:lstStyle/>
-          <a:p>
-            <a:pPr>
-              <a:lnSpc>
-                <a:spcPct val="100000"/>
-              </a:lnSpc>
-            </a:pPr>
-            <a:r>
-              <a:rPr sz="1700" b="0" i="0">
-                <a:solidFill>
-                  <a:srgbClr val="2A2929"/>
-                </a:solidFill>
-                <a:latin typeface="Roboto"/>
-              </a:rPr>
-              <a:t>Align actions to the prioritised risks and show the timing meets RTO/RPO.</a:t>
-            </a:r>
-          </a:p>
-        </p:txBody>
-      </p:sp>
-      <p:sp>
-        <p:nvSpPr>
-          <p:cNvPr id="16" name="Rectangle 15"/>
-          <p:cNvSpPr/>
-          <p:nvPr/>
-        </p:nvSpPr>
-        <p:spPr>
-          <a:xfrm>
-            <a:off x="0" y="6565392"/>
-            <a:ext cx="12191695" cy="38100"/>
-          </a:xfrm>
-          <a:prstGeom prst="rect">
-            <a:avLst/>
-          </a:prstGeom>
-          <a:solidFill>
-            <a:srgbClr val="205F61"/>
-          </a:solidFill>
-          <a:ln>
-            <a:noFill/>
-          </a:ln>
-          <a:effectLst/>
-        </p:spPr>
-        <p:style>
-          <a:lnRef idx="1">
-            <a:schemeClr val="accent1"/>
-          </a:lnRef>
-          <a:fillRef idx="3">
-            <a:schemeClr val="accent1"/>
-          </a:fillRef>
-          <a:effectRef idx="2">
-            <a:schemeClr val="accent1"/>
-          </a:effectRef>
-          <a:fontRef idx="minor">
-            <a:schemeClr val="lt1"/>
-          </a:fontRef>
-        </p:style>
-        <p:txBody>
-          <a:bodyPr rtlCol="0" anchor="ctr"/>
-          <a:lstStyle/>
-          <a:p>
-            <a:pPr algn="ctr"/>
-          </a:p>
-        </p:txBody>
-      </p:sp>
-      <p:sp>
-        <p:nvSpPr>
-          <p:cNvPr id="17" name="TextBox 16"/>
+          <p:cNvPr id="14" name="TextBox 13"/>
           <p:cNvSpPr txBox="1"/>
           <p:nvPr/>
         </p:nvSpPr>
@@ -8536,7 +8812,7 @@
       </p:sp>
       <p:sp>
         <p:nvSpPr>
-          <p:cNvPr id="18" name="TextBox 17"/>
+          <p:cNvPr id="15" name="TextBox 14"/>
           <p:cNvSpPr txBox="1"/>
           <p:nvPr/>
         </p:nvSpPr>
@@ -8564,149 +8840,7 @@
                 </a:solidFill>
                 <a:latin typeface="Roboto"/>
               </a:rPr>
-              <a:t>14</a:t>
-            </a:r>
-          </a:p>
-        </p:txBody>
-      </p:sp>
-    </p:spTree>
-  </p:cSld>
-  <p:clrMapOvr>
-    <a:masterClrMapping/>
-  </p:clrMapOvr>
-</p:sld>
-</file>
-
-<file path=ppt/slides/slide19.xml><?xml version="1.0" encoding="utf-8"?>
-<p:sld xmlns:a="http://schemas.openxmlformats.org/drawingml/2006/main" xmlns:p="http://schemas.openxmlformats.org/presentationml/2006/main" xmlns:r="http://schemas.openxmlformats.org/officeDocument/2006/relationships">
-  <p:cSld>
-    <p:bg>
-      <p:bgPr>
-        <a:solidFill>
-          <a:srgbClr val="2A2929"/>
-        </a:solidFill>
-        <a:effectLst/>
-      </p:bgPr>
-    </p:bg>
-    <p:spTree>
-      <p:nvGrpSpPr>
-        <p:cNvPr id="1" name=""/>
-        <p:cNvGrpSpPr/>
-        <p:nvPr/>
-      </p:nvGrpSpPr>
-      <p:grpSpPr/>
-      <p:sp>
-        <p:nvSpPr>
-          <p:cNvPr id="2" name="Rectangle 1"/>
-          <p:cNvSpPr/>
-          <p:nvPr/>
-        </p:nvSpPr>
-        <p:spPr>
-          <a:xfrm>
-            <a:off x="0" y="0"/>
-            <a:ext cx="411480" cy="6858000"/>
-          </a:xfrm>
-          <a:prstGeom prst="rect">
-            <a:avLst/>
-          </a:prstGeom>
-          <a:solidFill>
-            <a:srgbClr val="EDAB0C"/>
-          </a:solidFill>
-          <a:ln>
-            <a:noFill/>
-          </a:ln>
-          <a:effectLst/>
-        </p:spPr>
-        <p:style>
-          <a:lnRef idx="1">
-            <a:schemeClr val="accent1"/>
-          </a:lnRef>
-          <a:fillRef idx="3">
-            <a:schemeClr val="accent1"/>
-          </a:fillRef>
-          <a:effectRef idx="2">
-            <a:schemeClr val="accent1"/>
-          </a:effectRef>
-          <a:fontRef idx="minor">
-            <a:schemeClr val="lt1"/>
-          </a:fontRef>
-        </p:style>
-        <p:txBody>
-          <a:bodyPr rtlCol="0" anchor="ctr"/>
-          <a:lstStyle/>
-          <a:p>
-            <a:pPr algn="ctr"/>
-          </a:p>
-        </p:txBody>
-      </p:sp>
-      <p:sp>
-        <p:nvSpPr>
-          <p:cNvPr id="3" name="TextBox 2"/>
-          <p:cNvSpPr txBox="1"/>
-          <p:nvPr/>
-        </p:nvSpPr>
-        <p:spPr>
-          <a:xfrm>
-            <a:off x="914400" y="1463040"/>
-            <a:ext cx="10515600" cy="4023360"/>
-          </a:xfrm>
-          <a:prstGeom prst="rect">
-            <a:avLst/>
-          </a:prstGeom>
-          <a:noFill/>
-        </p:spPr>
-        <p:txBody>
-          <a:bodyPr wrap="square" anchor="t" lIns="0" rIns="0" tIns="0" bIns="0">
-            <a:spAutoFit/>
-          </a:bodyPr>
-          <a:lstStyle/>
-          <a:p>
-            <a:r>
-              <a:rPr sz="4000" b="1" i="0">
-                <a:solidFill>
-                  <a:srgbClr val="FFFFFF"/>
-                </a:solidFill>
-                <a:latin typeface="Roboto"/>
-              </a:rPr>
-              <a:t>Next: Topic 5 — document &amp; present</a:t>
-            </a:r>
-          </a:p>
-          <a:p>
-            <a:pPr>
-              <a:lnSpc>
-                <a:spcPct val="105000"/>
-              </a:lnSpc>
-              <a:spcBef>
-                <a:spcPts val="1200"/>
-              </a:spcBef>
-            </a:pPr>
-            <a:r>
-              <a:rPr sz="1900" b="0" i="0">
-                <a:solidFill>
-                  <a:srgbClr val="E8E8E8"/>
-                </a:solidFill>
-                <a:latin typeface="Roboto Light"/>
-              </a:rPr>
-              <a:t>You've produced the Solution Design (Topics 1–2) and the DR plan (Topics 3–4).</a:t>
-            </a:r>
-          </a:p>
-          <a:p>
-            <a:pPr>
-              <a:lnSpc>
-                <a:spcPct val="105000"/>
-              </a:lnSpc>
-              <a:spcBef>
-                <a:spcPts val="1200"/>
-              </a:spcBef>
-            </a:pPr>
-            <a:r>
-              <a:rPr sz="1900" b="0" i="0">
-                <a:solidFill>
-                  <a:srgbClr val="E8E8E8"/>
-                </a:solidFill>
-                <a:latin typeface="Roboto Light"/>
-              </a:rPr>
-              <a:t>Next you assemble, justify, present and get sign-off — the AT1 close-out.</a:t>
+              <a:t>15</a:t>
             </a:r>
           </a:p>
         </p:txBody>
@@ -8864,7 +8998,7 @@
                 </a:solidFill>
                 <a:latin typeface="Roboto"/>
               </a:rPr>
-              <a:t>Topic 3 set the requirements, objectives and risks; Topic 4 turns them into a recovery plan.</a:t>
+              <a:t>Topic 3 set the objectives and ranked the risks; Topic 4 turns them into a recovery plan.</a:t>
             </a:r>
           </a:p>
           <a:p>
@@ -8895,7 +9029,7 @@
                 </a:solidFill>
                 <a:latin typeface="Roboto"/>
               </a:rPr>
-              <a:t>You evaluate the DR strategies, choose one to the objectives, and write the plan.</a:t>
+              <a:t>You evaluate the strategies, recommend one, add everything else a plan carries, and assemble it.</a:t>
             </a:r>
           </a:p>
           <a:p>
@@ -8926,7 +9060,7 @@
                 </a:solidFill>
                 <a:latin typeface="Roboto"/>
               </a:rPr>
-              <a:t>The plan must map to the prioritised risks and meet the RTO/RPO you set.</a:t>
+              <a:t>The plan must map to the prioritised risks and provably meet the objectives you set.</a:t>
             </a:r>
           </a:p>
           <a:p>
@@ -9104,6 +9238,2197 @@
                 <a:latin typeface="Roboto"/>
               </a:rPr>
               <a:t>1</a:t>
+            </a:r>
+          </a:p>
+        </p:txBody>
+      </p:sp>
+    </p:spTree>
+  </p:cSld>
+  <p:clrMapOvr>
+    <a:masterClrMapping/>
+  </p:clrMapOvr>
+</p:sld>
+</file>
+
+<file path=ppt/slides/slide20.xml><?xml version="1.0" encoding="utf-8"?>
+<p:sld xmlns:a="http://schemas.openxmlformats.org/drawingml/2006/main" xmlns:p="http://schemas.openxmlformats.org/presentationml/2006/main" xmlns:r="http://schemas.openxmlformats.org/officeDocument/2006/relationships">
+  <p:cSld>
+    <p:bg>
+      <p:bgPr>
+        <a:solidFill>
+          <a:srgbClr val="FFFFFF"/>
+        </a:solidFill>
+        <a:effectLst/>
+      </p:bgPr>
+    </p:bg>
+    <p:spTree>
+      <p:nvGrpSpPr>
+        <p:cNvPr id="1" name=""/>
+        <p:cNvGrpSpPr/>
+        <p:nvPr/>
+      </p:nvGrpSpPr>
+      <p:grpSpPr/>
+      <p:sp>
+        <p:nvSpPr>
+          <p:cNvPr id="2" name="Rectangle 1"/>
+          <p:cNvSpPr/>
+          <p:nvPr/>
+        </p:nvSpPr>
+        <p:spPr>
+          <a:xfrm>
+            <a:off x="0" y="0"/>
+            <a:ext cx="3931920" cy="6858000"/>
+          </a:xfrm>
+          <a:prstGeom prst="rect">
+            <a:avLst/>
+          </a:prstGeom>
+          <a:solidFill>
+            <a:srgbClr val="004488"/>
+          </a:solidFill>
+          <a:ln>
+            <a:noFill/>
+          </a:ln>
+          <a:effectLst/>
+        </p:spPr>
+        <p:style>
+          <a:lnRef idx="1">
+            <a:schemeClr val="accent1"/>
+          </a:lnRef>
+          <a:fillRef idx="3">
+            <a:schemeClr val="accent1"/>
+          </a:fillRef>
+          <a:effectRef idx="2">
+            <a:schemeClr val="accent1"/>
+          </a:effectRef>
+          <a:fontRef idx="minor">
+            <a:schemeClr val="lt1"/>
+          </a:fontRef>
+        </p:style>
+        <p:txBody>
+          <a:bodyPr rtlCol="0" anchor="ctr"/>
+          <a:lstStyle/>
+          <a:p>
+            <a:pPr algn="ctr"/>
+          </a:p>
+        </p:txBody>
+      </p:sp>
+      <p:sp>
+        <p:nvSpPr>
+          <p:cNvPr id="3" name="TextBox 2"/>
+          <p:cNvSpPr txBox="1"/>
+          <p:nvPr/>
+        </p:nvSpPr>
+        <p:spPr>
+          <a:xfrm>
+            <a:off x="365760" y="2103120"/>
+            <a:ext cx="3291840" cy="2194560"/>
+          </a:xfrm>
+          <a:prstGeom prst="rect">
+            <a:avLst/>
+          </a:prstGeom>
+          <a:noFill/>
+        </p:spPr>
+        <p:txBody>
+          <a:bodyPr wrap="square" anchor="t" lIns="0" rIns="0" tIns="0" bIns="0">
+            <a:spAutoFit/>
+          </a:bodyPr>
+          <a:lstStyle/>
+          <a:p>
+            <a:r>
+              <a:rPr sz="13000" b="1" i="0">
+                <a:solidFill>
+                  <a:srgbClr val="FFFFFF"/>
+                </a:solidFill>
+                <a:latin typeface="Roboto"/>
+              </a:rPr>
+              <a:t>04</a:t>
+            </a:r>
+          </a:p>
+        </p:txBody>
+      </p:sp>
+      <p:sp>
+        <p:nvSpPr>
+          <p:cNvPr id="4" name="TextBox 3"/>
+          <p:cNvSpPr txBox="1"/>
+          <p:nvPr/>
+        </p:nvSpPr>
+        <p:spPr>
+          <a:xfrm>
+            <a:off x="4480560" y="2468880"/>
+            <a:ext cx="7132320" cy="2194560"/>
+          </a:xfrm>
+          <a:prstGeom prst="rect">
+            <a:avLst/>
+          </a:prstGeom>
+          <a:noFill/>
+        </p:spPr>
+        <p:txBody>
+          <a:bodyPr wrap="square" anchor="t" lIns="0" rIns="0" tIns="0" bIns="0">
+            <a:spAutoFit/>
+          </a:bodyPr>
+          <a:lstStyle/>
+          <a:p>
+            <a:r>
+              <a:rPr sz="1600" b="1" i="0">
+                <a:solidFill>
+                  <a:srgbClr val="004488"/>
+                </a:solidFill>
+                <a:latin typeface="Roboto"/>
+              </a:rPr>
+              <a:t>SECTION</a:t>
+            </a:r>
+          </a:p>
+          <a:p>
+            <a:pPr>
+              <a:spcBef>
+                <a:spcPts val="600"/>
+              </a:spcBef>
+            </a:pPr>
+            <a:r>
+              <a:rPr sz="3800" b="1" i="0">
+                <a:solidFill>
+                  <a:srgbClr val="2A2929"/>
+                </a:solidFill>
+                <a:latin typeface="Roboto"/>
+              </a:rPr>
+              <a:t>Standards, and the assembled plan</a:t>
+            </a:r>
+          </a:p>
+          <a:p>
+            <a:pPr>
+              <a:spcBef>
+                <a:spcPts val="1000"/>
+              </a:spcBef>
+            </a:pPr>
+            <a:r>
+              <a:rPr sz="2000" b="0" i="1">
+                <a:solidFill>
+                  <a:srgbClr val="484848"/>
+                </a:solidFill>
+                <a:latin typeface="Roboto Light"/>
+              </a:rPr>
+              <a:t>to a standard, in one document</a:t>
+            </a:r>
+          </a:p>
+        </p:txBody>
+      </p:sp>
+      <p:sp>
+        <p:nvSpPr>
+          <p:cNvPr id="5" name="Rectangle 4"/>
+          <p:cNvSpPr/>
+          <p:nvPr/>
+        </p:nvSpPr>
+        <p:spPr>
+          <a:xfrm>
+            <a:off x="0" y="6565392"/>
+            <a:ext cx="12191695" cy="38100"/>
+          </a:xfrm>
+          <a:prstGeom prst="rect">
+            <a:avLst/>
+          </a:prstGeom>
+          <a:solidFill>
+            <a:srgbClr val="004488"/>
+          </a:solidFill>
+          <a:ln>
+            <a:noFill/>
+          </a:ln>
+          <a:effectLst/>
+        </p:spPr>
+        <p:style>
+          <a:lnRef idx="1">
+            <a:schemeClr val="accent1"/>
+          </a:lnRef>
+          <a:fillRef idx="3">
+            <a:schemeClr val="accent1"/>
+          </a:fillRef>
+          <a:effectRef idx="2">
+            <a:schemeClr val="accent1"/>
+          </a:effectRef>
+          <a:fontRef idx="minor">
+            <a:schemeClr val="lt1"/>
+          </a:fontRef>
+        </p:style>
+        <p:txBody>
+          <a:bodyPr rtlCol="0" anchor="ctr"/>
+          <a:lstStyle/>
+          <a:p>
+            <a:pPr algn="ctr"/>
+          </a:p>
+        </p:txBody>
+      </p:sp>
+      <p:sp>
+        <p:nvSpPr>
+          <p:cNvPr id="6" name="TextBox 5"/>
+          <p:cNvSpPr txBox="1"/>
+          <p:nvPr/>
+        </p:nvSpPr>
+        <p:spPr>
+          <a:xfrm>
+            <a:off x="502920" y="6400800"/>
+            <a:ext cx="5486400" cy="320040"/>
+          </a:xfrm>
+          <a:prstGeom prst="rect">
+            <a:avLst/>
+          </a:prstGeom>
+          <a:noFill/>
+        </p:spPr>
+        <p:txBody>
+          <a:bodyPr wrap="square" anchor="t" lIns="0" rIns="0" tIns="0" bIns="0">
+            <a:spAutoFit/>
+          </a:bodyPr>
+          <a:lstStyle/>
+          <a:p>
+            <a:r>
+              <a:rPr sz="1100" b="1" i="0">
+                <a:solidFill>
+                  <a:srgbClr val="2A2929"/>
+                </a:solidFill>
+                <a:latin typeface="Roboto"/>
+              </a:rPr>
+              <a:t>Kangan </a:t>
+            </a:r>
+            <a:r>
+              <a:rPr sz="1100" b="1" i="0">
+                <a:solidFill>
+                  <a:srgbClr val="D68E10"/>
+                </a:solidFill>
+                <a:latin typeface="Roboto"/>
+              </a:rPr>
+              <a:t>Institute</a:t>
+            </a:r>
+          </a:p>
+        </p:txBody>
+      </p:sp>
+      <p:sp>
+        <p:nvSpPr>
+          <p:cNvPr id="7" name="TextBox 6"/>
+          <p:cNvSpPr txBox="1"/>
+          <p:nvPr/>
+        </p:nvSpPr>
+        <p:spPr>
+          <a:xfrm>
+            <a:off x="10515600" y="6400800"/>
+            <a:ext cx="1188720" cy="320040"/>
+          </a:xfrm>
+          <a:prstGeom prst="rect">
+            <a:avLst/>
+          </a:prstGeom>
+          <a:noFill/>
+        </p:spPr>
+        <p:txBody>
+          <a:bodyPr wrap="square" anchor="t" lIns="0" rIns="0" tIns="0" bIns="0">
+            <a:spAutoFit/>
+          </a:bodyPr>
+          <a:lstStyle/>
+          <a:p>
+            <a:pPr algn="r"/>
+            <a:r>
+              <a:rPr sz="1100" b="0" i="0">
+                <a:solidFill>
+                  <a:srgbClr val="7A7A7A"/>
+                </a:solidFill>
+                <a:latin typeface="Roboto"/>
+              </a:rPr>
+              <a:t/>
+            </a:r>
+          </a:p>
+        </p:txBody>
+      </p:sp>
+    </p:spTree>
+  </p:cSld>
+  <p:clrMapOvr>
+    <a:masterClrMapping/>
+  </p:clrMapOvr>
+</p:sld>
+</file>
+
+<file path=ppt/slides/slide21.xml><?xml version="1.0" encoding="utf-8"?>
+<p:sld xmlns:a="http://schemas.openxmlformats.org/drawingml/2006/main" xmlns:p="http://schemas.openxmlformats.org/presentationml/2006/main" xmlns:r="http://schemas.openxmlformats.org/officeDocument/2006/relationships">
+  <p:cSld>
+    <p:bg>
+      <p:bgPr>
+        <a:solidFill>
+          <a:srgbClr val="FFFFFF"/>
+        </a:solidFill>
+        <a:effectLst/>
+      </p:bgPr>
+    </p:bg>
+    <p:spTree>
+      <p:nvGrpSpPr>
+        <p:cNvPr id="1" name=""/>
+        <p:cNvGrpSpPr/>
+        <p:nvPr/>
+      </p:nvGrpSpPr>
+      <p:grpSpPr/>
+      <p:sp>
+        <p:nvSpPr>
+          <p:cNvPr id="2" name="TextBox 1"/>
+          <p:cNvSpPr txBox="1"/>
+          <p:nvPr/>
+        </p:nvSpPr>
+        <p:spPr>
+          <a:xfrm>
+            <a:off x="640080" y="457200"/>
+            <a:ext cx="10881360" cy="960120"/>
+          </a:xfrm>
+          <a:prstGeom prst="rect">
+            <a:avLst/>
+          </a:prstGeom>
+          <a:noFill/>
+        </p:spPr>
+        <p:txBody>
+          <a:bodyPr wrap="square" anchor="t" lIns="0" rIns="0" tIns="0" bIns="0">
+            <a:spAutoFit/>
+          </a:bodyPr>
+          <a:lstStyle/>
+          <a:p>
+            <a:r>
+              <a:rPr sz="2800" b="1" i="0">
+                <a:solidFill>
+                  <a:srgbClr val="2A2929"/>
+                </a:solidFill>
+                <a:latin typeface="Roboto"/>
+              </a:rPr>
+              <a:t>Continuity standards</a:t>
+            </a:r>
+          </a:p>
+        </p:txBody>
+      </p:sp>
+      <p:sp>
+        <p:nvSpPr>
+          <p:cNvPr id="3" name="Rectangle 2"/>
+          <p:cNvSpPr/>
+          <p:nvPr/>
+        </p:nvSpPr>
+        <p:spPr>
+          <a:xfrm>
+            <a:off x="658368" y="1371600"/>
+            <a:ext cx="1463040" cy="50800"/>
+          </a:xfrm>
+          <a:prstGeom prst="rect">
+            <a:avLst/>
+          </a:prstGeom>
+          <a:solidFill>
+            <a:srgbClr val="004488"/>
+          </a:solidFill>
+          <a:ln>
+            <a:noFill/>
+          </a:ln>
+          <a:effectLst/>
+        </p:spPr>
+        <p:style>
+          <a:lnRef idx="1">
+            <a:schemeClr val="accent1"/>
+          </a:lnRef>
+          <a:fillRef idx="3">
+            <a:schemeClr val="accent1"/>
+          </a:fillRef>
+          <a:effectRef idx="2">
+            <a:schemeClr val="accent1"/>
+          </a:effectRef>
+          <a:fontRef idx="minor">
+            <a:schemeClr val="lt1"/>
+          </a:fontRef>
+        </p:style>
+        <p:txBody>
+          <a:bodyPr rtlCol="0" anchor="ctr"/>
+          <a:lstStyle/>
+          <a:p>
+            <a:pPr algn="ctr"/>
+          </a:p>
+        </p:txBody>
+      </p:sp>
+      <p:sp>
+        <p:nvSpPr>
+          <p:cNvPr id="4" name="TextBox 3"/>
+          <p:cNvSpPr txBox="1"/>
+          <p:nvPr/>
+        </p:nvSpPr>
+        <p:spPr>
+          <a:xfrm>
+            <a:off x="658368" y="1691640"/>
+            <a:ext cx="10881360" cy="4480560"/>
+          </a:xfrm>
+          <a:prstGeom prst="rect">
+            <a:avLst/>
+          </a:prstGeom>
+          <a:noFill/>
+        </p:spPr>
+        <p:txBody>
+          <a:bodyPr wrap="square" anchor="ctr" lIns="0" rIns="0" tIns="0" bIns="0">
+            <a:spAutoFit/>
+          </a:bodyPr>
+          <a:lstStyle/>
+          <a:p>
+            <a:pPr marL="0" indent="0">
+              <a:lnSpc>
+                <a:spcPct val="105000"/>
+              </a:lnSpc>
+              <a:spcBef>
+                <a:spcPts val="0"/>
+              </a:spcBef>
+              <a:spcAft>
+                <a:spcPts val="1000"/>
+              </a:spcAft>
+            </a:pPr>
+            <a:r>
+              <a:rPr sz="2400" b="1" i="0">
+                <a:solidFill>
+                  <a:srgbClr val="EDAB0C"/>
+                </a:solidFill>
+                <a:latin typeface="Roboto"/>
+              </a:rPr>
+              <a:t>■  </a:t>
+            </a:r>
+            <a:r>
+              <a:rPr sz="2400" b="0" i="0">
+                <a:solidFill>
+                  <a:srgbClr val="2A2929"/>
+                </a:solidFill>
+                <a:latin typeface="Roboto"/>
+              </a:rPr>
+              <a:t>ISO/IEC 27031 — ICT readiness for business continuity; 27001/27002 — the security management context around it.</a:t>
+            </a:r>
+          </a:p>
+          <a:p>
+            <a:pPr marL="0" indent="0">
+              <a:lnSpc>
+                <a:spcPct val="105000"/>
+              </a:lnSpc>
+              <a:spcBef>
+                <a:spcPts val="0"/>
+              </a:spcBef>
+              <a:spcAft>
+                <a:spcPts val="1000"/>
+              </a:spcAft>
+            </a:pPr>
+            <a:r>
+              <a:rPr sz="2400" b="1" i="0">
+                <a:solidFill>
+                  <a:srgbClr val="EDAB0C"/>
+                </a:solidFill>
+                <a:latin typeface="Roboto"/>
+              </a:rPr>
+              <a:t>■  </a:t>
+            </a:r>
+            <a:r>
+              <a:rPr sz="2400" b="0" i="0">
+                <a:solidFill>
+                  <a:srgbClr val="2A2929"/>
+                </a:solidFill>
+                <a:latin typeface="Roboto"/>
+              </a:rPr>
+              <a:t>Standards give the plan a recognised structure and assurance language.</a:t>
+            </a:r>
+          </a:p>
+          <a:p>
+            <a:pPr marL="0" indent="0">
+              <a:lnSpc>
+                <a:spcPct val="105000"/>
+              </a:lnSpc>
+              <a:spcBef>
+                <a:spcPts val="0"/>
+              </a:spcBef>
+              <a:spcAft>
+                <a:spcPts val="1000"/>
+              </a:spcAft>
+            </a:pPr>
+            <a:r>
+              <a:rPr sz="2400" b="1" i="0">
+                <a:solidFill>
+                  <a:srgbClr val="EDAB0C"/>
+                </a:solidFill>
+                <a:latin typeface="Roboto"/>
+              </a:rPr>
+              <a:t>■  </a:t>
+            </a:r>
+            <a:r>
+              <a:rPr sz="2400" b="0" i="0">
+                <a:solidFill>
+                  <a:srgbClr val="2A2929"/>
+                </a:solidFill>
+                <a:latin typeface="Roboto"/>
+              </a:rPr>
+              <a:t>Reference them so the plan is auditable, not ad hoc.</a:t>
+            </a:r>
+          </a:p>
+        </p:txBody>
+      </p:sp>
+      <p:sp>
+        <p:nvSpPr>
+          <p:cNvPr id="5" name="Rectangle 4"/>
+          <p:cNvSpPr/>
+          <p:nvPr/>
+        </p:nvSpPr>
+        <p:spPr>
+          <a:xfrm>
+            <a:off x="0" y="6565392"/>
+            <a:ext cx="12191695" cy="38100"/>
+          </a:xfrm>
+          <a:prstGeom prst="rect">
+            <a:avLst/>
+          </a:prstGeom>
+          <a:solidFill>
+            <a:srgbClr val="004488"/>
+          </a:solidFill>
+          <a:ln>
+            <a:noFill/>
+          </a:ln>
+          <a:effectLst/>
+        </p:spPr>
+        <p:style>
+          <a:lnRef idx="1">
+            <a:schemeClr val="accent1"/>
+          </a:lnRef>
+          <a:fillRef idx="3">
+            <a:schemeClr val="accent1"/>
+          </a:fillRef>
+          <a:effectRef idx="2">
+            <a:schemeClr val="accent1"/>
+          </a:effectRef>
+          <a:fontRef idx="minor">
+            <a:schemeClr val="lt1"/>
+          </a:fontRef>
+        </p:style>
+        <p:txBody>
+          <a:bodyPr rtlCol="0" anchor="ctr"/>
+          <a:lstStyle/>
+          <a:p>
+            <a:pPr algn="ctr"/>
+          </a:p>
+        </p:txBody>
+      </p:sp>
+      <p:sp>
+        <p:nvSpPr>
+          <p:cNvPr id="6" name="TextBox 5"/>
+          <p:cNvSpPr txBox="1"/>
+          <p:nvPr/>
+        </p:nvSpPr>
+        <p:spPr>
+          <a:xfrm>
+            <a:off x="502920" y="6400800"/>
+            <a:ext cx="5486400" cy="320040"/>
+          </a:xfrm>
+          <a:prstGeom prst="rect">
+            <a:avLst/>
+          </a:prstGeom>
+          <a:noFill/>
+        </p:spPr>
+        <p:txBody>
+          <a:bodyPr wrap="square" anchor="t" lIns="0" rIns="0" tIns="0" bIns="0">
+            <a:spAutoFit/>
+          </a:bodyPr>
+          <a:lstStyle/>
+          <a:p>
+            <a:r>
+              <a:rPr sz="1100" b="1" i="0">
+                <a:solidFill>
+                  <a:srgbClr val="2A2929"/>
+                </a:solidFill>
+                <a:latin typeface="Roboto"/>
+              </a:rPr>
+              <a:t>Kangan </a:t>
+            </a:r>
+            <a:r>
+              <a:rPr sz="1100" b="1" i="0">
+                <a:solidFill>
+                  <a:srgbClr val="D68E10"/>
+                </a:solidFill>
+                <a:latin typeface="Roboto"/>
+              </a:rPr>
+              <a:t>Institute</a:t>
+            </a:r>
+          </a:p>
+        </p:txBody>
+      </p:sp>
+      <p:sp>
+        <p:nvSpPr>
+          <p:cNvPr id="7" name="TextBox 6"/>
+          <p:cNvSpPr txBox="1"/>
+          <p:nvPr/>
+        </p:nvSpPr>
+        <p:spPr>
+          <a:xfrm>
+            <a:off x="10515600" y="6400800"/>
+            <a:ext cx="1188720" cy="320040"/>
+          </a:xfrm>
+          <a:prstGeom prst="rect">
+            <a:avLst/>
+          </a:prstGeom>
+          <a:noFill/>
+        </p:spPr>
+        <p:txBody>
+          <a:bodyPr wrap="square" anchor="t" lIns="0" rIns="0" tIns="0" bIns="0">
+            <a:spAutoFit/>
+          </a:bodyPr>
+          <a:lstStyle/>
+          <a:p>
+            <a:pPr algn="r"/>
+            <a:r>
+              <a:rPr sz="1100" b="0" i="0">
+                <a:solidFill>
+                  <a:srgbClr val="7A7A7A"/>
+                </a:solidFill>
+                <a:latin typeface="Roboto"/>
+              </a:rPr>
+              <a:t>16</a:t>
+            </a:r>
+          </a:p>
+        </p:txBody>
+      </p:sp>
+    </p:spTree>
+  </p:cSld>
+  <p:clrMapOvr>
+    <a:masterClrMapping/>
+  </p:clrMapOvr>
+</p:sld>
+</file>
+
+<file path=ppt/slides/slide22.xml><?xml version="1.0" encoding="utf-8"?>
+<p:sld xmlns:a="http://schemas.openxmlformats.org/drawingml/2006/main" xmlns:p="http://schemas.openxmlformats.org/presentationml/2006/main" xmlns:r="http://schemas.openxmlformats.org/officeDocument/2006/relationships">
+  <p:cSld>
+    <p:bg>
+      <p:bgPr>
+        <a:solidFill>
+          <a:srgbClr val="FFFFFF"/>
+        </a:solidFill>
+        <a:effectLst/>
+      </p:bgPr>
+    </p:bg>
+    <p:spTree>
+      <p:nvGrpSpPr>
+        <p:cNvPr id="1" name=""/>
+        <p:cNvGrpSpPr/>
+        <p:nvPr/>
+      </p:nvGrpSpPr>
+      <p:grpSpPr/>
+      <p:sp>
+        <p:nvSpPr>
+          <p:cNvPr id="2" name="TextBox 1"/>
+          <p:cNvSpPr txBox="1"/>
+          <p:nvPr/>
+        </p:nvSpPr>
+        <p:spPr>
+          <a:xfrm>
+            <a:off x="640080" y="457200"/>
+            <a:ext cx="10881360" cy="960120"/>
+          </a:xfrm>
+          <a:prstGeom prst="rect">
+            <a:avLst/>
+          </a:prstGeom>
+          <a:noFill/>
+        </p:spPr>
+        <p:txBody>
+          <a:bodyPr wrap="square" anchor="t" lIns="0" rIns="0" tIns="0" bIns="0">
+            <a:spAutoFit/>
+          </a:bodyPr>
+          <a:lstStyle/>
+          <a:p>
+            <a:r>
+              <a:rPr sz="2800" b="1" i="0">
+                <a:solidFill>
+                  <a:srgbClr val="2A2929"/>
+                </a:solidFill>
+                <a:latin typeface="Roboto"/>
+              </a:rPr>
+              <a:t>Assemble the Disaster Recovery Plan</a:t>
+            </a:r>
+          </a:p>
+        </p:txBody>
+      </p:sp>
+      <p:sp>
+        <p:nvSpPr>
+          <p:cNvPr id="3" name="Rectangle 2"/>
+          <p:cNvSpPr/>
+          <p:nvPr/>
+        </p:nvSpPr>
+        <p:spPr>
+          <a:xfrm>
+            <a:off x="658368" y="1371600"/>
+            <a:ext cx="1463040" cy="50800"/>
+          </a:xfrm>
+          <a:prstGeom prst="rect">
+            <a:avLst/>
+          </a:prstGeom>
+          <a:solidFill>
+            <a:srgbClr val="004488"/>
+          </a:solidFill>
+          <a:ln>
+            <a:noFill/>
+          </a:ln>
+          <a:effectLst/>
+        </p:spPr>
+        <p:style>
+          <a:lnRef idx="1">
+            <a:schemeClr val="accent1"/>
+          </a:lnRef>
+          <a:fillRef idx="3">
+            <a:schemeClr val="accent1"/>
+          </a:fillRef>
+          <a:effectRef idx="2">
+            <a:schemeClr val="accent1"/>
+          </a:effectRef>
+          <a:fontRef idx="minor">
+            <a:schemeClr val="lt1"/>
+          </a:fontRef>
+        </p:style>
+        <p:txBody>
+          <a:bodyPr rtlCol="0" anchor="ctr"/>
+          <a:lstStyle/>
+          <a:p>
+            <a:pPr algn="ctr"/>
+          </a:p>
+        </p:txBody>
+      </p:sp>
+      <p:sp>
+        <p:nvSpPr>
+          <p:cNvPr id="4" name="TextBox 3"/>
+          <p:cNvSpPr txBox="1"/>
+          <p:nvPr/>
+        </p:nvSpPr>
+        <p:spPr>
+          <a:xfrm>
+            <a:off x="658368" y="1691640"/>
+            <a:ext cx="10881360" cy="4480560"/>
+          </a:xfrm>
+          <a:prstGeom prst="rect">
+            <a:avLst/>
+          </a:prstGeom>
+          <a:noFill/>
+        </p:spPr>
+        <p:txBody>
+          <a:bodyPr wrap="square" anchor="ctr" lIns="0" rIns="0" tIns="0" bIns="0">
+            <a:spAutoFit/>
+          </a:bodyPr>
+          <a:lstStyle/>
+          <a:p>
+            <a:pPr marL="0" indent="0">
+              <a:lnSpc>
+                <a:spcPct val="105000"/>
+              </a:lnSpc>
+              <a:spcBef>
+                <a:spcPts val="0"/>
+              </a:spcBef>
+              <a:spcAft>
+                <a:spcPts val="1000"/>
+              </a:spcAft>
+            </a:pPr>
+            <a:r>
+              <a:rPr sz="2400" b="1" i="0">
+                <a:solidFill>
+                  <a:srgbClr val="EDAB0C"/>
+                </a:solidFill>
+                <a:latin typeface="Roboto"/>
+              </a:rPr>
+              <a:t>■  </a:t>
+            </a:r>
+            <a:r>
+              <a:rPr sz="2400" b="0" i="0">
+                <a:solidFill>
+                  <a:srgbClr val="2A2929"/>
+                </a:solidFill>
+                <a:latin typeface="Roboto"/>
+              </a:rPr>
+              <a:t>Bring the parts into one document: requirements, objectives, risks, strategy, components, steps, proof.</a:t>
+            </a:r>
+          </a:p>
+          <a:p>
+            <a:pPr marL="0" indent="0">
+              <a:lnSpc>
+                <a:spcPct val="105000"/>
+              </a:lnSpc>
+              <a:spcBef>
+                <a:spcPts val="0"/>
+              </a:spcBef>
+              <a:spcAft>
+                <a:spcPts val="1000"/>
+              </a:spcAft>
+            </a:pPr>
+            <a:r>
+              <a:rPr sz="2400" b="1" i="0">
+                <a:solidFill>
+                  <a:srgbClr val="EDAB0C"/>
+                </a:solidFill>
+                <a:latin typeface="Roboto"/>
+              </a:rPr>
+              <a:t>■  </a:t>
+            </a:r>
+            <a:r>
+              <a:rPr sz="2400" b="0" i="0">
+                <a:solidFill>
+                  <a:srgbClr val="2A2929"/>
+                </a:solidFill>
+                <a:latin typeface="Roboto"/>
+              </a:rPr>
+              <a:t>Complete, internally consistent, and traceable — any action leads back to the risk and requirement that drove it.</a:t>
+            </a:r>
+          </a:p>
+          <a:p>
+            <a:pPr marL="0" indent="0">
+              <a:lnSpc>
+                <a:spcPct val="105000"/>
+              </a:lnSpc>
+              <a:spcBef>
+                <a:spcPts val="0"/>
+              </a:spcBef>
+              <a:spcAft>
+                <a:spcPts val="1000"/>
+              </a:spcAft>
+            </a:pPr>
+            <a:r>
+              <a:rPr sz="2400" b="1" i="0">
+                <a:solidFill>
+                  <a:srgbClr val="EDAB0C"/>
+                </a:solidFill>
+                <a:latin typeface="Roboto"/>
+              </a:rPr>
+              <a:t>■  </a:t>
+            </a:r>
+            <a:r>
+              <a:rPr sz="2400" b="0" i="0">
+                <a:solidFill>
+                  <a:srgbClr val="2A2929"/>
+                </a:solidFill>
+                <a:latin typeface="Roboto"/>
+              </a:rPr>
+              <a:t>Written for the business in plain professional English; this is the deliverable of the whole Part B.</a:t>
+            </a:r>
+          </a:p>
+        </p:txBody>
+      </p:sp>
+      <p:sp>
+        <p:nvSpPr>
+          <p:cNvPr id="5" name="Rectangle 4"/>
+          <p:cNvSpPr/>
+          <p:nvPr/>
+        </p:nvSpPr>
+        <p:spPr>
+          <a:xfrm>
+            <a:off x="0" y="6565392"/>
+            <a:ext cx="12191695" cy="38100"/>
+          </a:xfrm>
+          <a:prstGeom prst="rect">
+            <a:avLst/>
+          </a:prstGeom>
+          <a:solidFill>
+            <a:srgbClr val="004488"/>
+          </a:solidFill>
+          <a:ln>
+            <a:noFill/>
+          </a:ln>
+          <a:effectLst/>
+        </p:spPr>
+        <p:style>
+          <a:lnRef idx="1">
+            <a:schemeClr val="accent1"/>
+          </a:lnRef>
+          <a:fillRef idx="3">
+            <a:schemeClr val="accent1"/>
+          </a:fillRef>
+          <a:effectRef idx="2">
+            <a:schemeClr val="accent1"/>
+          </a:effectRef>
+          <a:fontRef idx="minor">
+            <a:schemeClr val="lt1"/>
+          </a:fontRef>
+        </p:style>
+        <p:txBody>
+          <a:bodyPr rtlCol="0" anchor="ctr"/>
+          <a:lstStyle/>
+          <a:p>
+            <a:pPr algn="ctr"/>
+          </a:p>
+        </p:txBody>
+      </p:sp>
+      <p:sp>
+        <p:nvSpPr>
+          <p:cNvPr id="6" name="TextBox 5"/>
+          <p:cNvSpPr txBox="1"/>
+          <p:nvPr/>
+        </p:nvSpPr>
+        <p:spPr>
+          <a:xfrm>
+            <a:off x="502920" y="6400800"/>
+            <a:ext cx="5486400" cy="320040"/>
+          </a:xfrm>
+          <a:prstGeom prst="rect">
+            <a:avLst/>
+          </a:prstGeom>
+          <a:noFill/>
+        </p:spPr>
+        <p:txBody>
+          <a:bodyPr wrap="square" anchor="t" lIns="0" rIns="0" tIns="0" bIns="0">
+            <a:spAutoFit/>
+          </a:bodyPr>
+          <a:lstStyle/>
+          <a:p>
+            <a:r>
+              <a:rPr sz="1100" b="1" i="0">
+                <a:solidFill>
+                  <a:srgbClr val="2A2929"/>
+                </a:solidFill>
+                <a:latin typeface="Roboto"/>
+              </a:rPr>
+              <a:t>Kangan </a:t>
+            </a:r>
+            <a:r>
+              <a:rPr sz="1100" b="1" i="0">
+                <a:solidFill>
+                  <a:srgbClr val="D68E10"/>
+                </a:solidFill>
+                <a:latin typeface="Roboto"/>
+              </a:rPr>
+              <a:t>Institute</a:t>
+            </a:r>
+          </a:p>
+        </p:txBody>
+      </p:sp>
+      <p:sp>
+        <p:nvSpPr>
+          <p:cNvPr id="7" name="TextBox 6"/>
+          <p:cNvSpPr txBox="1"/>
+          <p:nvPr/>
+        </p:nvSpPr>
+        <p:spPr>
+          <a:xfrm>
+            <a:off x="10515600" y="6400800"/>
+            <a:ext cx="1188720" cy="320040"/>
+          </a:xfrm>
+          <a:prstGeom prst="rect">
+            <a:avLst/>
+          </a:prstGeom>
+          <a:noFill/>
+        </p:spPr>
+        <p:txBody>
+          <a:bodyPr wrap="square" anchor="t" lIns="0" rIns="0" tIns="0" bIns="0">
+            <a:spAutoFit/>
+          </a:bodyPr>
+          <a:lstStyle/>
+          <a:p>
+            <a:pPr algn="r"/>
+            <a:r>
+              <a:rPr sz="1100" b="0" i="0">
+                <a:solidFill>
+                  <a:srgbClr val="7A7A7A"/>
+                </a:solidFill>
+                <a:latin typeface="Roboto"/>
+              </a:rPr>
+              <a:t>17</a:t>
+            </a:r>
+          </a:p>
+        </p:txBody>
+      </p:sp>
+    </p:spTree>
+  </p:cSld>
+  <p:clrMapOvr>
+    <a:masterClrMapping/>
+  </p:clrMapOvr>
+</p:sld>
+</file>
+
+<file path=ppt/slides/slide23.xml><?xml version="1.0" encoding="utf-8"?>
+<p:sld xmlns:a="http://schemas.openxmlformats.org/drawingml/2006/main" xmlns:p="http://schemas.openxmlformats.org/presentationml/2006/main" xmlns:r="http://schemas.openxmlformats.org/officeDocument/2006/relationships">
+  <p:cSld>
+    <p:bg>
+      <p:bgPr>
+        <a:solidFill>
+          <a:srgbClr val="FFFFFF"/>
+        </a:solidFill>
+        <a:effectLst/>
+      </p:bgPr>
+    </p:bg>
+    <p:spTree>
+      <p:nvGrpSpPr>
+        <p:cNvPr id="1" name=""/>
+        <p:cNvGrpSpPr/>
+        <p:nvPr/>
+      </p:nvGrpSpPr>
+      <p:grpSpPr/>
+      <p:sp>
+        <p:nvSpPr>
+          <p:cNvPr id="2" name="Rectangle 1"/>
+          <p:cNvSpPr/>
+          <p:nvPr/>
+        </p:nvSpPr>
+        <p:spPr>
+          <a:xfrm>
+            <a:off x="0" y="0"/>
+            <a:ext cx="12191695" cy="1234440"/>
+          </a:xfrm>
+          <a:prstGeom prst="rect">
+            <a:avLst/>
+          </a:prstGeom>
+          <a:solidFill>
+            <a:srgbClr val="004488"/>
+          </a:solidFill>
+          <a:ln>
+            <a:noFill/>
+          </a:ln>
+          <a:effectLst/>
+        </p:spPr>
+        <p:style>
+          <a:lnRef idx="1">
+            <a:schemeClr val="accent1"/>
+          </a:lnRef>
+          <a:fillRef idx="3">
+            <a:schemeClr val="accent1"/>
+          </a:fillRef>
+          <a:effectRef idx="2">
+            <a:schemeClr val="accent1"/>
+          </a:effectRef>
+          <a:fontRef idx="minor">
+            <a:schemeClr val="lt1"/>
+          </a:fontRef>
+        </p:style>
+        <p:txBody>
+          <a:bodyPr rtlCol="0" anchor="ctr"/>
+          <a:lstStyle/>
+          <a:p>
+            <a:pPr algn="ctr"/>
+          </a:p>
+        </p:txBody>
+      </p:sp>
+      <p:sp>
+        <p:nvSpPr>
+          <p:cNvPr id="3" name="Rounded Rectangle 2"/>
+          <p:cNvSpPr/>
+          <p:nvPr/>
+        </p:nvSpPr>
+        <p:spPr>
+          <a:xfrm>
+            <a:off x="640080" y="384048"/>
+            <a:ext cx="1691640" cy="457200"/>
+          </a:xfrm>
+          <a:prstGeom prst="roundRect">
+            <a:avLst/>
+          </a:prstGeom>
+          <a:solidFill>
+            <a:srgbClr val="2A2929"/>
+          </a:solidFill>
+          <a:ln>
+            <a:noFill/>
+          </a:ln>
+          <a:effectLst/>
+        </p:spPr>
+        <p:style>
+          <a:lnRef idx="1">
+            <a:schemeClr val="accent1"/>
+          </a:lnRef>
+          <a:fillRef idx="3">
+            <a:schemeClr val="accent1"/>
+          </a:fillRef>
+          <a:effectRef idx="2">
+            <a:schemeClr val="accent1"/>
+          </a:effectRef>
+          <a:fontRef idx="minor">
+            <a:schemeClr val="lt1"/>
+          </a:fontRef>
+        </p:style>
+        <p:txBody>
+          <a:bodyPr rtlCol="0" anchor="ctr"/>
+          <a:lstStyle/>
+          <a:p>
+            <a:pPr algn="ctr"/>
+            <a:r>
+              <a:rPr sz="1400" b="1" i="0">
+                <a:solidFill>
+                  <a:srgbClr val="FBB900"/>
+                </a:solidFill>
+                <a:latin typeface="Roboto"/>
+              </a:rPr>
+              <a:t>ACTIVITY</a:t>
+            </a:r>
+          </a:p>
+        </p:txBody>
+      </p:sp>
+      <p:sp>
+        <p:nvSpPr>
+          <p:cNvPr id="4" name="TextBox 3"/>
+          <p:cNvSpPr txBox="1"/>
+          <p:nvPr/>
+        </p:nvSpPr>
+        <p:spPr>
+          <a:xfrm>
+            <a:off x="2560320" y="310896"/>
+            <a:ext cx="8961120" cy="685800"/>
+          </a:xfrm>
+          <a:prstGeom prst="rect">
+            <a:avLst/>
+          </a:prstGeom>
+          <a:noFill/>
+        </p:spPr>
+        <p:txBody>
+          <a:bodyPr wrap="square" anchor="ctr" lIns="0" rIns="0" tIns="0" bIns="0">
+            <a:spAutoFit/>
+          </a:bodyPr>
+          <a:lstStyle/>
+          <a:p>
+            <a:r>
+              <a:rPr sz="2600" b="1" i="0">
+                <a:solidFill>
+                  <a:srgbClr val="FFFFFF"/>
+                </a:solidFill>
+                <a:latin typeface="Roboto"/>
+              </a:rPr>
+              <a:t>The standards, and the assembled plan</a:t>
+            </a:r>
+          </a:p>
+        </p:txBody>
+      </p:sp>
+      <p:sp>
+        <p:nvSpPr>
+          <p:cNvPr id="5" name="TextBox 4"/>
+          <p:cNvSpPr txBox="1"/>
+          <p:nvPr/>
+        </p:nvSpPr>
+        <p:spPr>
+          <a:xfrm>
+            <a:off x="658368" y="1554480"/>
+            <a:ext cx="10881360" cy="4297680"/>
+          </a:xfrm>
+          <a:prstGeom prst="rect">
+            <a:avLst/>
+          </a:prstGeom>
+          <a:noFill/>
+        </p:spPr>
+        <p:txBody>
+          <a:bodyPr wrap="square" anchor="t" lIns="0" rIns="0" tIns="0" bIns="0">
+            <a:spAutoFit/>
+          </a:bodyPr>
+          <a:lstStyle/>
+          <a:p>
+            <a:pPr marL="0" indent="0">
+              <a:lnSpc>
+                <a:spcPct val="105000"/>
+              </a:lnSpc>
+              <a:spcBef>
+                <a:spcPts val="0"/>
+              </a:spcBef>
+              <a:spcAft>
+                <a:spcPts val="1000"/>
+              </a:spcAft>
+            </a:pPr>
+            <a:r>
+              <a:rPr sz="1700" b="1" i="0">
+                <a:solidFill>
+                  <a:srgbClr val="EDAB0C"/>
+                </a:solidFill>
+                <a:latin typeface="Roboto"/>
+              </a:rPr>
+              <a:t>■  </a:t>
+            </a:r>
+            <a:r>
+              <a:rPr sz="1700" b="0" i="0">
+                <a:solidFill>
+                  <a:srgbClr val="2A2929"/>
+                </a:solidFill>
+                <a:latin typeface="Roboto"/>
+              </a:rPr>
+              <a:t>Workbook — tasks 36 and 37, then the assessment's Part B question Q7 from your own plan.</a:t>
+            </a:r>
+          </a:p>
+          <a:p>
+            <a:pPr marL="0" indent="0">
+              <a:lnSpc>
+                <a:spcPct val="105000"/>
+              </a:lnSpc>
+              <a:spcBef>
+                <a:spcPts val="0"/>
+              </a:spcBef>
+              <a:spcAft>
+                <a:spcPts val="1000"/>
+              </a:spcAft>
+            </a:pPr>
+            <a:r>
+              <a:rPr sz="1700" b="1" i="0">
+                <a:solidFill>
+                  <a:srgbClr val="EDAB0C"/>
+                </a:solidFill>
+                <a:latin typeface="Roboto"/>
+              </a:rPr>
+              <a:t>■  </a:t>
+            </a:r>
+            <a:r>
+              <a:rPr sz="1700" b="0" i="0">
+                <a:solidFill>
+                  <a:srgbClr val="2A2929"/>
+                </a:solidFill>
+                <a:latin typeface="Roboto"/>
+              </a:rPr>
+              <a:t>Record the standards the plan reflects, assemble the full Disaster Recovery Plan, then explain the recovery techniques available and why yours fits.</a:t>
+            </a:r>
+          </a:p>
+        </p:txBody>
+      </p:sp>
+      <p:sp>
+        <p:nvSpPr>
+          <p:cNvPr id="6" name="Rounded Rectangle 5"/>
+          <p:cNvSpPr/>
+          <p:nvPr/>
+        </p:nvSpPr>
+        <p:spPr>
+          <a:xfrm>
+            <a:off x="640080" y="5897880"/>
+            <a:ext cx="4023360" cy="457200"/>
+          </a:xfrm>
+          <a:prstGeom prst="roundRect">
+            <a:avLst/>
+          </a:prstGeom>
+          <a:solidFill>
+            <a:srgbClr val="F9F9F9"/>
+          </a:solidFill>
+          <a:ln w="12700">
+            <a:solidFill>
+              <a:srgbClr val="CCCCCC"/>
+            </a:solidFill>
+          </a:ln>
+          <a:effectLst/>
+        </p:spPr>
+        <p:style>
+          <a:lnRef idx="1">
+            <a:schemeClr val="accent1"/>
+          </a:lnRef>
+          <a:fillRef idx="3">
+            <a:schemeClr val="accent1"/>
+          </a:fillRef>
+          <a:effectRef idx="2">
+            <a:schemeClr val="accent1"/>
+          </a:effectRef>
+          <a:fontRef idx="minor">
+            <a:schemeClr val="lt1"/>
+          </a:fontRef>
+        </p:style>
+        <p:txBody>
+          <a:bodyPr rtlCol="0" anchor="ctr"/>
+          <a:lstStyle/>
+          <a:p>
+            <a:pPr algn="ctr"/>
+          </a:p>
+        </p:txBody>
+      </p:sp>
+      <p:sp>
+        <p:nvSpPr>
+          <p:cNvPr id="7" name="TextBox 6"/>
+          <p:cNvSpPr txBox="1"/>
+          <p:nvPr/>
+        </p:nvSpPr>
+        <p:spPr>
+          <a:xfrm>
+            <a:off x="822960" y="5943600"/>
+            <a:ext cx="3657600" cy="365760"/>
+          </a:xfrm>
+          <a:prstGeom prst="rect">
+            <a:avLst/>
+          </a:prstGeom>
+          <a:noFill/>
+        </p:spPr>
+        <p:txBody>
+          <a:bodyPr wrap="square" anchor="ctr" lIns="0" rIns="0" tIns="0" bIns="0">
+            <a:spAutoFit/>
+          </a:bodyPr>
+          <a:lstStyle/>
+          <a:p>
+            <a:r>
+              <a:rPr sz="1500" b="1" i="0">
+                <a:solidFill>
+                  <a:srgbClr val="2A2929"/>
+                </a:solidFill>
+                <a:latin typeface="Roboto"/>
+              </a:rPr>
+              <a:t>⏱  ~35 min</a:t>
+            </a:r>
+          </a:p>
+        </p:txBody>
+      </p:sp>
+      <p:sp>
+        <p:nvSpPr>
+          <p:cNvPr id="8" name="Rectangle 7"/>
+          <p:cNvSpPr/>
+          <p:nvPr/>
+        </p:nvSpPr>
+        <p:spPr>
+          <a:xfrm>
+            <a:off x="0" y="6565392"/>
+            <a:ext cx="12191695" cy="38100"/>
+          </a:xfrm>
+          <a:prstGeom prst="rect">
+            <a:avLst/>
+          </a:prstGeom>
+          <a:solidFill>
+            <a:srgbClr val="004488"/>
+          </a:solidFill>
+          <a:ln>
+            <a:noFill/>
+          </a:ln>
+          <a:effectLst/>
+        </p:spPr>
+        <p:style>
+          <a:lnRef idx="1">
+            <a:schemeClr val="accent1"/>
+          </a:lnRef>
+          <a:fillRef idx="3">
+            <a:schemeClr val="accent1"/>
+          </a:fillRef>
+          <a:effectRef idx="2">
+            <a:schemeClr val="accent1"/>
+          </a:effectRef>
+          <a:fontRef idx="minor">
+            <a:schemeClr val="lt1"/>
+          </a:fontRef>
+        </p:style>
+        <p:txBody>
+          <a:bodyPr rtlCol="0" anchor="ctr"/>
+          <a:lstStyle/>
+          <a:p>
+            <a:pPr algn="ctr"/>
+          </a:p>
+        </p:txBody>
+      </p:sp>
+      <p:sp>
+        <p:nvSpPr>
+          <p:cNvPr id="9" name="TextBox 8"/>
+          <p:cNvSpPr txBox="1"/>
+          <p:nvPr/>
+        </p:nvSpPr>
+        <p:spPr>
+          <a:xfrm>
+            <a:off x="502920" y="6400800"/>
+            <a:ext cx="5486400" cy="320040"/>
+          </a:xfrm>
+          <a:prstGeom prst="rect">
+            <a:avLst/>
+          </a:prstGeom>
+          <a:noFill/>
+        </p:spPr>
+        <p:txBody>
+          <a:bodyPr wrap="square" anchor="t" lIns="0" rIns="0" tIns="0" bIns="0">
+            <a:spAutoFit/>
+          </a:bodyPr>
+          <a:lstStyle/>
+          <a:p>
+            <a:r>
+              <a:rPr sz="1100" b="1" i="0">
+                <a:solidFill>
+                  <a:srgbClr val="2A2929"/>
+                </a:solidFill>
+                <a:latin typeface="Roboto"/>
+              </a:rPr>
+              <a:t>Kangan </a:t>
+            </a:r>
+            <a:r>
+              <a:rPr sz="1100" b="1" i="0">
+                <a:solidFill>
+                  <a:srgbClr val="D68E10"/>
+                </a:solidFill>
+                <a:latin typeface="Roboto"/>
+              </a:rPr>
+              <a:t>Institute</a:t>
+            </a:r>
+          </a:p>
+        </p:txBody>
+      </p:sp>
+      <p:sp>
+        <p:nvSpPr>
+          <p:cNvPr id="10" name="TextBox 9"/>
+          <p:cNvSpPr txBox="1"/>
+          <p:nvPr/>
+        </p:nvSpPr>
+        <p:spPr>
+          <a:xfrm>
+            <a:off x="10515600" y="6400800"/>
+            <a:ext cx="1188720" cy="320040"/>
+          </a:xfrm>
+          <a:prstGeom prst="rect">
+            <a:avLst/>
+          </a:prstGeom>
+          <a:noFill/>
+        </p:spPr>
+        <p:txBody>
+          <a:bodyPr wrap="square" anchor="t" lIns="0" rIns="0" tIns="0" bIns="0">
+            <a:spAutoFit/>
+          </a:bodyPr>
+          <a:lstStyle/>
+          <a:p>
+            <a:pPr algn="r"/>
+            <a:r>
+              <a:rPr sz="1100" b="0" i="0">
+                <a:solidFill>
+                  <a:srgbClr val="7A7A7A"/>
+                </a:solidFill>
+                <a:latin typeface="Roboto"/>
+              </a:rPr>
+              <a:t>18</a:t>
+            </a:r>
+          </a:p>
+        </p:txBody>
+      </p:sp>
+    </p:spTree>
+  </p:cSld>
+  <p:clrMapOvr>
+    <a:masterClrMapping/>
+  </p:clrMapOvr>
+</p:sld>
+</file>
+
+<file path=ppt/slides/slide24.xml><?xml version="1.0" encoding="utf-8"?>
+<p:sld xmlns:a="http://schemas.openxmlformats.org/drawingml/2006/main" xmlns:p="http://schemas.openxmlformats.org/presentationml/2006/main" xmlns:r="http://schemas.openxmlformats.org/officeDocument/2006/relationships">
+  <p:cSld>
+    <p:bg>
+      <p:bgPr>
+        <a:solidFill>
+          <a:srgbClr val="F9F9F9"/>
+        </a:solidFill>
+        <a:effectLst/>
+      </p:bgPr>
+    </p:bg>
+    <p:spTree>
+      <p:nvGrpSpPr>
+        <p:cNvPr id="1" name=""/>
+        <p:cNvGrpSpPr/>
+        <p:nvPr/>
+      </p:nvGrpSpPr>
+      <p:grpSpPr/>
+      <p:sp>
+        <p:nvSpPr>
+          <p:cNvPr id="2" name="TextBox 1"/>
+          <p:cNvSpPr txBox="1"/>
+          <p:nvPr/>
+        </p:nvSpPr>
+        <p:spPr>
+          <a:xfrm>
+            <a:off x="640080" y="548640"/>
+            <a:ext cx="10881360" cy="1097280"/>
+          </a:xfrm>
+          <a:prstGeom prst="rect">
+            <a:avLst/>
+          </a:prstGeom>
+          <a:noFill/>
+        </p:spPr>
+        <p:txBody>
+          <a:bodyPr wrap="square" anchor="t" lIns="0" rIns="0" tIns="0" bIns="0">
+            <a:spAutoFit/>
+          </a:bodyPr>
+          <a:lstStyle/>
+          <a:p>
+            <a:r>
+              <a:rPr sz="3200" b="1" i="0">
+                <a:solidFill>
+                  <a:srgbClr val="2A2929"/>
+                </a:solidFill>
+                <a:latin typeface="Roboto"/>
+              </a:rPr>
+              <a:t>Key takeaways</a:t>
+            </a:r>
+          </a:p>
+          <a:p>
+            <a:pPr>
+              <a:spcBef>
+                <a:spcPts val="200"/>
+              </a:spcBef>
+            </a:pPr>
+            <a:r>
+              <a:rPr sz="1800" b="1" i="0">
+                <a:solidFill>
+                  <a:srgbClr val="004488"/>
+                </a:solidFill>
+                <a:latin typeface="Roboto"/>
+              </a:rPr>
+              <a:t>Topic 4 · Key takeaways</a:t>
+            </a:r>
+          </a:p>
+        </p:txBody>
+      </p:sp>
+      <p:sp>
+        <p:nvSpPr>
+          <p:cNvPr id="3" name="Rectangle 2"/>
+          <p:cNvSpPr/>
+          <p:nvPr/>
+        </p:nvSpPr>
+        <p:spPr>
+          <a:xfrm>
+            <a:off x="658368" y="1600200"/>
+            <a:ext cx="1463040" cy="50800"/>
+          </a:xfrm>
+          <a:prstGeom prst="rect">
+            <a:avLst/>
+          </a:prstGeom>
+          <a:solidFill>
+            <a:srgbClr val="004488"/>
+          </a:solidFill>
+          <a:ln>
+            <a:noFill/>
+          </a:ln>
+          <a:effectLst/>
+        </p:spPr>
+        <p:style>
+          <a:lnRef idx="1">
+            <a:schemeClr val="accent1"/>
+          </a:lnRef>
+          <a:fillRef idx="3">
+            <a:schemeClr val="accent1"/>
+          </a:fillRef>
+          <a:effectRef idx="2">
+            <a:schemeClr val="accent1"/>
+          </a:effectRef>
+          <a:fontRef idx="minor">
+            <a:schemeClr val="lt1"/>
+          </a:fontRef>
+        </p:style>
+        <p:txBody>
+          <a:bodyPr rtlCol="0" anchor="ctr"/>
+          <a:lstStyle/>
+          <a:p>
+            <a:pPr algn="ctr"/>
+          </a:p>
+        </p:txBody>
+      </p:sp>
+      <p:sp>
+        <p:nvSpPr>
+          <p:cNvPr id="4" name="Rectangle 3"/>
+          <p:cNvSpPr/>
+          <p:nvPr/>
+        </p:nvSpPr>
+        <p:spPr>
+          <a:xfrm>
+            <a:off x="640080" y="1965960"/>
+            <a:ext cx="10927080" cy="841248"/>
+          </a:xfrm>
+          <a:prstGeom prst="rect">
+            <a:avLst/>
+          </a:prstGeom>
+          <a:solidFill>
+            <a:srgbClr val="FFFFFF"/>
+          </a:solidFill>
+          <a:ln w="12700">
+            <a:solidFill>
+              <a:srgbClr val="CCCCCC"/>
+            </a:solidFill>
+          </a:ln>
+          <a:effectLst/>
+        </p:spPr>
+        <p:style>
+          <a:lnRef idx="1">
+            <a:schemeClr val="accent1"/>
+          </a:lnRef>
+          <a:fillRef idx="3">
+            <a:schemeClr val="accent1"/>
+          </a:fillRef>
+          <a:effectRef idx="2">
+            <a:schemeClr val="accent1"/>
+          </a:effectRef>
+          <a:fontRef idx="minor">
+            <a:schemeClr val="lt1"/>
+          </a:fontRef>
+        </p:style>
+        <p:txBody>
+          <a:bodyPr rtlCol="0" anchor="ctr"/>
+          <a:lstStyle/>
+          <a:p>
+            <a:pPr algn="ctr"/>
+          </a:p>
+        </p:txBody>
+      </p:sp>
+      <p:sp>
+        <p:nvSpPr>
+          <p:cNvPr id="5" name="Rectangle 4"/>
+          <p:cNvSpPr/>
+          <p:nvPr/>
+        </p:nvSpPr>
+        <p:spPr>
+          <a:xfrm>
+            <a:off x="640080" y="1965960"/>
+            <a:ext cx="109728" cy="841248"/>
+          </a:xfrm>
+          <a:prstGeom prst="rect">
+            <a:avLst/>
+          </a:prstGeom>
+          <a:solidFill>
+            <a:srgbClr val="004488"/>
+          </a:solidFill>
+          <a:ln>
+            <a:noFill/>
+          </a:ln>
+          <a:effectLst/>
+        </p:spPr>
+        <p:style>
+          <a:lnRef idx="1">
+            <a:schemeClr val="accent1"/>
+          </a:lnRef>
+          <a:fillRef idx="3">
+            <a:schemeClr val="accent1"/>
+          </a:fillRef>
+          <a:effectRef idx="2">
+            <a:schemeClr val="accent1"/>
+          </a:effectRef>
+          <a:fontRef idx="minor">
+            <a:schemeClr val="lt1"/>
+          </a:fontRef>
+        </p:style>
+        <p:txBody>
+          <a:bodyPr rtlCol="0" anchor="ctr"/>
+          <a:lstStyle/>
+          <a:p>
+            <a:pPr algn="ctr"/>
+          </a:p>
+        </p:txBody>
+      </p:sp>
+      <p:sp>
+        <p:nvSpPr>
+          <p:cNvPr id="6" name="TextBox 5"/>
+          <p:cNvSpPr txBox="1"/>
+          <p:nvPr/>
+        </p:nvSpPr>
+        <p:spPr>
+          <a:xfrm>
+            <a:off x="960120" y="1965960"/>
+            <a:ext cx="10424160" cy="841248"/>
+          </a:xfrm>
+          <a:prstGeom prst="rect">
+            <a:avLst/>
+          </a:prstGeom>
+          <a:noFill/>
+        </p:spPr>
+        <p:txBody>
+          <a:bodyPr wrap="square" anchor="ctr" lIns="0" rIns="0" tIns="0" bIns="0">
+            <a:spAutoFit/>
+          </a:bodyPr>
+          <a:lstStyle/>
+          <a:p>
+            <a:pPr>
+              <a:lnSpc>
+                <a:spcPct val="100000"/>
+              </a:lnSpc>
+            </a:pPr>
+            <a:r>
+              <a:rPr sz="1700" b="0" i="0">
+                <a:solidFill>
+                  <a:srgbClr val="2A2929"/>
+                </a:solidFill>
+                <a:latin typeface="Roboto"/>
+              </a:rPr>
+              <a:t>Recommend the simplest strategy the objectives allow, and show your working.</a:t>
+            </a:r>
+          </a:p>
+        </p:txBody>
+      </p:sp>
+      <p:sp>
+        <p:nvSpPr>
+          <p:cNvPr id="7" name="Rectangle 6"/>
+          <p:cNvSpPr/>
+          <p:nvPr/>
+        </p:nvSpPr>
+        <p:spPr>
+          <a:xfrm>
+            <a:off x="640080" y="2916936"/>
+            <a:ext cx="10927080" cy="841248"/>
+          </a:xfrm>
+          <a:prstGeom prst="rect">
+            <a:avLst/>
+          </a:prstGeom>
+          <a:solidFill>
+            <a:srgbClr val="FFFFFF"/>
+          </a:solidFill>
+          <a:ln w="12700">
+            <a:solidFill>
+              <a:srgbClr val="CCCCCC"/>
+            </a:solidFill>
+          </a:ln>
+          <a:effectLst/>
+        </p:spPr>
+        <p:style>
+          <a:lnRef idx="1">
+            <a:schemeClr val="accent1"/>
+          </a:lnRef>
+          <a:fillRef idx="3">
+            <a:schemeClr val="accent1"/>
+          </a:fillRef>
+          <a:effectRef idx="2">
+            <a:schemeClr val="accent1"/>
+          </a:effectRef>
+          <a:fontRef idx="minor">
+            <a:schemeClr val="lt1"/>
+          </a:fontRef>
+        </p:style>
+        <p:txBody>
+          <a:bodyPr rtlCol="0" anchor="ctr"/>
+          <a:lstStyle/>
+          <a:p>
+            <a:pPr algn="ctr"/>
+          </a:p>
+        </p:txBody>
+      </p:sp>
+      <p:sp>
+        <p:nvSpPr>
+          <p:cNvPr id="8" name="Rectangle 7"/>
+          <p:cNvSpPr/>
+          <p:nvPr/>
+        </p:nvSpPr>
+        <p:spPr>
+          <a:xfrm>
+            <a:off x="640080" y="2916936"/>
+            <a:ext cx="109728" cy="841248"/>
+          </a:xfrm>
+          <a:prstGeom prst="rect">
+            <a:avLst/>
+          </a:prstGeom>
+          <a:solidFill>
+            <a:srgbClr val="004488"/>
+          </a:solidFill>
+          <a:ln>
+            <a:noFill/>
+          </a:ln>
+          <a:effectLst/>
+        </p:spPr>
+        <p:style>
+          <a:lnRef idx="1">
+            <a:schemeClr val="accent1"/>
+          </a:lnRef>
+          <a:fillRef idx="3">
+            <a:schemeClr val="accent1"/>
+          </a:fillRef>
+          <a:effectRef idx="2">
+            <a:schemeClr val="accent1"/>
+          </a:effectRef>
+          <a:fontRef idx="minor">
+            <a:schemeClr val="lt1"/>
+          </a:fontRef>
+        </p:style>
+        <p:txBody>
+          <a:bodyPr rtlCol="0" anchor="ctr"/>
+          <a:lstStyle/>
+          <a:p>
+            <a:pPr algn="ctr"/>
+          </a:p>
+        </p:txBody>
+      </p:sp>
+      <p:sp>
+        <p:nvSpPr>
+          <p:cNvPr id="9" name="TextBox 8"/>
+          <p:cNvSpPr txBox="1"/>
+          <p:nvPr/>
+        </p:nvSpPr>
+        <p:spPr>
+          <a:xfrm>
+            <a:off x="960120" y="2916936"/>
+            <a:ext cx="10424160" cy="841248"/>
+          </a:xfrm>
+          <a:prstGeom prst="rect">
+            <a:avLst/>
+          </a:prstGeom>
+          <a:noFill/>
+        </p:spPr>
+        <p:txBody>
+          <a:bodyPr wrap="square" anchor="ctr" lIns="0" rIns="0" tIns="0" bIns="0">
+            <a:spAutoFit/>
+          </a:bodyPr>
+          <a:lstStyle/>
+          <a:p>
+            <a:pPr>
+              <a:lnSpc>
+                <a:spcPct val="100000"/>
+              </a:lnSpc>
+            </a:pPr>
+            <a:r>
+              <a:rPr sz="1700" b="0" i="0">
+                <a:solidFill>
+                  <a:srgbClr val="2A2929"/>
+                </a:solidFill>
+                <a:latin typeface="Roboto"/>
+              </a:rPr>
+              <a:t>A plan is detection, steps, owners, timings, components — with the arithmetic proving the targets.</a:t>
+            </a:r>
+          </a:p>
+        </p:txBody>
+      </p:sp>
+      <p:sp>
+        <p:nvSpPr>
+          <p:cNvPr id="10" name="Rectangle 9"/>
+          <p:cNvSpPr/>
+          <p:nvPr/>
+        </p:nvSpPr>
+        <p:spPr>
+          <a:xfrm>
+            <a:off x="640080" y="3867912"/>
+            <a:ext cx="10927080" cy="841248"/>
+          </a:xfrm>
+          <a:prstGeom prst="rect">
+            <a:avLst/>
+          </a:prstGeom>
+          <a:solidFill>
+            <a:srgbClr val="FFFFFF"/>
+          </a:solidFill>
+          <a:ln w="12700">
+            <a:solidFill>
+              <a:srgbClr val="CCCCCC"/>
+            </a:solidFill>
+          </a:ln>
+          <a:effectLst/>
+        </p:spPr>
+        <p:style>
+          <a:lnRef idx="1">
+            <a:schemeClr val="accent1"/>
+          </a:lnRef>
+          <a:fillRef idx="3">
+            <a:schemeClr val="accent1"/>
+          </a:fillRef>
+          <a:effectRef idx="2">
+            <a:schemeClr val="accent1"/>
+          </a:effectRef>
+          <a:fontRef idx="minor">
+            <a:schemeClr val="lt1"/>
+          </a:fontRef>
+        </p:style>
+        <p:txBody>
+          <a:bodyPr rtlCol="0" anchor="ctr"/>
+          <a:lstStyle/>
+          <a:p>
+            <a:pPr algn="ctr"/>
+          </a:p>
+        </p:txBody>
+      </p:sp>
+      <p:sp>
+        <p:nvSpPr>
+          <p:cNvPr id="11" name="Rectangle 10"/>
+          <p:cNvSpPr/>
+          <p:nvPr/>
+        </p:nvSpPr>
+        <p:spPr>
+          <a:xfrm>
+            <a:off x="640080" y="3867912"/>
+            <a:ext cx="109728" cy="841248"/>
+          </a:xfrm>
+          <a:prstGeom prst="rect">
+            <a:avLst/>
+          </a:prstGeom>
+          <a:solidFill>
+            <a:srgbClr val="004488"/>
+          </a:solidFill>
+          <a:ln>
+            <a:noFill/>
+          </a:ln>
+          <a:effectLst/>
+        </p:spPr>
+        <p:style>
+          <a:lnRef idx="1">
+            <a:schemeClr val="accent1"/>
+          </a:lnRef>
+          <a:fillRef idx="3">
+            <a:schemeClr val="accent1"/>
+          </a:fillRef>
+          <a:effectRef idx="2">
+            <a:schemeClr val="accent1"/>
+          </a:effectRef>
+          <a:fontRef idx="minor">
+            <a:schemeClr val="lt1"/>
+          </a:fontRef>
+        </p:style>
+        <p:txBody>
+          <a:bodyPr rtlCol="0" anchor="ctr"/>
+          <a:lstStyle/>
+          <a:p>
+            <a:pPr algn="ctr"/>
+          </a:p>
+        </p:txBody>
+      </p:sp>
+      <p:sp>
+        <p:nvSpPr>
+          <p:cNvPr id="12" name="TextBox 11"/>
+          <p:cNvSpPr txBox="1"/>
+          <p:nvPr/>
+        </p:nvSpPr>
+        <p:spPr>
+          <a:xfrm>
+            <a:off x="960120" y="3867912"/>
+            <a:ext cx="10424160" cy="841248"/>
+          </a:xfrm>
+          <a:prstGeom prst="rect">
+            <a:avLst/>
+          </a:prstGeom>
+          <a:noFill/>
+        </p:spPr>
+        <p:txBody>
+          <a:bodyPr wrap="square" anchor="ctr" lIns="0" rIns="0" tIns="0" bIns="0">
+            <a:spAutoFit/>
+          </a:bodyPr>
+          <a:lstStyle/>
+          <a:p>
+            <a:pPr>
+              <a:lnSpc>
+                <a:spcPct val="100000"/>
+              </a:lnSpc>
+            </a:pPr>
+            <a:r>
+              <a:rPr sz="1700" b="0" i="0">
+                <a:solidFill>
+                  <a:srgbClr val="2A2929"/>
+                </a:solidFill>
+                <a:latin typeface="Roboto"/>
+              </a:rPr>
+              <a:t>Reference the continuity standards; assemble one traceable document.</a:t>
+            </a:r>
+          </a:p>
+        </p:txBody>
+      </p:sp>
+      <p:sp>
+        <p:nvSpPr>
+          <p:cNvPr id="13" name="Rectangle 12"/>
+          <p:cNvSpPr/>
+          <p:nvPr/>
+        </p:nvSpPr>
+        <p:spPr>
+          <a:xfrm>
+            <a:off x="0" y="6565392"/>
+            <a:ext cx="12191695" cy="38100"/>
+          </a:xfrm>
+          <a:prstGeom prst="rect">
+            <a:avLst/>
+          </a:prstGeom>
+          <a:solidFill>
+            <a:srgbClr val="004488"/>
+          </a:solidFill>
+          <a:ln>
+            <a:noFill/>
+          </a:ln>
+          <a:effectLst/>
+        </p:spPr>
+        <p:style>
+          <a:lnRef idx="1">
+            <a:schemeClr val="accent1"/>
+          </a:lnRef>
+          <a:fillRef idx="3">
+            <a:schemeClr val="accent1"/>
+          </a:fillRef>
+          <a:effectRef idx="2">
+            <a:schemeClr val="accent1"/>
+          </a:effectRef>
+          <a:fontRef idx="minor">
+            <a:schemeClr val="lt1"/>
+          </a:fontRef>
+        </p:style>
+        <p:txBody>
+          <a:bodyPr rtlCol="0" anchor="ctr"/>
+          <a:lstStyle/>
+          <a:p>
+            <a:pPr algn="ctr"/>
+          </a:p>
+        </p:txBody>
+      </p:sp>
+      <p:sp>
+        <p:nvSpPr>
+          <p:cNvPr id="14" name="TextBox 13"/>
+          <p:cNvSpPr txBox="1"/>
+          <p:nvPr/>
+        </p:nvSpPr>
+        <p:spPr>
+          <a:xfrm>
+            <a:off x="502920" y="6400800"/>
+            <a:ext cx="5486400" cy="320040"/>
+          </a:xfrm>
+          <a:prstGeom prst="rect">
+            <a:avLst/>
+          </a:prstGeom>
+          <a:noFill/>
+        </p:spPr>
+        <p:txBody>
+          <a:bodyPr wrap="square" anchor="t" lIns="0" rIns="0" tIns="0" bIns="0">
+            <a:spAutoFit/>
+          </a:bodyPr>
+          <a:lstStyle/>
+          <a:p>
+            <a:r>
+              <a:rPr sz="1100" b="1" i="0">
+                <a:solidFill>
+                  <a:srgbClr val="2A2929"/>
+                </a:solidFill>
+                <a:latin typeface="Roboto"/>
+              </a:rPr>
+              <a:t>Kangan </a:t>
+            </a:r>
+            <a:r>
+              <a:rPr sz="1100" b="1" i="0">
+                <a:solidFill>
+                  <a:srgbClr val="D68E10"/>
+                </a:solidFill>
+                <a:latin typeface="Roboto"/>
+              </a:rPr>
+              <a:t>Institute</a:t>
+            </a:r>
+          </a:p>
+        </p:txBody>
+      </p:sp>
+      <p:sp>
+        <p:nvSpPr>
+          <p:cNvPr id="15" name="TextBox 14"/>
+          <p:cNvSpPr txBox="1"/>
+          <p:nvPr/>
+        </p:nvSpPr>
+        <p:spPr>
+          <a:xfrm>
+            <a:off x="10515600" y="6400800"/>
+            <a:ext cx="1188720" cy="320040"/>
+          </a:xfrm>
+          <a:prstGeom prst="rect">
+            <a:avLst/>
+          </a:prstGeom>
+          <a:noFill/>
+        </p:spPr>
+        <p:txBody>
+          <a:bodyPr wrap="square" anchor="t" lIns="0" rIns="0" tIns="0" bIns="0">
+            <a:spAutoFit/>
+          </a:bodyPr>
+          <a:lstStyle/>
+          <a:p>
+            <a:pPr algn="r"/>
+            <a:r>
+              <a:rPr sz="1100" b="0" i="0">
+                <a:solidFill>
+                  <a:srgbClr val="7A7A7A"/>
+                </a:solidFill>
+                <a:latin typeface="Roboto"/>
+              </a:rPr>
+              <a:t>19</a:t>
+            </a:r>
+          </a:p>
+        </p:txBody>
+      </p:sp>
+    </p:spTree>
+  </p:cSld>
+  <p:clrMapOvr>
+    <a:masterClrMapping/>
+  </p:clrMapOvr>
+</p:sld>
+</file>
+
+<file path=ppt/slides/slide25.xml><?xml version="1.0" encoding="utf-8"?>
+<p:sld xmlns:a="http://schemas.openxmlformats.org/drawingml/2006/main" xmlns:p="http://schemas.openxmlformats.org/presentationml/2006/main" xmlns:r="http://schemas.openxmlformats.org/officeDocument/2006/relationships">
+  <p:cSld>
+    <p:bg>
+      <p:bgPr>
+        <a:solidFill>
+          <a:srgbClr val="2A2929"/>
+        </a:solidFill>
+        <a:effectLst/>
+      </p:bgPr>
+    </p:bg>
+    <p:spTree>
+      <p:nvGrpSpPr>
+        <p:cNvPr id="1" name=""/>
+        <p:cNvGrpSpPr/>
+        <p:nvPr/>
+      </p:nvGrpSpPr>
+      <p:grpSpPr/>
+      <p:sp>
+        <p:nvSpPr>
+          <p:cNvPr id="2" name="Rectangle 1"/>
+          <p:cNvSpPr/>
+          <p:nvPr/>
+        </p:nvSpPr>
+        <p:spPr>
+          <a:xfrm>
+            <a:off x="0" y="0"/>
+            <a:ext cx="411480" cy="6858000"/>
+          </a:xfrm>
+          <a:prstGeom prst="rect">
+            <a:avLst/>
+          </a:prstGeom>
+          <a:solidFill>
+            <a:srgbClr val="EDAB0C"/>
+          </a:solidFill>
+          <a:ln>
+            <a:noFill/>
+          </a:ln>
+          <a:effectLst/>
+        </p:spPr>
+        <p:style>
+          <a:lnRef idx="1">
+            <a:schemeClr val="accent1"/>
+          </a:lnRef>
+          <a:fillRef idx="3">
+            <a:schemeClr val="accent1"/>
+          </a:fillRef>
+          <a:effectRef idx="2">
+            <a:schemeClr val="accent1"/>
+          </a:effectRef>
+          <a:fontRef idx="minor">
+            <a:schemeClr val="lt1"/>
+          </a:fontRef>
+        </p:style>
+        <p:txBody>
+          <a:bodyPr rtlCol="0" anchor="ctr"/>
+          <a:lstStyle/>
+          <a:p>
+            <a:pPr algn="ctr"/>
+          </a:p>
+        </p:txBody>
+      </p:sp>
+      <p:sp>
+        <p:nvSpPr>
+          <p:cNvPr id="3" name="TextBox 2"/>
+          <p:cNvSpPr txBox="1"/>
+          <p:nvPr/>
+        </p:nvSpPr>
+        <p:spPr>
+          <a:xfrm>
+            <a:off x="914400" y="1463040"/>
+            <a:ext cx="10515600" cy="4023360"/>
+          </a:xfrm>
+          <a:prstGeom prst="rect">
+            <a:avLst/>
+          </a:prstGeom>
+          <a:noFill/>
+        </p:spPr>
+        <p:txBody>
+          <a:bodyPr wrap="square" anchor="t" lIns="0" rIns="0" tIns="0" bIns="0">
+            <a:spAutoFit/>
+          </a:bodyPr>
+          <a:lstStyle/>
+          <a:p>
+            <a:r>
+              <a:rPr sz="4000" b="1" i="0">
+                <a:solidFill>
+                  <a:srgbClr val="FFFFFF"/>
+                </a:solidFill>
+                <a:latin typeface="Roboto"/>
+              </a:rPr>
+              <a:t>Next: Topic 5 — present for approval</a:t>
+            </a:r>
+          </a:p>
+          <a:p>
+            <a:pPr>
+              <a:lnSpc>
+                <a:spcPct val="105000"/>
+              </a:lnSpc>
+              <a:spcBef>
+                <a:spcPts val="1200"/>
+              </a:spcBef>
+            </a:pPr>
+            <a:r>
+              <a:rPr sz="1900" b="0" i="0">
+                <a:solidFill>
+                  <a:srgbClr val="E8E8E8"/>
+                </a:solidFill>
+                <a:latin typeface="Roboto Light"/>
+              </a:rPr>
+              <a:t>The Solution Design and the Disaster Recovery Plan are both complete.</a:t>
+            </a:r>
+          </a:p>
+          <a:p>
+            <a:pPr>
+              <a:lnSpc>
+                <a:spcPct val="105000"/>
+              </a:lnSpc>
+              <a:spcBef>
+                <a:spcPts val="1200"/>
+              </a:spcBef>
+            </a:pPr>
+            <a:r>
+              <a:rPr sz="1900" b="0" i="0">
+                <a:solidFill>
+                  <a:srgbClr val="E8E8E8"/>
+                </a:solidFill>
+                <a:latin typeface="Roboto Light"/>
+              </a:rPr>
+              <a:t>Next you take them to the client: the walkthrough, the feedback, the lodgement and the sign-off.</a:t>
             </a:r>
           </a:p>
         </p:txBody>
@@ -9257,7 +11582,7 @@
                 </a:solidFill>
                 <a:latin typeface="Roboto"/>
               </a:rPr>
-              <a:t>Range of DR solutions</a:t>
+              <a:t>Evaluate the options, recommend an approach</a:t>
             </a:r>
           </a:p>
           <a:p>
@@ -9273,7 +11598,7 @@
                 </a:solidFill>
                 <a:latin typeface="Roboto Light"/>
               </a:rPr>
-              <a:t>four strategies, one choice</a:t>
+              <a:t>four strategies, one recommendation</a:t>
             </a:r>
           </a:p>
         </p:txBody>
@@ -9553,7 +11878,7 @@
                 </a:solidFill>
                 <a:latin typeface="Roboto"/>
               </a:rPr>
-              <a:t>Backup &amp; restore: cheapest, slowest — restore from backups after an event.</a:t>
+              <a:t>Backup and restore: cheapest, slowest — restore from backups after an event.</a:t>
             </a:r>
           </a:p>
           <a:p>
@@ -9646,7 +11971,7 @@
                 </a:solidFill>
                 <a:latin typeface="Roboto"/>
               </a:rPr>
-              <a:t>Multi-region active-active: full running copies, near-zero RTO/RPO, highest cost.</a:t>
+              <a:t>Multi-region active-active: full running copies, near-zero recovery targets, highest cost.</a:t>
             </a:r>
           </a:p>
         </p:txBody>
@@ -10384,7 +12709,7 @@
                 </a:solidFill>
                 <a:latin typeface="Roboto Light"/>
               </a:rPr>
-              <a:t>DR techniques for the cloud (KE 3); the right choice is the simplest that meets the objectives.</a:t>
+              <a:t>The right choice is the simplest that meets the objectives.</a:t>
             </a:r>
           </a:p>
         </p:txBody>
@@ -10566,7 +12891,7 @@
                 </a:solidFill>
                 <a:latin typeface="Roboto"/>
               </a:rPr>
-              <a:t>Evaluate &amp; choose to the objectives</a:t>
+              <a:t>Evaluate the options, then recommend</a:t>
             </a:r>
           </a:p>
         </p:txBody>
@@ -10664,7 +12989,7 @@
                 </a:solidFill>
                 <a:latin typeface="Roboto"/>
               </a:rPr>
-              <a:t>Evaluate each strategy against the Topic 3 RTO/RPO and the budget.</a:t>
+              <a:t>Evaluate each strategy against the objectives and budget from your own analysis — a range considered is part of the evidence.</a:t>
             </a:r>
           </a:p>
           <a:p>
@@ -10695,7 +13020,7 @@
                 </a:solidFill>
                 <a:latin typeface="Roboto"/>
               </a:rPr>
-              <a:t>Develop a range of solutions, then choose the simplest that meets the requirements (PE 1).</a:t>
+              <a:t>Recommend the simplest option that meets the requirements, and say what ruled out the cheaper ones.</a:t>
             </a:r>
           </a:p>
           <a:p>
@@ -10726,7 +13051,7 @@
                 </a:solidFill>
                 <a:latin typeface="Roboto"/>
               </a:rPr>
-              <a:t>Justify the choice — cheaper is right until it fails an objective.</a:t>
+              <a:t>Cheaper is right until it fails an objective.</a:t>
             </a:r>
           </a:p>
         </p:txBody>
@@ -11005,7 +13330,7 @@
                 </a:solidFill>
                 <a:latin typeface="Roboto"/>
               </a:rPr>
-              <a:t>Evaluate &amp; choose a strategy</a:t>
+              <a:t>Evaluate and recommend</a:t>
             </a:r>
           </a:p>
         </p:txBody>
@@ -11059,7 +13384,7 @@
                 </a:solidFill>
                 <a:latin typeface="Roboto"/>
               </a:rPr>
-              <a:t>For the practice scenario, evaluate the four strategies against the objectives.</a:t>
+              <a:t>Workbook — tasks 28 and 29.</a:t>
             </a:r>
           </a:p>
           <a:p>
@@ -11090,7 +13415,7 @@
                 </a:solidFill>
                 <a:latin typeface="Roboto"/>
               </a:rPr>
-              <a:t>Choose one and justify it against RTO/RPO and cost.</a:t>
+              <a:t>Evaluate the recovery options against your objectives, then record the recommended approach and what ruled the others out.</a:t>
             </a:r>
           </a:p>
         </p:txBody>
@@ -11170,7 +13495,7 @@
                 </a:solidFill>
                 <a:latin typeface="Roboto"/>
               </a:rPr>
-              <a:t>⏱  ~20 min</a:t>
+              <a:t>⏱  ~25 min</a:t>
             </a:r>
           </a:p>
         </p:txBody>
@@ -11311,7 +13636,7 @@
     <p:bg>
       <p:bgPr>
         <a:solidFill>
-          <a:srgbClr val="FFFFFF"/>
+          <a:srgbClr val="F9F9F9"/>
         </a:solidFill>
         <a:effectLst/>
       </p:bgPr>
@@ -11325,20 +13650,70 @@
       <p:grpSpPr/>
       <p:sp>
         <p:nvSpPr>
-          <p:cNvPr id="2" name="Rectangle 1"/>
+          <p:cNvPr id="2" name="TextBox 1"/>
+          <p:cNvSpPr txBox="1"/>
+          <p:nvPr/>
+        </p:nvSpPr>
+        <p:spPr>
+          <a:xfrm>
+            <a:off x="640080" y="548640"/>
+            <a:ext cx="10881360" cy="1097280"/>
+          </a:xfrm>
+          <a:prstGeom prst="rect">
+            <a:avLst/>
+          </a:prstGeom>
+          <a:noFill/>
+        </p:spPr>
+        <p:txBody>
+          <a:bodyPr wrap="square" anchor="t" lIns="0" rIns="0" tIns="0" bIns="0">
+            <a:spAutoFit/>
+          </a:bodyPr>
+          <a:lstStyle/>
+          <a:p>
+            <a:r>
+              <a:rPr sz="3200" b="1" i="0">
+                <a:solidFill>
+                  <a:srgbClr val="2A2929"/>
+                </a:solidFill>
+                <a:latin typeface="Roboto"/>
+              </a:rPr>
+              <a:t>Key takeaways</a:t>
+            </a:r>
+          </a:p>
+          <a:p>
+            <a:pPr>
+              <a:spcBef>
+                <a:spcPts val="200"/>
+              </a:spcBef>
+            </a:pPr>
+            <a:r>
+              <a:rPr sz="1800" b="1" i="0">
+                <a:solidFill>
+                  <a:srgbClr val="92268F"/>
+                </a:solidFill>
+                <a:latin typeface="Roboto"/>
+              </a:rPr>
+              <a:t>Section 1 · The choice</a:t>
+            </a:r>
+          </a:p>
+        </p:txBody>
+      </p:sp>
+      <p:sp>
+        <p:nvSpPr>
+          <p:cNvPr id="3" name="Rectangle 2"/>
           <p:cNvSpPr/>
           <p:nvPr/>
         </p:nvSpPr>
         <p:spPr>
           <a:xfrm>
-            <a:off x="0" y="0"/>
-            <a:ext cx="3931920" cy="6858000"/>
+            <a:off x="658368" y="1600200"/>
+            <a:ext cx="1463040" cy="50800"/>
           </a:xfrm>
           <a:prstGeom prst="rect">
             <a:avLst/>
           </a:prstGeom>
           <a:solidFill>
-            <a:srgbClr val="27B5CE"/>
+            <a:srgbClr val="92268F"/>
           </a:solidFill>
           <a:ln>
             <a:noFill/>
@@ -11369,101 +13744,47 @@
       </p:sp>
       <p:sp>
         <p:nvSpPr>
-          <p:cNvPr id="3" name="TextBox 2"/>
-          <p:cNvSpPr txBox="1"/>
-          <p:nvPr/>
-        </p:nvSpPr>
-        <p:spPr>
-          <a:xfrm>
-            <a:off x="365760" y="2103120"/>
-            <a:ext cx="3291840" cy="2194560"/>
-          </a:xfrm>
-          <a:prstGeom prst="rect">
-            <a:avLst/>
-          </a:prstGeom>
-          <a:noFill/>
-        </p:spPr>
-        <p:txBody>
-          <a:bodyPr wrap="square" anchor="t" lIns="0" rIns="0" tIns="0" bIns="0">
-            <a:spAutoFit/>
-          </a:bodyPr>
-          <a:lstStyle/>
-          <a:p>
-            <a:r>
-              <a:rPr sz="13000" b="1" i="0">
-                <a:solidFill>
-                  <a:srgbClr val="FFFFFF"/>
-                </a:solidFill>
-                <a:latin typeface="Roboto"/>
-              </a:rPr>
-              <a:t>02</a:t>
-            </a:r>
-          </a:p>
-        </p:txBody>
-      </p:sp>
-      <p:sp>
-        <p:nvSpPr>
-          <p:cNvPr id="4" name="TextBox 3"/>
-          <p:cNvSpPr txBox="1"/>
-          <p:nvPr/>
-        </p:nvSpPr>
-        <p:spPr>
-          <a:xfrm>
-            <a:off x="4480560" y="2468880"/>
-            <a:ext cx="7132320" cy="2194560"/>
-          </a:xfrm>
-          <a:prstGeom prst="rect">
-            <a:avLst/>
-          </a:prstGeom>
-          <a:noFill/>
-        </p:spPr>
-        <p:txBody>
-          <a:bodyPr wrap="square" anchor="t" lIns="0" rIns="0" tIns="0" bIns="0">
-            <a:spAutoFit/>
-          </a:bodyPr>
-          <a:lstStyle/>
-          <a:p>
-            <a:r>
-              <a:rPr sz="1600" b="1" i="0">
-                <a:solidFill>
-                  <a:srgbClr val="27B5CE"/>
-                </a:solidFill>
-                <a:latin typeface="Roboto"/>
-              </a:rPr>
-              <a:t>SECTION</a:t>
-            </a:r>
-          </a:p>
-          <a:p>
-            <a:pPr>
-              <a:spcBef>
-                <a:spcPts val="600"/>
-              </a:spcBef>
-            </a:pPr>
-            <a:r>
-              <a:rPr sz="3800" b="1" i="0">
-                <a:solidFill>
-                  <a:srgbClr val="2A2929"/>
-                </a:solidFill>
-                <a:latin typeface="Roboto"/>
-              </a:rPr>
-              <a:t>Vendor protections, prioritisation &amp; other components</a:t>
-            </a:r>
-          </a:p>
-          <a:p>
-            <a:pPr>
-              <a:spcBef>
-                <a:spcPts val="1000"/>
-              </a:spcBef>
-            </a:pPr>
-            <a:r>
-              <a:rPr sz="2000" b="0" i="1">
-                <a:solidFill>
-                  <a:srgbClr val="484848"/>
-                </a:solidFill>
-                <a:latin typeface="Roboto Light"/>
-              </a:rPr>
-              <a:t>native protections, priorities, and the rest of the plan</a:t>
-            </a:r>
+          <p:cNvPr id="4" name="Rectangle 3"/>
+          <p:cNvSpPr/>
+          <p:nvPr/>
+        </p:nvSpPr>
+        <p:spPr>
+          <a:xfrm>
+            <a:off x="640080" y="1965960"/>
+            <a:ext cx="10927080" cy="841248"/>
+          </a:xfrm>
+          <a:prstGeom prst="rect">
+            <a:avLst/>
+          </a:prstGeom>
+          <a:solidFill>
+            <a:srgbClr val="FFFFFF"/>
+          </a:solidFill>
+          <a:ln w="12700">
+            <a:solidFill>
+              <a:srgbClr val="CCCCCC"/>
+            </a:solidFill>
+          </a:ln>
+          <a:effectLst/>
+        </p:spPr>
+        <p:style>
+          <a:lnRef idx="1">
+            <a:schemeClr val="accent1"/>
+          </a:lnRef>
+          <a:fillRef idx="3">
+            <a:schemeClr val="accent1"/>
+          </a:fillRef>
+          <a:effectRef idx="2">
+            <a:schemeClr val="accent1"/>
+          </a:effectRef>
+          <a:fontRef idx="minor">
+            <a:schemeClr val="lt1"/>
+          </a:fontRef>
+        </p:style>
+        <p:txBody>
+          <a:bodyPr rtlCol="0" anchor="ctr"/>
+          <a:lstStyle/>
+          <a:p>
+            <a:pPr algn="ctr"/>
           </a:p>
         </p:txBody>
       </p:sp>
@@ -11475,14 +13796,14 @@
         </p:nvSpPr>
         <p:spPr>
           <a:xfrm>
-            <a:off x="0" y="6565392"/>
-            <a:ext cx="12191695" cy="38100"/>
+            <a:off x="640080" y="1965960"/>
+            <a:ext cx="109728" cy="841248"/>
           </a:xfrm>
           <a:prstGeom prst="rect">
             <a:avLst/>
           </a:prstGeom>
           <a:solidFill>
-            <a:srgbClr val="27B5CE"/>
+            <a:srgbClr val="92268F"/>
           </a:solidFill>
           <a:ln>
             <a:noFill/>
@@ -11519,6 +13840,347 @@
         </p:nvSpPr>
         <p:spPr>
           <a:xfrm>
+            <a:off x="960120" y="1965960"/>
+            <a:ext cx="10424160" cy="841248"/>
+          </a:xfrm>
+          <a:prstGeom prst="rect">
+            <a:avLst/>
+          </a:prstGeom>
+          <a:noFill/>
+        </p:spPr>
+        <p:txBody>
+          <a:bodyPr wrap="square" anchor="ctr" lIns="0" rIns="0" tIns="0" bIns="0">
+            <a:spAutoFit/>
+          </a:bodyPr>
+          <a:lstStyle/>
+          <a:p>
+            <a:pPr>
+              <a:lnSpc>
+                <a:spcPct val="100000"/>
+              </a:lnSpc>
+            </a:pPr>
+            <a:r>
+              <a:rPr sz="1700" b="0" i="0">
+                <a:solidFill>
+                  <a:srgbClr val="2A2929"/>
+                </a:solidFill>
+                <a:latin typeface="Roboto"/>
+              </a:rPr>
+              <a:t>Four strategies trade recovery speed against standing cost.</a:t>
+            </a:r>
+          </a:p>
+        </p:txBody>
+      </p:sp>
+      <p:sp>
+        <p:nvSpPr>
+          <p:cNvPr id="7" name="Rectangle 6"/>
+          <p:cNvSpPr/>
+          <p:nvPr/>
+        </p:nvSpPr>
+        <p:spPr>
+          <a:xfrm>
+            <a:off x="640080" y="2916936"/>
+            <a:ext cx="10927080" cy="841248"/>
+          </a:xfrm>
+          <a:prstGeom prst="rect">
+            <a:avLst/>
+          </a:prstGeom>
+          <a:solidFill>
+            <a:srgbClr val="FFFFFF"/>
+          </a:solidFill>
+          <a:ln w="12700">
+            <a:solidFill>
+              <a:srgbClr val="CCCCCC"/>
+            </a:solidFill>
+          </a:ln>
+          <a:effectLst/>
+        </p:spPr>
+        <p:style>
+          <a:lnRef idx="1">
+            <a:schemeClr val="accent1"/>
+          </a:lnRef>
+          <a:fillRef idx="3">
+            <a:schemeClr val="accent1"/>
+          </a:fillRef>
+          <a:effectRef idx="2">
+            <a:schemeClr val="accent1"/>
+          </a:effectRef>
+          <a:fontRef idx="minor">
+            <a:schemeClr val="lt1"/>
+          </a:fontRef>
+        </p:style>
+        <p:txBody>
+          <a:bodyPr rtlCol="0" anchor="ctr"/>
+          <a:lstStyle/>
+          <a:p>
+            <a:pPr algn="ctr"/>
+          </a:p>
+        </p:txBody>
+      </p:sp>
+      <p:sp>
+        <p:nvSpPr>
+          <p:cNvPr id="8" name="Rectangle 7"/>
+          <p:cNvSpPr/>
+          <p:nvPr/>
+        </p:nvSpPr>
+        <p:spPr>
+          <a:xfrm>
+            <a:off x="640080" y="2916936"/>
+            <a:ext cx="109728" cy="841248"/>
+          </a:xfrm>
+          <a:prstGeom prst="rect">
+            <a:avLst/>
+          </a:prstGeom>
+          <a:solidFill>
+            <a:srgbClr val="92268F"/>
+          </a:solidFill>
+          <a:ln>
+            <a:noFill/>
+          </a:ln>
+          <a:effectLst/>
+        </p:spPr>
+        <p:style>
+          <a:lnRef idx="1">
+            <a:schemeClr val="accent1"/>
+          </a:lnRef>
+          <a:fillRef idx="3">
+            <a:schemeClr val="accent1"/>
+          </a:fillRef>
+          <a:effectRef idx="2">
+            <a:schemeClr val="accent1"/>
+          </a:effectRef>
+          <a:fontRef idx="minor">
+            <a:schemeClr val="lt1"/>
+          </a:fontRef>
+        </p:style>
+        <p:txBody>
+          <a:bodyPr rtlCol="0" anchor="ctr"/>
+          <a:lstStyle/>
+          <a:p>
+            <a:pPr algn="ctr"/>
+          </a:p>
+        </p:txBody>
+      </p:sp>
+      <p:sp>
+        <p:nvSpPr>
+          <p:cNvPr id="9" name="TextBox 8"/>
+          <p:cNvSpPr txBox="1"/>
+          <p:nvPr/>
+        </p:nvSpPr>
+        <p:spPr>
+          <a:xfrm>
+            <a:off x="960120" y="2916936"/>
+            <a:ext cx="10424160" cy="841248"/>
+          </a:xfrm>
+          <a:prstGeom prst="rect">
+            <a:avLst/>
+          </a:prstGeom>
+          <a:noFill/>
+        </p:spPr>
+        <p:txBody>
+          <a:bodyPr wrap="square" anchor="ctr" lIns="0" rIns="0" tIns="0" bIns="0">
+            <a:spAutoFit/>
+          </a:bodyPr>
+          <a:lstStyle/>
+          <a:p>
+            <a:pPr>
+              <a:lnSpc>
+                <a:spcPct val="100000"/>
+              </a:lnSpc>
+            </a:pPr>
+            <a:r>
+              <a:rPr sz="1700" b="0" i="0">
+                <a:solidFill>
+                  <a:srgbClr val="2A2929"/>
+                </a:solidFill>
+                <a:latin typeface="Roboto"/>
+              </a:rPr>
+              <a:t>Show the range considered; recommend the simplest that fits.</a:t>
+            </a:r>
+          </a:p>
+        </p:txBody>
+      </p:sp>
+      <p:sp>
+        <p:nvSpPr>
+          <p:cNvPr id="10" name="Rectangle 9"/>
+          <p:cNvSpPr/>
+          <p:nvPr/>
+        </p:nvSpPr>
+        <p:spPr>
+          <a:xfrm>
+            <a:off x="640080" y="3867912"/>
+            <a:ext cx="10927080" cy="841248"/>
+          </a:xfrm>
+          <a:prstGeom prst="rect">
+            <a:avLst/>
+          </a:prstGeom>
+          <a:solidFill>
+            <a:srgbClr val="FFFFFF"/>
+          </a:solidFill>
+          <a:ln w="12700">
+            <a:solidFill>
+              <a:srgbClr val="CCCCCC"/>
+            </a:solidFill>
+          </a:ln>
+          <a:effectLst/>
+        </p:spPr>
+        <p:style>
+          <a:lnRef idx="1">
+            <a:schemeClr val="accent1"/>
+          </a:lnRef>
+          <a:fillRef idx="3">
+            <a:schemeClr val="accent1"/>
+          </a:fillRef>
+          <a:effectRef idx="2">
+            <a:schemeClr val="accent1"/>
+          </a:effectRef>
+          <a:fontRef idx="minor">
+            <a:schemeClr val="lt1"/>
+          </a:fontRef>
+        </p:style>
+        <p:txBody>
+          <a:bodyPr rtlCol="0" anchor="ctr"/>
+          <a:lstStyle/>
+          <a:p>
+            <a:pPr algn="ctr"/>
+          </a:p>
+        </p:txBody>
+      </p:sp>
+      <p:sp>
+        <p:nvSpPr>
+          <p:cNvPr id="11" name="Rectangle 10"/>
+          <p:cNvSpPr/>
+          <p:nvPr/>
+        </p:nvSpPr>
+        <p:spPr>
+          <a:xfrm>
+            <a:off x="640080" y="3867912"/>
+            <a:ext cx="109728" cy="841248"/>
+          </a:xfrm>
+          <a:prstGeom prst="rect">
+            <a:avLst/>
+          </a:prstGeom>
+          <a:solidFill>
+            <a:srgbClr val="92268F"/>
+          </a:solidFill>
+          <a:ln>
+            <a:noFill/>
+          </a:ln>
+          <a:effectLst/>
+        </p:spPr>
+        <p:style>
+          <a:lnRef idx="1">
+            <a:schemeClr val="accent1"/>
+          </a:lnRef>
+          <a:fillRef idx="3">
+            <a:schemeClr val="accent1"/>
+          </a:fillRef>
+          <a:effectRef idx="2">
+            <a:schemeClr val="accent1"/>
+          </a:effectRef>
+          <a:fontRef idx="minor">
+            <a:schemeClr val="lt1"/>
+          </a:fontRef>
+        </p:style>
+        <p:txBody>
+          <a:bodyPr rtlCol="0" anchor="ctr"/>
+          <a:lstStyle/>
+          <a:p>
+            <a:pPr algn="ctr"/>
+          </a:p>
+        </p:txBody>
+      </p:sp>
+      <p:sp>
+        <p:nvSpPr>
+          <p:cNvPr id="12" name="TextBox 11"/>
+          <p:cNvSpPr txBox="1"/>
+          <p:nvPr/>
+        </p:nvSpPr>
+        <p:spPr>
+          <a:xfrm>
+            <a:off x="960120" y="3867912"/>
+            <a:ext cx="10424160" cy="841248"/>
+          </a:xfrm>
+          <a:prstGeom prst="rect">
+            <a:avLst/>
+          </a:prstGeom>
+          <a:noFill/>
+        </p:spPr>
+        <p:txBody>
+          <a:bodyPr wrap="square" anchor="ctr" lIns="0" rIns="0" tIns="0" bIns="0">
+            <a:spAutoFit/>
+          </a:bodyPr>
+          <a:lstStyle/>
+          <a:p>
+            <a:pPr>
+              <a:lnSpc>
+                <a:spcPct val="100000"/>
+              </a:lnSpc>
+            </a:pPr>
+            <a:r>
+              <a:rPr sz="1700" b="0" i="0">
+                <a:solidFill>
+                  <a:srgbClr val="2A2929"/>
+                </a:solidFill>
+                <a:latin typeface="Roboto"/>
+              </a:rPr>
+              <a:t>Every elimination cites an objective.</a:t>
+            </a:r>
+          </a:p>
+        </p:txBody>
+      </p:sp>
+      <p:sp>
+        <p:nvSpPr>
+          <p:cNvPr id="13" name="Rectangle 12"/>
+          <p:cNvSpPr/>
+          <p:nvPr/>
+        </p:nvSpPr>
+        <p:spPr>
+          <a:xfrm>
+            <a:off x="0" y="6565392"/>
+            <a:ext cx="12191695" cy="38100"/>
+          </a:xfrm>
+          <a:prstGeom prst="rect">
+            <a:avLst/>
+          </a:prstGeom>
+          <a:solidFill>
+            <a:srgbClr val="92268F"/>
+          </a:solidFill>
+          <a:ln>
+            <a:noFill/>
+          </a:ln>
+          <a:effectLst/>
+        </p:spPr>
+        <p:style>
+          <a:lnRef idx="1">
+            <a:schemeClr val="accent1"/>
+          </a:lnRef>
+          <a:fillRef idx="3">
+            <a:schemeClr val="accent1"/>
+          </a:fillRef>
+          <a:effectRef idx="2">
+            <a:schemeClr val="accent1"/>
+          </a:effectRef>
+          <a:fontRef idx="minor">
+            <a:schemeClr val="lt1"/>
+          </a:fontRef>
+        </p:style>
+        <p:txBody>
+          <a:bodyPr rtlCol="0" anchor="ctr"/>
+          <a:lstStyle/>
+          <a:p>
+            <a:pPr algn="ctr"/>
+          </a:p>
+        </p:txBody>
+      </p:sp>
+      <p:sp>
+        <p:nvSpPr>
+          <p:cNvPr id="14" name="TextBox 13"/>
+          <p:cNvSpPr txBox="1"/>
+          <p:nvPr/>
+        </p:nvSpPr>
+        <p:spPr>
+          <a:xfrm>
             <a:off x="502920" y="6400800"/>
             <a:ext cx="5486400" cy="320040"/>
           </a:xfrm>
@@ -11556,7 +14218,7 @@
       </p:sp>
       <p:sp>
         <p:nvSpPr>
-          <p:cNvPr id="7" name="TextBox 6"/>
+          <p:cNvPr id="15" name="TextBox 14"/>
           <p:cNvSpPr txBox="1"/>
           <p:nvPr/>
         </p:nvSpPr>
@@ -11584,7 +14246,7 @@
                 </a:solidFill>
                 <a:latin typeface="Roboto"/>
               </a:rPr>
-              <a:t/>
+              <a:t>6</a:t>
             </a:r>
           </a:p>
         </p:txBody>
@@ -11617,48 +14279,14 @@
       <p:grpSpPr/>
       <p:sp>
         <p:nvSpPr>
-          <p:cNvPr id="2" name="TextBox 1"/>
-          <p:cNvSpPr txBox="1"/>
-          <p:nvPr/>
-        </p:nvSpPr>
-        <p:spPr>
-          <a:xfrm>
-            <a:off x="640080" y="457200"/>
-            <a:ext cx="10881360" cy="960120"/>
-          </a:xfrm>
-          <a:prstGeom prst="rect">
-            <a:avLst/>
-          </a:prstGeom>
-          <a:noFill/>
-        </p:spPr>
-        <p:txBody>
-          <a:bodyPr wrap="square" anchor="t" lIns="0" rIns="0" tIns="0" bIns="0">
-            <a:spAutoFit/>
-          </a:bodyPr>
-          <a:lstStyle/>
-          <a:p>
-            <a:r>
-              <a:rPr sz="2800" b="1" i="0">
-                <a:solidFill>
-                  <a:srgbClr val="2A2929"/>
-                </a:solidFill>
-                <a:latin typeface="Roboto"/>
-              </a:rPr>
-              <a:t>Lean on native protections &amp; prioritise</a:t>
-            </a:r>
-          </a:p>
-        </p:txBody>
-      </p:sp>
-      <p:sp>
-        <p:nvSpPr>
-          <p:cNvPr id="3" name="Rectangle 2"/>
+          <p:cNvPr id="2" name="Rectangle 1"/>
           <p:cNvSpPr/>
           <p:nvPr/>
         </p:nvSpPr>
         <p:spPr>
           <a:xfrm>
-            <a:off x="658368" y="1371600"/>
-            <a:ext cx="1463040" cy="50800"/>
+            <a:off x="0" y="0"/>
+            <a:ext cx="3931920" cy="6858000"/>
           </a:xfrm>
           <a:prstGeom prst="rect">
             <a:avLst/>
@@ -11695,14 +14323,48 @@
       </p:sp>
       <p:sp>
         <p:nvSpPr>
+          <p:cNvPr id="3" name="TextBox 2"/>
+          <p:cNvSpPr txBox="1"/>
+          <p:nvPr/>
+        </p:nvSpPr>
+        <p:spPr>
+          <a:xfrm>
+            <a:off x="365760" y="2103120"/>
+            <a:ext cx="3291840" cy="2194560"/>
+          </a:xfrm>
+          <a:prstGeom prst="rect">
+            <a:avLst/>
+          </a:prstGeom>
+          <a:noFill/>
+        </p:spPr>
+        <p:txBody>
+          <a:bodyPr wrap="square" anchor="t" lIns="0" rIns="0" tIns="0" bIns="0">
+            <a:spAutoFit/>
+          </a:bodyPr>
+          <a:lstStyle/>
+          <a:p>
+            <a:r>
+              <a:rPr sz="13000" b="1" i="0">
+                <a:solidFill>
+                  <a:srgbClr val="FFFFFF"/>
+                </a:solidFill>
+                <a:latin typeface="Roboto"/>
+              </a:rPr>
+              <a:t>02</a:t>
+            </a:r>
+          </a:p>
+        </p:txBody>
+      </p:sp>
+      <p:sp>
+        <p:nvSpPr>
           <p:cNvPr id="4" name="TextBox 3"/>
           <p:cNvSpPr txBox="1"/>
           <p:nvPr/>
         </p:nvSpPr>
         <p:spPr>
           <a:xfrm>
-            <a:off x="658368" y="1691640"/>
-            <a:ext cx="10881360" cy="4480560"/>
+            <a:off x="4480560" y="2468880"/>
+            <a:ext cx="7132320" cy="2194560"/>
           </a:xfrm>
           <a:prstGeom prst="rect">
             <a:avLst/>
@@ -11710,101 +14372,51 @@
           <a:noFill/>
         </p:spPr>
         <p:txBody>
-          <a:bodyPr wrap="square" anchor="ctr" lIns="0" rIns="0" tIns="0" bIns="0">
+          <a:bodyPr wrap="square" anchor="t" lIns="0" rIns="0" tIns="0" bIns="0">
             <a:spAutoFit/>
           </a:bodyPr>
           <a:lstStyle/>
           <a:p>
-            <a:pPr marL="0" indent="0">
-              <a:lnSpc>
-                <a:spcPct val="105000"/>
-              </a:lnSpc>
+            <a:r>
+              <a:rPr sz="1600" b="1" i="0">
+                <a:solidFill>
+                  <a:srgbClr val="27B5CE"/>
+                </a:solidFill>
+                <a:latin typeface="Roboto"/>
+              </a:rPr>
+              <a:t>SECTION</a:t>
+            </a:r>
+          </a:p>
+          <a:p>
+            <a:pPr>
               <a:spcBef>
-                <a:spcPts val="0"/>
+                <a:spcPts val="600"/>
               </a:spcBef>
-              <a:spcAft>
+            </a:pPr>
+            <a:r>
+              <a:rPr sz="3800" b="1" i="0">
+                <a:solidFill>
+                  <a:srgbClr val="2A2929"/>
+                </a:solidFill>
+                <a:latin typeface="Roboto"/>
+              </a:rPr>
+              <a:t>The rest of the plan</a:t>
+            </a:r>
+          </a:p>
+          <a:p>
+            <a:pPr>
+              <a:spcBef>
                 <a:spcPts val="1000"/>
-              </a:spcAft>
+              </a:spcBef>
             </a:pPr>
             <a:r>
-              <a:rPr sz="2400" b="1" i="0">
-                <a:solidFill>
-                  <a:srgbClr val="EDAB0C"/>
-                </a:solidFill>
-                <a:latin typeface="Roboto"/>
-              </a:rPr>
-              <a:t>■  </a:t>
-            </a:r>
-            <a:r>
-              <a:rPr sz="2400" b="0" i="0">
-                <a:solidFill>
-                  <a:srgbClr val="2A2929"/>
-                </a:solidFill>
-                <a:latin typeface="Roboto"/>
-              </a:rPr>
-              <a:t>Use the vendor's native protections: automated backups, cross-region copy, durable/immutable storage.</a:t>
-            </a:r>
-          </a:p>
-          <a:p>
-            <a:pPr marL="0" indent="0">
-              <a:lnSpc>
-                <a:spcPct val="105000"/>
-              </a:lnSpc>
-              <a:spcBef>
-                <a:spcPts val="0"/>
-              </a:spcBef>
-              <a:spcAft>
-                <a:spcPts val="1000"/>
-              </a:spcAft>
-            </a:pPr>
-            <a:r>
-              <a:rPr sz="2400" b="1" i="0">
-                <a:solidFill>
-                  <a:srgbClr val="EDAB0C"/>
-                </a:solidFill>
-                <a:latin typeface="Roboto"/>
-              </a:rPr>
-              <a:t>■  </a:t>
-            </a:r>
-            <a:r>
-              <a:rPr sz="2400" b="0" i="0">
-                <a:solidFill>
-                  <a:srgbClr val="2A2929"/>
-                </a:solidFill>
-                <a:latin typeface="Roboto"/>
-              </a:rPr>
-              <a:t>Prioritise the recovery against the risks — restore the highest-severity, business-critical parts first.</a:t>
-            </a:r>
-          </a:p>
-          <a:p>
-            <a:pPr marL="0" indent="0">
-              <a:lnSpc>
-                <a:spcPct val="105000"/>
-              </a:lnSpc>
-              <a:spcBef>
-                <a:spcPts val="0"/>
-              </a:spcBef>
-              <a:spcAft>
-                <a:spcPts val="1000"/>
-              </a:spcAft>
-            </a:pPr>
-            <a:r>
-              <a:rPr sz="2400" b="1" i="0">
-                <a:solidFill>
-                  <a:srgbClr val="EDAB0C"/>
-                </a:solidFill>
-                <a:latin typeface="Roboto"/>
-              </a:rPr>
-              <a:t>■  </a:t>
-            </a:r>
-            <a:r>
-              <a:rPr sz="2400" b="0" i="0">
-                <a:solidFill>
-                  <a:srgbClr val="2A2929"/>
-                </a:solidFill>
-                <a:latin typeface="Roboto"/>
-              </a:rPr>
-              <a:t>Native durability does the heavy lifting; your plan sequences and governs it.</a:t>
+              <a:rPr sz="2000" b="0" i="1">
+                <a:solidFill>
+                  <a:srgbClr val="484848"/>
+                </a:solidFill>
+                <a:latin typeface="Roboto Light"/>
+              </a:rPr>
+              <a:t>native protections, priorities, and the parts everyone forgets</a:t>
             </a:r>
           </a:p>
         </p:txBody>
@@ -11926,7 +14538,7 @@
                 </a:solidFill>
                 <a:latin typeface="Roboto"/>
               </a:rPr>
-              <a:t>6</a:t>
+              <a:t/>
             </a:r>
           </a:p>
         </p:txBody>
